--- a/CostVision-Agentic-AI-Management-Presentation.pptx
+++ b/CostVision-Agentic-AI-Management-Presentation.pptx
@@ -156,7 +156,7 @@
           </c:tx>
           <c:spPr>
             <a:solidFill>
-              <a:srgbClr val="6B7280"/>
+              <a:srgbClr val="686F7D"/>
             </a:solidFill>
             <a:ln>
               <a:noFill/>
@@ -208,7 +208,7 @@
           </c:tx>
           <c:spPr>
             <a:solidFill>
-              <a:srgbClr val="2E8B57"/>
+              <a:srgbClr val="2A7F50"/>
             </a:solidFill>
             <a:ln>
               <a:noFill/>
@@ -337,7 +337,7 @@
             <a:pPr>
               <a:defRPr sz="1000">
                 <a:solidFill>
-                  <a:srgbClr val="6B7280"/>
+                  <a:srgbClr val="686F7D"/>
                 </a:solidFill>
               </a:defRPr>
             </a:pPr>
@@ -403,7 +403,7 @@
           </c:tx>
           <c:spPr>
             <a:solidFill>
-              <a:srgbClr val="B7791F"/>
+              <a:srgbClr val="99651A"/>
             </a:solidFill>
             <a:ln>
               <a:noFill/>
@@ -532,7 +532,7 @@
             <a:pPr>
               <a:defRPr sz="1000">
                 <a:solidFill>
-                  <a:srgbClr val="6B7280"/>
+                  <a:srgbClr val="686F7D"/>
                 </a:solidFill>
               </a:defRPr>
             </a:pPr>
@@ -585,7 +585,7 @@
           </c:tx>
           <c:spPr>
             <a:solidFill>
-              <a:srgbClr val="6B7280"/>
+              <a:srgbClr val="686F7D"/>
             </a:solidFill>
             <a:ln>
               <a:noFill/>
@@ -778,7 +778,7 @@
             <a:pPr>
               <a:defRPr sz="1000">
                 <a:solidFill>
-                  <a:srgbClr val="6B7280"/>
+                  <a:srgbClr val="686F7D"/>
                 </a:solidFill>
               </a:defRPr>
             </a:pPr>
@@ -6121,7 +6121,7 @@
             <a:r>
               <a:rPr sz="1300" b="1">
                 <a:solidFill>
-                  <a:srgbClr val="0E8074"/>
+                  <a:srgbClr val="0D7D71"/>
                 </a:solidFill>
                 <a:latin typeface="Calibri"/>
               </a:rPr>
@@ -6231,7 +6231,7 @@
             <a:r>
               <a:rPr sz="1300" b="1">
                 <a:solidFill>
-                  <a:srgbClr val="2E8B57"/>
+                  <a:srgbClr val="2A7F50"/>
                 </a:solidFill>
                 <a:latin typeface="Calibri"/>
               </a:rPr>
@@ -6518,7 +6518,7 @@
             <a:r>
               <a:rPr sz="750" b="0" i="0">
                 <a:solidFill>
-                  <a:srgbClr val="6B7280"/>
+                  <a:srgbClr val="686F7D"/>
                 </a:solidFill>
                 <a:latin typeface="Calibri"/>
               </a:rPr>
@@ -7082,7 +7082,7 @@
             <a:avLst/>
           </a:prstGeom>
           <a:solidFill>
-            <a:srgbClr val="0E8074"/>
+            <a:srgbClr val="0D7D71"/>
           </a:solidFill>
           <a:ln>
             <a:noFill/>
@@ -7144,7 +7144,7 @@
             <a:r>
               <a:rPr sz="1500" b="1" i="0">
                 <a:solidFill>
-                  <a:srgbClr val="0E8074"/>
+                  <a:srgbClr val="0D7D71"/>
                 </a:solidFill>
                 <a:latin typeface="Segoe UI Emoji"/>
               </a:rPr>
@@ -7153,7 +7153,7 @@
             <a:r>
               <a:rPr sz="1500" b="1" i="0">
                 <a:solidFill>
-                  <a:srgbClr val="0E8074"/>
+                  <a:srgbClr val="0D7D71"/>
                 </a:solidFill>
                 <a:latin typeface="Calibri"/>
               </a:rPr>
@@ -7265,7 +7265,7 @@
             <a:avLst/>
           </a:prstGeom>
           <a:solidFill>
-            <a:srgbClr val="2E8B57"/>
+            <a:srgbClr val="2A7F50"/>
           </a:solidFill>
           <a:ln>
             <a:noFill/>
@@ -7327,7 +7327,7 @@
             <a:r>
               <a:rPr sz="1500" b="1" i="0">
                 <a:solidFill>
-                  <a:srgbClr val="2E8B57"/>
+                  <a:srgbClr val="2A7F50"/>
                 </a:solidFill>
                 <a:latin typeface="Segoe UI Emoji"/>
               </a:rPr>
@@ -7336,7 +7336,7 @@
             <a:r>
               <a:rPr sz="1500" b="1" i="0">
                 <a:solidFill>
-                  <a:srgbClr val="2E8B57"/>
+                  <a:srgbClr val="2A7F50"/>
                 </a:solidFill>
                 <a:latin typeface="Calibri"/>
               </a:rPr>
@@ -7420,7 +7420,7 @@
             <a:r>
               <a:rPr sz="1200" b="0" i="1">
                 <a:solidFill>
-                  <a:srgbClr val="6B7280"/>
+                  <a:srgbClr val="686F7D"/>
                 </a:solidFill>
                 <a:latin typeface="Calibri"/>
               </a:rPr>
@@ -7621,7 +7621,7 @@
             <a:r>
               <a:rPr sz="750" b="0" i="0">
                 <a:solidFill>
-                  <a:srgbClr val="6B7280"/>
+                  <a:srgbClr val="686F7D"/>
                 </a:solidFill>
                 <a:latin typeface="Calibri"/>
               </a:rPr>
@@ -7898,7 +7898,7 @@
             <a:r>
               <a:rPr sz="1100" b="0" i="0">
                 <a:solidFill>
-                  <a:srgbClr val="6B7280"/>
+                  <a:srgbClr val="686F7D"/>
                 </a:solidFill>
                 <a:latin typeface="Calibri"/>
               </a:rPr>
@@ -7959,7 +7959,7 @@
             <a:r>
               <a:rPr sz="1100" b="0" i="0">
                 <a:solidFill>
-                  <a:srgbClr val="6B7280"/>
+                  <a:srgbClr val="686F7D"/>
                 </a:solidFill>
                 <a:latin typeface="Calibri"/>
               </a:rPr>
@@ -8020,7 +8020,7 @@
             <a:r>
               <a:rPr sz="1100" b="0" i="0">
                 <a:solidFill>
-                  <a:srgbClr val="6B7280"/>
+                  <a:srgbClr val="686F7D"/>
                 </a:solidFill>
                 <a:latin typeface="Calibri"/>
               </a:rPr>
@@ -8081,7 +8081,7 @@
             <a:r>
               <a:rPr sz="1100" b="0" i="0">
                 <a:solidFill>
-                  <a:srgbClr val="6B7280"/>
+                  <a:srgbClr val="686F7D"/>
                 </a:solidFill>
                 <a:latin typeface="Calibri"/>
               </a:rPr>
@@ -8169,7 +8169,7 @@
             <a:r>
               <a:rPr sz="1600" b="1" i="0">
                 <a:solidFill>
-                  <a:srgbClr val="2E8B57"/>
+                  <a:srgbClr val="2A7F50"/>
                 </a:solidFill>
                 <a:latin typeface="Calibri"/>
               </a:rPr>
@@ -8211,7 +8211,7 @@
             <a:r>
               <a:rPr sz="1300" b="1" i="0">
                 <a:solidFill>
-                  <a:srgbClr val="2E8B57"/>
+                  <a:srgbClr val="2A7F50"/>
                 </a:solidFill>
                 <a:latin typeface="Calibri"/>
               </a:rPr>
@@ -8262,7 +8262,7 @@
             <a:r>
               <a:rPr sz="1300" b="1" i="0">
                 <a:solidFill>
-                  <a:srgbClr val="2E8B57"/>
+                  <a:srgbClr val="2A7F50"/>
                 </a:solidFill>
                 <a:latin typeface="Calibri"/>
               </a:rPr>
@@ -8313,7 +8313,7 @@
             <a:r>
               <a:rPr sz="1300" b="1" i="0">
                 <a:solidFill>
-                  <a:srgbClr val="2E8B57"/>
+                  <a:srgbClr val="2A7F50"/>
                 </a:solidFill>
                 <a:latin typeface="Calibri"/>
               </a:rPr>
@@ -8364,7 +8364,7 @@
             <a:r>
               <a:rPr sz="1300" b="1" i="0">
                 <a:solidFill>
-                  <a:srgbClr val="2E8B57"/>
+                  <a:srgbClr val="2A7F50"/>
                 </a:solidFill>
                 <a:latin typeface="Calibri"/>
               </a:rPr>
@@ -8415,7 +8415,7 @@
             <a:r>
               <a:rPr sz="1300" b="1" i="0">
                 <a:solidFill>
-                  <a:srgbClr val="2E8B57"/>
+                  <a:srgbClr val="2A7F50"/>
                 </a:solidFill>
                 <a:latin typeface="Calibri"/>
               </a:rPr>
@@ -8466,7 +8466,7 @@
             <a:r>
               <a:rPr sz="1300" b="1" i="0">
                 <a:solidFill>
-                  <a:srgbClr val="2E8B57"/>
+                  <a:srgbClr val="2A7F50"/>
                 </a:solidFill>
                 <a:latin typeface="Calibri"/>
               </a:rPr>
@@ -8676,7 +8676,7 @@
             <a:r>
               <a:rPr sz="750" b="0" i="0">
                 <a:solidFill>
-                  <a:srgbClr val="6B7280"/>
+                  <a:srgbClr val="686F7D"/>
                 </a:solidFill>
                 <a:latin typeface="Calibri"/>
               </a:rPr>
@@ -8934,7 +8934,7 @@
             <a:r>
               <a:rPr sz="1400" b="1" i="0">
                 <a:solidFill>
-                  <a:srgbClr val="2E8B57"/>
+                  <a:srgbClr val="2A7F50"/>
                 </a:solidFill>
                 <a:latin typeface="Calibri"/>
               </a:rPr>
@@ -9064,7 +9064,7 @@
             <a:r>
               <a:rPr sz="1400" b="1" i="0">
                 <a:solidFill>
-                  <a:srgbClr val="2E8B57"/>
+                  <a:srgbClr val="2A7F50"/>
                 </a:solidFill>
                 <a:latin typeface="Calibri"/>
               </a:rPr>
@@ -9194,7 +9194,7 @@
             <a:r>
               <a:rPr sz="1400" b="1" i="0">
                 <a:solidFill>
-                  <a:srgbClr val="2E8B57"/>
+                  <a:srgbClr val="2A7F50"/>
                 </a:solidFill>
                 <a:latin typeface="Calibri"/>
               </a:rPr>
@@ -9324,7 +9324,7 @@
             <a:r>
               <a:rPr sz="1400" b="1" i="0">
                 <a:solidFill>
-                  <a:srgbClr val="0E8074"/>
+                  <a:srgbClr val="0D7D71"/>
                 </a:solidFill>
                 <a:latin typeface="Calibri"/>
               </a:rPr>
@@ -9882,7 +9882,7 @@
             <a:r>
               <a:rPr sz="750" b="0" i="0">
                 <a:solidFill>
-                  <a:srgbClr val="6B7280"/>
+                  <a:srgbClr val="686F7D"/>
                 </a:solidFill>
                 <a:latin typeface="Calibri"/>
               </a:rPr>
@@ -10272,7 +10272,7 @@
             <a:avLst/>
           </a:prstGeom>
           <a:solidFill>
-            <a:srgbClr val="2E8B57"/>
+            <a:srgbClr val="2A7F50"/>
           </a:solidFill>
           <a:ln>
             <a:noFill/>
@@ -10334,7 +10334,7 @@
             <a:r>
               <a:rPr sz="1800" b="0" i="0">
                 <a:solidFill>
-                  <a:srgbClr val="2E8B57"/>
+                  <a:srgbClr val="2A7F50"/>
                 </a:solidFill>
                 <a:latin typeface="Segoe UI Emoji"/>
               </a:rPr>
@@ -10343,7 +10343,7 @@
             <a:r>
               <a:rPr sz="1800" b="0" i="0">
                 <a:solidFill>
-                  <a:srgbClr val="2E8B57"/>
+                  <a:srgbClr val="2A7F50"/>
                 </a:solidFill>
                 <a:latin typeface="Calibri"/>
               </a:rPr>
@@ -10352,7 +10352,7 @@
             <a:r>
               <a:rPr sz="1600" b="1" i="0">
                 <a:solidFill>
-                  <a:srgbClr val="2E8B57"/>
+                  <a:srgbClr val="2A7F50"/>
                 </a:solidFill>
                 <a:latin typeface="Calibri"/>
               </a:rPr>
@@ -11030,7 +11030,7 @@
             <a:r>
               <a:rPr sz="750" b="0" i="0">
                 <a:solidFill>
-                  <a:srgbClr val="6B7280"/>
+                  <a:srgbClr val="686F7D"/>
                 </a:solidFill>
                 <a:latin typeface="Calibri"/>
               </a:rPr>
@@ -11421,7 +11421,7 @@
             <a:r>
               <a:rPr sz="1100" b="0" i="1">
                 <a:solidFill>
-                  <a:srgbClr val="6B7280"/>
+                  <a:srgbClr val="686F7D"/>
                 </a:solidFill>
                 <a:latin typeface="Calibri"/>
               </a:rPr>
@@ -11491,7 +11491,7 @@
             <a:avLst/>
           </a:prstGeom>
           <a:solidFill>
-            <a:srgbClr val="2E8B57"/>
+            <a:srgbClr val="2A7F50"/>
           </a:solidFill>
           <a:ln>
             <a:noFill/>
@@ -11553,7 +11553,7 @@
             <a:r>
               <a:rPr sz="1400" b="1" i="0">
                 <a:solidFill>
-                  <a:srgbClr val="2E8B57"/>
+                  <a:srgbClr val="2A7F50"/>
                 </a:solidFill>
                 <a:latin typeface="Calibri"/>
               </a:rPr>
@@ -11633,7 +11633,7 @@
             <a:r>
               <a:rPr sz="1100" b="0" i="1">
                 <a:solidFill>
-                  <a:srgbClr val="2E8B57"/>
+                  <a:srgbClr val="2A7F50"/>
                 </a:solidFill>
                 <a:latin typeface="Calibri"/>
               </a:rPr>
@@ -11931,7 +11931,7 @@
             <a:r>
               <a:rPr sz="750" b="0" i="0">
                 <a:solidFill>
-                  <a:srgbClr val="6B7280"/>
+                  <a:srgbClr val="686F7D"/>
                 </a:solidFill>
                 <a:latin typeface="Calibri"/>
               </a:rPr>
@@ -12746,7 +12746,7 @@
             <a:r>
               <a:rPr sz="1300" b="1" i="0">
                 <a:solidFill>
-                  <a:srgbClr val="2E8B57"/>
+                  <a:srgbClr val="2A7F50"/>
                 </a:solidFill>
                 <a:latin typeface="Calibri"/>
               </a:rPr>
@@ -12885,7 +12885,7 @@
             <a:r>
               <a:rPr sz="1300" b="1" i="0">
                 <a:solidFill>
-                  <a:srgbClr val="2E8B57"/>
+                  <a:srgbClr val="2A7F50"/>
                 </a:solidFill>
                 <a:latin typeface="Calibri"/>
               </a:rPr>
@@ -13095,7 +13095,7 @@
             <a:r>
               <a:rPr sz="750" b="0" i="0">
                 <a:solidFill>
-                  <a:srgbClr val="6B7280"/>
+                  <a:srgbClr val="686F7D"/>
                 </a:solidFill>
                 <a:latin typeface="Calibri"/>
               </a:rPr>
@@ -13661,7 +13661,7 @@
             <a:r>
               <a:rPr sz="1350" b="1" i="0">
                 <a:solidFill>
-                  <a:srgbClr val="2E8B57"/>
+                  <a:srgbClr val="2A7F50"/>
                 </a:solidFill>
                 <a:latin typeface="Calibri"/>
               </a:rPr>
@@ -13881,7 +13881,7 @@
             <a:r>
               <a:rPr sz="750" b="0" i="0">
                 <a:solidFill>
-                  <a:srgbClr val="6B7280"/>
+                  <a:srgbClr val="686F7D"/>
                 </a:solidFill>
                 <a:latin typeface="Calibri"/>
               </a:rPr>
@@ -14263,7 +14263,7 @@
             <a:r>
               <a:rPr sz="1100" b="0" i="1">
                 <a:solidFill>
-                  <a:srgbClr val="6B7280"/>
+                  <a:srgbClr val="686F7D"/>
                 </a:solidFill>
                 <a:latin typeface="Calibri"/>
               </a:rPr>
@@ -14475,7 +14475,7 @@
             <a:r>
               <a:rPr sz="1100" b="0" i="1">
                 <a:solidFill>
-                  <a:srgbClr val="6B7280"/>
+                  <a:srgbClr val="686F7D"/>
                 </a:solidFill>
                 <a:latin typeface="Calibri"/>
               </a:rPr>
@@ -14563,7 +14563,7 @@
             <a:r>
               <a:rPr sz="1300" b="1" i="0">
                 <a:solidFill>
-                  <a:srgbClr val="B7791F"/>
+                  <a:srgbClr val="99651A"/>
                 </a:solidFill>
                 <a:latin typeface="Calibri"/>
               </a:rPr>
@@ -14773,7 +14773,7 @@
             <a:r>
               <a:rPr sz="750" b="0" i="0">
                 <a:solidFill>
-                  <a:srgbClr val="6B7280"/>
+                  <a:srgbClr val="686F7D"/>
                 </a:solidFill>
                 <a:latin typeface="Calibri"/>
               </a:rPr>
@@ -15012,7 +15012,7 @@
             <a:r>
               <a:rPr sz="1000" b="0" i="1">
                 <a:solidFill>
-                  <a:srgbClr val="6B7280"/>
+                  <a:srgbClr val="686F7D"/>
                 </a:solidFill>
                 <a:latin typeface="Calibri"/>
               </a:rPr>
@@ -15124,7 +15124,7 @@
             <a:avLst/>
           </a:prstGeom>
           <a:solidFill>
-            <a:srgbClr val="2E8B57"/>
+            <a:srgbClr val="2A7F50"/>
           </a:solidFill>
           <a:ln>
             <a:noFill/>
@@ -15382,7 +15382,7 @@
             <a:avLst/>
           </a:prstGeom>
           <a:solidFill>
-            <a:srgbClr val="0E8074"/>
+            <a:srgbClr val="0D7D71"/>
           </a:solidFill>
           <a:ln>
             <a:noFill/>
@@ -15468,7 +15468,7 @@
             <a:avLst/>
           </a:prstGeom>
           <a:solidFill>
-            <a:srgbClr val="B7791F"/>
+            <a:srgbClr val="99651A"/>
           </a:solidFill>
           <a:ln>
             <a:noFill/>
@@ -15828,7 +15828,7 @@
             <a:r>
               <a:rPr sz="750" b="0" i="0">
                 <a:solidFill>
-                  <a:srgbClr val="6B7280"/>
+                  <a:srgbClr val="686F7D"/>
                 </a:solidFill>
                 <a:latin typeface="Calibri"/>
               </a:rPr>
@@ -16123,7 +16123,7 @@
             <a:avLst/>
           </a:prstGeom>
           <a:solidFill>
-            <a:srgbClr val="2E8B57"/>
+            <a:srgbClr val="2A7F50"/>
           </a:solidFill>
           <a:ln>
             <a:noFill/>
@@ -16185,7 +16185,7 @@
             <a:r>
               <a:rPr sz="1250" b="1" i="0">
                 <a:solidFill>
-                  <a:srgbClr val="2E8B57"/>
+                  <a:srgbClr val="2A7F50"/>
                 </a:solidFill>
                 <a:latin typeface="Calibri"/>
               </a:rPr>
@@ -16297,7 +16297,7 @@
             <a:avLst/>
           </a:prstGeom>
           <a:solidFill>
-            <a:srgbClr val="2E8B57"/>
+            <a:srgbClr val="2A7F50"/>
           </a:solidFill>
           <a:ln>
             <a:noFill/>
@@ -16359,7 +16359,7 @@
             <a:r>
               <a:rPr sz="1250" b="1" i="0">
                 <a:solidFill>
-                  <a:srgbClr val="2E8B57"/>
+                  <a:srgbClr val="2A7F50"/>
                 </a:solidFill>
                 <a:latin typeface="Calibri"/>
               </a:rPr>
@@ -16471,7 +16471,7 @@
             <a:avLst/>
           </a:prstGeom>
           <a:solidFill>
-            <a:srgbClr val="2E8B57"/>
+            <a:srgbClr val="2A7F50"/>
           </a:solidFill>
           <a:ln>
             <a:noFill/>
@@ -16533,7 +16533,7 @@
             <a:r>
               <a:rPr sz="1250" b="1" i="0">
                 <a:solidFill>
-                  <a:srgbClr val="2E8B57"/>
+                  <a:srgbClr val="2A7F50"/>
                 </a:solidFill>
                 <a:latin typeface="Calibri"/>
               </a:rPr>
@@ -17124,7 +17124,7 @@
             <a:r>
               <a:rPr sz="750" b="0" i="0">
                 <a:solidFill>
-                  <a:srgbClr val="6B7280"/>
+                  <a:srgbClr val="686F7D"/>
                 </a:solidFill>
                 <a:latin typeface="Calibri"/>
               </a:rPr>
@@ -17322,7 +17322,7 @@
             <a:avLst/>
           </a:prstGeom>
           <a:solidFill>
-            <a:srgbClr val="2E8B57"/>
+            <a:srgbClr val="2A7F50"/>
           </a:solidFill>
           <a:ln>
             <a:noFill/>
@@ -17384,7 +17384,7 @@
             <a:r>
               <a:rPr sz="2500" b="1" i="0">
                 <a:solidFill>
-                  <a:srgbClr val="2E8B57"/>
+                  <a:srgbClr val="2A7F50"/>
                 </a:solidFill>
                 <a:latin typeface="Calibri"/>
               </a:rPr>
@@ -17468,7 +17468,7 @@
             <a:r>
               <a:rPr sz="1000" b="0" i="0">
                 <a:solidFill>
-                  <a:srgbClr val="6B7280"/>
+                  <a:srgbClr val="686F7D"/>
                 </a:solidFill>
                 <a:latin typeface="Calibri"/>
               </a:rPr>
@@ -17684,7 +17684,7 @@
             <a:r>
               <a:rPr sz="1000" b="0" i="0">
                 <a:solidFill>
-                  <a:srgbClr val="6B7280"/>
+                  <a:srgbClr val="686F7D"/>
                 </a:solidFill>
                 <a:latin typeface="Calibri"/>
               </a:rPr>
@@ -17754,7 +17754,7 @@
             <a:avLst/>
           </a:prstGeom>
           <a:solidFill>
-            <a:srgbClr val="0E8074"/>
+            <a:srgbClr val="0D7D71"/>
           </a:solidFill>
           <a:ln>
             <a:noFill/>
@@ -17816,7 +17816,7 @@
             <a:r>
               <a:rPr sz="2500" b="1" i="0">
                 <a:solidFill>
-                  <a:srgbClr val="0E8074"/>
+                  <a:srgbClr val="0D7D71"/>
                 </a:solidFill>
                 <a:latin typeface="Calibri"/>
               </a:rPr>
@@ -17900,7 +17900,7 @@
             <a:r>
               <a:rPr sz="1000" b="0" i="0">
                 <a:solidFill>
-                  <a:srgbClr val="6B7280"/>
+                  <a:srgbClr val="686F7D"/>
                 </a:solidFill>
                 <a:latin typeface="Calibri"/>
               </a:rPr>
@@ -18116,7 +18116,7 @@
             <a:r>
               <a:rPr sz="1000" b="0" i="0">
                 <a:solidFill>
-                  <a:srgbClr val="6B7280"/>
+                  <a:srgbClr val="686F7D"/>
                 </a:solidFill>
                 <a:latin typeface="Calibri"/>
               </a:rPr>
@@ -18461,7 +18461,7 @@
             <a:r>
               <a:rPr sz="750" b="0" i="0">
                 <a:solidFill>
-                  <a:srgbClr val="6B7280"/>
+                  <a:srgbClr val="686F7D"/>
                 </a:solidFill>
                 <a:latin typeface="Calibri"/>
               </a:rPr>
@@ -18677,7 +18677,7 @@
             <a:r>
               <a:rPr sz="1250" b="1" i="0">
                 <a:solidFill>
-                  <a:srgbClr val="B7791F"/>
+                  <a:srgbClr val="99651A"/>
                 </a:solidFill>
                 <a:latin typeface="Calibri"/>
               </a:rPr>
@@ -18695,7 +18695,7 @@
             <a:r>
               <a:rPr sz="1250" b="1" i="0">
                 <a:solidFill>
-                  <a:srgbClr val="2E8B57"/>
+                  <a:srgbClr val="2A7F50"/>
                 </a:solidFill>
                 <a:latin typeface="Calibri"/>
               </a:rPr>
@@ -18792,7 +18792,7 @@
             <a:r>
               <a:rPr sz="3000" b="1" i="0">
                 <a:solidFill>
-                  <a:srgbClr val="2E8B57"/>
+                  <a:srgbClr val="2A7F50"/>
                 </a:solidFill>
                 <a:latin typeface="Calibri"/>
               </a:rPr>
@@ -19353,7 +19353,7 @@
             <a:r>
               <a:rPr sz="1100" b="1" i="0">
                 <a:solidFill>
-                  <a:srgbClr val="2E8B57"/>
+                  <a:srgbClr val="2A7F50"/>
                 </a:solidFill>
                 <a:latin typeface="Calibri"/>
               </a:rPr>
@@ -19404,7 +19404,7 @@
             <a:r>
               <a:rPr sz="1100" b="1" i="0">
                 <a:solidFill>
-                  <a:srgbClr val="2E8B57"/>
+                  <a:srgbClr val="2A7F50"/>
                 </a:solidFill>
                 <a:latin typeface="Calibri"/>
               </a:rPr>
@@ -19455,7 +19455,7 @@
             <a:r>
               <a:rPr sz="1100" b="1" i="0">
                 <a:solidFill>
-                  <a:srgbClr val="2E8B57"/>
+                  <a:srgbClr val="2A7F50"/>
                 </a:solidFill>
                 <a:latin typeface="Calibri"/>
               </a:rPr>
@@ -19709,7 +19709,7 @@
             <a:r>
               <a:rPr sz="750" b="0" i="0">
                 <a:solidFill>
-                  <a:srgbClr val="6B7280"/>
+                  <a:srgbClr val="686F7D"/>
                 </a:solidFill>
                 <a:latin typeface="Calibri"/>
               </a:rPr>
@@ -19934,7 +19934,7 @@
             <a:r>
               <a:rPr sz="1250" b="1" i="0">
                 <a:solidFill>
-                  <a:srgbClr val="2E8B57"/>
+                  <a:srgbClr val="2A7F50"/>
                 </a:solidFill>
                 <a:latin typeface="Calibri"/>
               </a:rPr>
@@ -20052,7 +20052,7 @@
           </a:solidFill>
           <a:ln w="9525">
             <a:solidFill>
-              <a:srgbClr val="6B7280"/>
+              <a:srgbClr val="686F7D"/>
             </a:solidFill>
           </a:ln>
           <a:effectLst/>
@@ -20136,7 +20136,7 @@
             <a:avLst/>
           </a:prstGeom>
           <a:solidFill>
-            <a:srgbClr val="6B7280"/>
+            <a:srgbClr val="686F7D"/>
           </a:solidFill>
           <a:ln>
             <a:noFill/>
@@ -20186,7 +20186,7 @@
           </a:solidFill>
           <a:ln w="9525">
             <a:solidFill>
-              <a:srgbClr val="6B7280"/>
+              <a:srgbClr val="686F7D"/>
             </a:solidFill>
           </a:ln>
           <a:effectLst/>
@@ -20270,7 +20270,7 @@
             <a:avLst/>
           </a:prstGeom>
           <a:solidFill>
-            <a:srgbClr val="6B7280"/>
+            <a:srgbClr val="686F7D"/>
           </a:solidFill>
           <a:ln>
             <a:noFill/>
@@ -20320,7 +20320,7 @@
           </a:solidFill>
           <a:ln w="9525">
             <a:solidFill>
-              <a:srgbClr val="6B7280"/>
+              <a:srgbClr val="686F7D"/>
             </a:solidFill>
           </a:ln>
           <a:effectLst/>
@@ -20422,7 +20422,7 @@
             <a:r>
               <a:rPr sz="1700" b="1" i="0">
                 <a:solidFill>
-                  <a:srgbClr val="2E8B57"/>
+                  <a:srgbClr val="2A7F50"/>
                 </a:solidFill>
                 <a:latin typeface="Calibri"/>
               </a:rPr>
@@ -20540,7 +20540,7 @@
           </a:solidFill>
           <a:ln w="9525">
             <a:solidFill>
-              <a:srgbClr val="6B7280"/>
+              <a:srgbClr val="686F7D"/>
             </a:solidFill>
           </a:ln>
           <a:effectLst/>
@@ -20624,7 +20624,7 @@
             <a:avLst/>
           </a:prstGeom>
           <a:solidFill>
-            <a:srgbClr val="6B7280"/>
+            <a:srgbClr val="686F7D"/>
           </a:solidFill>
           <a:ln>
             <a:noFill/>
@@ -20674,7 +20674,7 @@
           </a:solidFill>
           <a:ln w="9525">
             <a:solidFill>
-              <a:srgbClr val="6B7280"/>
+              <a:srgbClr val="686F7D"/>
             </a:solidFill>
           </a:ln>
           <a:effectLst/>
@@ -20758,7 +20758,7 @@
             <a:avLst/>
           </a:prstGeom>
           <a:solidFill>
-            <a:srgbClr val="6B7280"/>
+            <a:srgbClr val="686F7D"/>
           </a:solidFill>
           <a:ln>
             <a:noFill/>
@@ -20804,7 +20804,7 @@
             </a:avLst>
           </a:prstGeom>
           <a:solidFill>
-            <a:srgbClr val="B7791F"/>
+            <a:srgbClr val="99651A"/>
           </a:solidFill>
           <a:ln>
             <a:noFill/>
@@ -20890,7 +20890,7 @@
             <a:avLst/>
           </a:prstGeom>
           <a:solidFill>
-            <a:srgbClr val="6B7280"/>
+            <a:srgbClr val="686F7D"/>
           </a:solidFill>
           <a:ln>
             <a:noFill/>
@@ -20936,7 +20936,7 @@
             </a:avLst>
           </a:prstGeom>
           <a:solidFill>
-            <a:srgbClr val="B7791F"/>
+            <a:srgbClr val="99651A"/>
           </a:solidFill>
           <a:ln>
             <a:noFill/>
@@ -21022,7 +21022,7 @@
             <a:avLst/>
           </a:prstGeom>
           <a:solidFill>
-            <a:srgbClr val="6B7280"/>
+            <a:srgbClr val="686F7D"/>
           </a:solidFill>
           <a:ln>
             <a:noFill/>
@@ -21072,7 +21072,7 @@
           </a:solidFill>
           <a:ln w="9525">
             <a:solidFill>
-              <a:srgbClr val="6B7280"/>
+              <a:srgbClr val="686F7D"/>
             </a:solidFill>
           </a:ln>
           <a:effectLst/>
@@ -21174,7 +21174,7 @@
             <a:r>
               <a:rPr sz="1700" b="1" i="0">
                 <a:solidFill>
-                  <a:srgbClr val="B7791F"/>
+                  <a:srgbClr val="99651A"/>
                 </a:solidFill>
                 <a:latin typeface="Calibri"/>
               </a:rPr>
@@ -21292,7 +21292,7 @@
           </a:solidFill>
           <a:ln w="9525">
             <a:solidFill>
-              <a:srgbClr val="6B7280"/>
+              <a:srgbClr val="686F7D"/>
             </a:solidFill>
           </a:ln>
           <a:effectLst/>
@@ -21376,7 +21376,7 @@
             <a:avLst/>
           </a:prstGeom>
           <a:solidFill>
-            <a:srgbClr val="6B7280"/>
+            <a:srgbClr val="686F7D"/>
           </a:solidFill>
           <a:ln>
             <a:noFill/>
@@ -21426,7 +21426,7 @@
           </a:solidFill>
           <a:ln w="9525">
             <a:solidFill>
-              <a:srgbClr val="6B7280"/>
+              <a:srgbClr val="686F7D"/>
             </a:solidFill>
           </a:ln>
           <a:effectLst/>
@@ -21510,7 +21510,7 @@
             <a:avLst/>
           </a:prstGeom>
           <a:solidFill>
-            <a:srgbClr val="6B7280"/>
+            <a:srgbClr val="686F7D"/>
           </a:solidFill>
           <a:ln>
             <a:noFill/>
@@ -21642,7 +21642,7 @@
             <a:avLst/>
           </a:prstGeom>
           <a:solidFill>
-            <a:srgbClr val="6B7280"/>
+            <a:srgbClr val="686F7D"/>
           </a:solidFill>
           <a:ln>
             <a:noFill/>
@@ -21692,7 +21692,7 @@
           </a:solidFill>
           <a:ln w="9525">
             <a:solidFill>
-              <a:srgbClr val="6B7280"/>
+              <a:srgbClr val="686F7D"/>
             </a:solidFill>
           </a:ln>
           <a:effectLst/>
@@ -21820,7 +21820,7 @@
             </a:avLst>
           </a:prstGeom>
           <a:solidFill>
-            <a:srgbClr val="B7791F"/>
+            <a:srgbClr val="99651A"/>
           </a:solidFill>
           <a:ln>
             <a:noFill/>
@@ -21882,7 +21882,7 @@
             <a:r>
               <a:rPr sz="1000" b="0" i="1">
                 <a:solidFill>
-                  <a:srgbClr val="6B7280"/>
+                  <a:srgbClr val="686F7D"/>
                 </a:solidFill>
                 <a:latin typeface="Calibri"/>
               </a:rPr>
@@ -21970,7 +21970,7 @@
             <a:r>
               <a:rPr sz="1250" b="1" i="0">
                 <a:solidFill>
-                  <a:srgbClr val="2E8B57"/>
+                  <a:srgbClr val="2A7F50"/>
                 </a:solidFill>
                 <a:latin typeface="Calibri"/>
               </a:rPr>
@@ -22100,7 +22100,7 @@
             <a:r>
               <a:rPr sz="1250" b="1" i="0">
                 <a:solidFill>
-                  <a:srgbClr val="B7791F"/>
+                  <a:srgbClr val="99651A"/>
                 </a:solidFill>
                 <a:latin typeface="Calibri"/>
               </a:rPr>
@@ -22387,7 +22387,7 @@
             <a:r>
               <a:rPr sz="750" b="0" i="0">
                 <a:solidFill>
-                  <a:srgbClr val="6B7280"/>
+                  <a:srgbClr val="686F7D"/>
                 </a:solidFill>
                 <a:latin typeface="Calibri"/>
               </a:rPr>
@@ -22603,7 +22603,7 @@
             <a:r>
               <a:rPr sz="1600" b="1" i="0">
                 <a:solidFill>
-                  <a:srgbClr val="2E8B57"/>
+                  <a:srgbClr val="2A7F50"/>
                 </a:solidFill>
                 <a:latin typeface="Calibri"/>
               </a:rPr>
@@ -22645,7 +22645,7 @@
             <a:r>
               <a:rPr sz="1300" b="1" i="0">
                 <a:solidFill>
-                  <a:srgbClr val="2E8B57"/>
+                  <a:srgbClr val="2A7F50"/>
                 </a:solidFill>
                 <a:latin typeface="Calibri"/>
               </a:rPr>
@@ -22696,7 +22696,7 @@
             <a:r>
               <a:rPr sz="1300" b="1" i="0">
                 <a:solidFill>
-                  <a:srgbClr val="2E8B57"/>
+                  <a:srgbClr val="2A7F50"/>
                 </a:solidFill>
                 <a:latin typeface="Calibri"/>
               </a:rPr>
@@ -22747,7 +22747,7 @@
             <a:r>
               <a:rPr sz="1300" b="1" i="0">
                 <a:solidFill>
-                  <a:srgbClr val="2E8B57"/>
+                  <a:srgbClr val="2A7F50"/>
                 </a:solidFill>
                 <a:latin typeface="Calibri"/>
               </a:rPr>
@@ -22798,7 +22798,7 @@
             <a:r>
               <a:rPr sz="1300" b="1" i="0">
                 <a:solidFill>
-                  <a:srgbClr val="2E8B57"/>
+                  <a:srgbClr val="2A7F50"/>
                 </a:solidFill>
                 <a:latin typeface="Calibri"/>
               </a:rPr>
@@ -23374,7 +23374,7 @@
             <a:r>
               <a:rPr sz="750" b="0" i="0">
                 <a:solidFill>
-                  <a:srgbClr val="6B7280"/>
+                  <a:srgbClr val="686F7D"/>
                 </a:solidFill>
                 <a:latin typeface="Calibri"/>
               </a:rPr>
@@ -23788,7 +23788,7 @@
             <a:avLst/>
           </a:prstGeom>
           <a:solidFill>
-            <a:srgbClr val="0E8074"/>
+            <a:srgbClr val="0D7D71"/>
           </a:solidFill>
           <a:ln>
             <a:noFill/>
@@ -23850,7 +23850,7 @@
             <a:r>
               <a:rPr sz="2800" b="0" i="0">
                 <a:solidFill>
-                  <a:srgbClr val="0E8074"/>
+                  <a:srgbClr val="0D7D71"/>
                 </a:solidFill>
                 <a:latin typeface="Segoe UI Emoji"/>
               </a:rPr>
@@ -23892,7 +23892,7 @@
             <a:r>
               <a:rPr sz="1700" b="1" i="0">
                 <a:solidFill>
-                  <a:srgbClr val="0E8074"/>
+                  <a:srgbClr val="0D7D71"/>
                 </a:solidFill>
                 <a:latin typeface="Calibri"/>
               </a:rPr>
@@ -24220,7 +24220,7 @@
             <a:avLst/>
           </a:prstGeom>
           <a:solidFill>
-            <a:srgbClr val="2E8B57"/>
+            <a:srgbClr val="2A7F50"/>
           </a:solidFill>
           <a:ln>
             <a:noFill/>
@@ -24282,7 +24282,7 @@
             <a:r>
               <a:rPr sz="2800" b="0" i="0">
                 <a:solidFill>
-                  <a:srgbClr val="2E8B57"/>
+                  <a:srgbClr val="2A7F50"/>
                 </a:solidFill>
                 <a:latin typeface="Segoe UI Emoji"/>
               </a:rPr>
@@ -24324,7 +24324,7 @@
             <a:r>
               <a:rPr sz="1700" b="1" i="0">
                 <a:solidFill>
-                  <a:srgbClr val="2E8B57"/>
+                  <a:srgbClr val="2A7F50"/>
                 </a:solidFill>
                 <a:latin typeface="Calibri"/>
               </a:rPr>
@@ -24618,7 +24618,7 @@
             <a:r>
               <a:rPr sz="750" b="0" i="0">
                 <a:solidFill>
-                  <a:srgbClr val="6B7280"/>
+                  <a:srgbClr val="686F7D"/>
                 </a:solidFill>
                 <a:latin typeface="Calibri"/>
               </a:rPr>
@@ -24906,7 +24906,7 @@
             </a:avLst>
           </a:prstGeom>
           <a:solidFill>
-            <a:srgbClr val="0E8074"/>
+            <a:srgbClr val="0D7D71"/>
           </a:solidFill>
           <a:ln>
             <a:noFill/>
@@ -25040,7 +25040,7 @@
             </a:avLst>
           </a:prstGeom>
           <a:solidFill>
-            <a:srgbClr val="B7791F"/>
+            <a:srgbClr val="99651A"/>
           </a:solidFill>
           <a:ln>
             <a:noFill/>
@@ -25107,7 +25107,7 @@
             </a:avLst>
           </a:prstGeom>
           <a:solidFill>
-            <a:srgbClr val="2E8B57"/>
+            <a:srgbClr val="2A7F50"/>
           </a:solidFill>
           <a:ln>
             <a:noFill/>
@@ -25234,7 +25234,7 @@
             <a:r>
               <a:rPr sz="1200" b="0" i="1">
                 <a:solidFill>
-                  <a:srgbClr val="6B7280"/>
+                  <a:srgbClr val="686F7D"/>
                 </a:solidFill>
                 <a:latin typeface="Calibri"/>
               </a:rPr>
@@ -25532,7 +25532,7 @@
             <a:r>
               <a:rPr sz="750" b="0" i="0">
                 <a:solidFill>
-                  <a:srgbClr val="6B7280"/>
+                  <a:srgbClr val="686F7D"/>
                 </a:solidFill>
                 <a:latin typeface="Calibri"/>
               </a:rPr>
@@ -26353,7 +26353,7 @@
             <a:r>
               <a:rPr sz="1300" b="1" i="0">
                 <a:solidFill>
-                  <a:srgbClr val="2E8B57"/>
+                  <a:srgbClr val="2A7F50"/>
                 </a:solidFill>
                 <a:latin typeface="Calibri"/>
               </a:rPr>
@@ -26414,7 +26414,7 @@
             <a:r>
               <a:rPr sz="1300" b="1" i="0">
                 <a:solidFill>
-                  <a:srgbClr val="2E8B57"/>
+                  <a:srgbClr val="2A7F50"/>
                 </a:solidFill>
                 <a:latin typeface="Calibri"/>
               </a:rPr>
@@ -26475,7 +26475,7 @@
             <a:r>
               <a:rPr sz="1300" b="1" i="0">
                 <a:solidFill>
-                  <a:srgbClr val="2E8B57"/>
+                  <a:srgbClr val="2A7F50"/>
                 </a:solidFill>
                 <a:latin typeface="Calibri"/>
               </a:rPr>
@@ -26536,7 +26536,7 @@
             <a:r>
               <a:rPr sz="1300" b="1" i="0">
                 <a:solidFill>
-                  <a:srgbClr val="2E8B57"/>
+                  <a:srgbClr val="2A7F50"/>
                 </a:solidFill>
                 <a:latin typeface="Calibri"/>
               </a:rPr>
@@ -26756,7 +26756,7 @@
             <a:r>
               <a:rPr sz="750" b="0" i="0">
                 <a:solidFill>
-                  <a:srgbClr val="6B7280"/>
+                  <a:srgbClr val="686F7D"/>
                 </a:solidFill>
                 <a:latin typeface="Calibri"/>
               </a:rPr>
@@ -26996,7 +26996,7 @@
             <a:avLst/>
           </a:prstGeom>
           <a:solidFill>
-            <a:srgbClr val="0E8074"/>
+            <a:srgbClr val="0D7D71"/>
           </a:solidFill>
           <a:ln>
             <a:noFill/>
@@ -27076,7 +27076,7 @@
             <a:r>
               <a:rPr sz="1050" b="0" i="0">
                 <a:solidFill>
-                  <a:srgbClr val="6B7280"/>
+                  <a:srgbClr val="686F7D"/>
                 </a:solidFill>
                 <a:latin typeface="Calibri"/>
               </a:rPr>
@@ -27127,7 +27127,7 @@
             <a:r>
               <a:rPr sz="1050" b="0" i="0">
                 <a:solidFill>
-                  <a:srgbClr val="6B7280"/>
+                  <a:srgbClr val="686F7D"/>
                 </a:solidFill>
                 <a:latin typeface="Calibri"/>
               </a:rPr>
@@ -27229,7 +27229,7 @@
             <a:r>
               <a:rPr sz="1050" b="0" i="0">
                 <a:solidFill>
-                  <a:srgbClr val="6B7280"/>
+                  <a:srgbClr val="686F7D"/>
                 </a:solidFill>
                 <a:latin typeface="Calibri"/>
               </a:rPr>
@@ -27322,7 +27322,7 @@
             <a:r>
               <a:rPr sz="1050" b="0" i="0">
                 <a:solidFill>
-                  <a:srgbClr val="6B7280"/>
+                  <a:srgbClr val="686F7D"/>
                 </a:solidFill>
                 <a:latin typeface="Calibri"/>
               </a:rPr>
@@ -27797,7 +27797,7 @@
             <a:r>
               <a:rPr sz="750" b="0" i="0">
                 <a:solidFill>
-                  <a:srgbClr val="6B7280"/>
+                  <a:srgbClr val="686F7D"/>
                 </a:solidFill>
                 <a:latin typeface="Calibri"/>
               </a:rPr>
@@ -27985,7 +27985,7 @@
             <a:r>
               <a:rPr sz="1050" b="0" i="1">
                 <a:solidFill>
-                  <a:srgbClr val="6B7280"/>
+                  <a:srgbClr val="686F7D"/>
                 </a:solidFill>
                 <a:latin typeface="Calibri"/>
               </a:rPr>
@@ -28378,7 +28378,7 @@
             <a:r>
               <a:rPr sz="750" b="0" i="0">
                 <a:solidFill>
-                  <a:srgbClr val="6B7280"/>
+                  <a:srgbClr val="686F7D"/>
                 </a:solidFill>
                 <a:latin typeface="Calibri"/>
               </a:rPr>
@@ -28566,7 +28566,7 @@
             <a:r>
               <a:rPr sz="1050" b="0" i="1">
                 <a:solidFill>
-                  <a:srgbClr val="6B7280"/>
+                  <a:srgbClr val="686F7D"/>
                 </a:solidFill>
                 <a:latin typeface="Calibri"/>
               </a:rPr>
@@ -28921,7 +28921,7 @@
             <a:r>
               <a:rPr sz="750" b="0" i="0">
                 <a:solidFill>
-                  <a:srgbClr val="6B7280"/>
+                  <a:srgbClr val="686F7D"/>
                 </a:solidFill>
                 <a:latin typeface="Calibri"/>
               </a:rPr>
@@ -29395,7 +29395,7 @@
             <a:avLst/>
           </a:prstGeom>
           <a:solidFill>
-            <a:srgbClr val="B7791F"/>
+            <a:srgbClr val="99651A"/>
           </a:solidFill>
           <a:ln>
             <a:noFill/>
@@ -29457,7 +29457,7 @@
             <a:r>
               <a:rPr sz="1300" b="1" i="0">
                 <a:solidFill>
-                  <a:srgbClr val="B7791F"/>
+                  <a:srgbClr val="99651A"/>
                 </a:solidFill>
                 <a:latin typeface="Segoe UI Emoji"/>
               </a:rPr>
@@ -29466,7 +29466,7 @@
             <a:r>
               <a:rPr sz="1300" b="1" i="0">
                 <a:solidFill>
-                  <a:srgbClr val="B7791F"/>
+                  <a:srgbClr val="99651A"/>
                 </a:solidFill>
                 <a:latin typeface="Calibri"/>
               </a:rPr>
@@ -29550,7 +29550,7 @@
             <a:r>
               <a:rPr sz="1400" b="1" i="0">
                 <a:solidFill>
-                  <a:srgbClr val="B7791F"/>
+                  <a:srgbClr val="99651A"/>
                 </a:solidFill>
                 <a:latin typeface="Calibri"/>
               </a:rPr>
@@ -29620,7 +29620,7 @@
             <a:avLst/>
           </a:prstGeom>
           <a:solidFill>
-            <a:srgbClr val="6B7280"/>
+            <a:srgbClr val="686F7D"/>
           </a:solidFill>
           <a:ln>
             <a:noFill/>
@@ -29682,7 +29682,7 @@
             <a:r>
               <a:rPr sz="1300" b="1" i="0">
                 <a:solidFill>
-                  <a:srgbClr val="6B7280"/>
+                  <a:srgbClr val="686F7D"/>
                 </a:solidFill>
                 <a:latin typeface="Calibri"/>
               </a:rPr>
@@ -29766,7 +29766,7 @@
             <a:r>
               <a:rPr sz="1400" b="1" i="0">
                 <a:solidFill>
-                  <a:srgbClr val="6B7280"/>
+                  <a:srgbClr val="686F7D"/>
                 </a:solidFill>
                 <a:latin typeface="Calibri"/>
               </a:rPr>
@@ -29872,7 +29872,7 @@
             <a:r>
               <a:rPr sz="1200" b="0" i="0">
                 <a:solidFill>
-                  <a:srgbClr val="6B7280"/>
+                  <a:srgbClr val="686F7D"/>
                 </a:solidFill>
                 <a:latin typeface="Calibri"/>
               </a:rPr>

--- a/CostVision-Agentic-AI-Management-Presentation.pptx
+++ b/CostVision-Agentic-AI-Management-Presentation.pptx
@@ -5,31 +5,31 @@
     <p:sldMasterId id="2147483648" r:id="rId1"/>
   </p:sldMasterIdLst>
   <p:notesMasterIdLst>
-    <p:notesMasterId r:id="rId8"/>
+    <p:notesMasterId r:id="rId29"/>
   </p:notesMasterIdLst>
   <p:sldIdLst>
     <p:sldId id="256" r:id="rId7"/>
-    <p:sldId id="257" r:id="rId9"/>
-    <p:sldId id="258" r:id="rId10"/>
-    <p:sldId id="259" r:id="rId11"/>
-    <p:sldId id="260" r:id="rId12"/>
-    <p:sldId id="261" r:id="rId13"/>
-    <p:sldId id="262" r:id="rId14"/>
-    <p:sldId id="263" r:id="rId15"/>
-    <p:sldId id="264" r:id="rId16"/>
-    <p:sldId id="265" r:id="rId17"/>
-    <p:sldId id="266" r:id="rId18"/>
-    <p:sldId id="267" r:id="rId19"/>
-    <p:sldId id="268" r:id="rId20"/>
-    <p:sldId id="269" r:id="rId21"/>
-    <p:sldId id="270" r:id="rId22"/>
-    <p:sldId id="271" r:id="rId23"/>
-    <p:sldId id="272" r:id="rId24"/>
-    <p:sldId id="273" r:id="rId25"/>
-    <p:sldId id="274" r:id="rId26"/>
-    <p:sldId id="275" r:id="rId27"/>
-    <p:sldId id="276" r:id="rId28"/>
-    <p:sldId id="277" r:id="rId29"/>
+    <p:sldId id="257" r:id="rId8"/>
+    <p:sldId id="258" r:id="rId9"/>
+    <p:sldId id="259" r:id="rId10"/>
+    <p:sldId id="260" r:id="rId11"/>
+    <p:sldId id="261" r:id="rId12"/>
+    <p:sldId id="262" r:id="rId13"/>
+    <p:sldId id="263" r:id="rId14"/>
+    <p:sldId id="264" r:id="rId15"/>
+    <p:sldId id="265" r:id="rId16"/>
+    <p:sldId id="266" r:id="rId17"/>
+    <p:sldId id="267" r:id="rId18"/>
+    <p:sldId id="268" r:id="rId19"/>
+    <p:sldId id="269" r:id="rId20"/>
+    <p:sldId id="270" r:id="rId21"/>
+    <p:sldId id="271" r:id="rId22"/>
+    <p:sldId id="272" r:id="rId23"/>
+    <p:sldId id="273" r:id="rId24"/>
+    <p:sldId id="274" r:id="rId25"/>
+    <p:sldId id="275" r:id="rId26"/>
+    <p:sldId id="276" r:id="rId27"/>
+    <p:sldId id="277" r:id="rId28"/>
   </p:sldIdLst>
   <p:sldSz cx="12191695" cy="6858000"/>
   <p:notesSz cx="6858000" cy="9144000"/>
@@ -129,694 +129,6 @@
     </a:lvl9pPr>
   </p:defaultTextStyle>
 </p:presentation>
-</file>
-
-<file path=ppt/charts/chart1.xml><?xml version="1.0" encoding="utf-8"?>
-<c:chartSpace xmlns:c="http://schemas.openxmlformats.org/drawingml/2006/chart" xmlns:a="http://schemas.openxmlformats.org/drawingml/2006/main" xmlns:r="http://schemas.openxmlformats.org/officeDocument/2006/relationships">
-  <c:date1904 val="0"/>
-  <c:chart>
-    <c:autoTitleDeleted val="0"/>
-    <c:plotArea>
-      <c:barChart>
-        <c:barDir val="col"/>
-        <c:grouping val="clustered"/>
-        <c:ser>
-          <c:idx val="0"/>
-          <c:order val="0"/>
-          <c:tx>
-            <c:strRef>
-              <c:f>Sheet1!$B$1</c:f>
-              <c:strCache>
-                <c:ptCount val="1"/>
-                <c:pt idx="0">
-                  <c:v>Before learning</c:v>
-                </c:pt>
-              </c:strCache>
-            </c:strRef>
-          </c:tx>
-          <c:spPr>
-            <a:solidFill>
-              <a:srgbClr val="686F7D"/>
-            </a:solidFill>
-            <a:ln>
-              <a:noFill/>
-            </a:ln>
-          </c:spPr>
-          <c:cat>
-            <c:strRef>
-              <c:f>Sheet1!$A$2:$A$3</c:f>
-              <c:strCache>
-                <c:ptCount val="2"/>
-                <c:pt idx="0">
-                  <c:v>Machining · Aluminium · UK</c:v>
-                </c:pt>
-                <c:pt idx="1">
-                  <c:v>Casting · Aluminium · China</c:v>
-                </c:pt>
-              </c:strCache>
-            </c:strRef>
-          </c:cat>
-          <c:val>
-            <c:numRef>
-              <c:f>Sheet1!$B$2:$B$3</c:f>
-              <c:numCache>
-                <c:formatCode>General</c:formatCode>
-                <c:ptCount val="2"/>
-                <c:pt idx="0">
-                  <c:v>10.9</c:v>
-                </c:pt>
-                <c:pt idx="1">
-                  <c:v>8.7</c:v>
-                </c:pt>
-              </c:numCache>
-            </c:numRef>
-          </c:val>
-        </c:ser>
-        <c:ser>
-          <c:idx val="1"/>
-          <c:order val="1"/>
-          <c:tx>
-            <c:strRef>
-              <c:f>Sheet1!$C$1</c:f>
-              <c:strCache>
-                <c:ptCount val="1"/>
-                <c:pt idx="0">
-                  <c:v>After 3 real quotes</c:v>
-                </c:pt>
-              </c:strCache>
-            </c:strRef>
-          </c:tx>
-          <c:spPr>
-            <a:solidFill>
-              <a:srgbClr val="2A7F50"/>
-            </a:solidFill>
-            <a:ln>
-              <a:noFill/>
-            </a:ln>
-          </c:spPr>
-          <c:cat>
-            <c:strRef>
-              <c:f>Sheet1!$A$2:$A$3</c:f>
-              <c:strCache>
-                <c:ptCount val="2"/>
-                <c:pt idx="0">
-                  <c:v>Machining · Aluminium · UK</c:v>
-                </c:pt>
-                <c:pt idx="1">
-                  <c:v>Casting · Aluminium · China</c:v>
-                </c:pt>
-              </c:strCache>
-            </c:strRef>
-          </c:cat>
-          <c:val>
-            <c:numRef>
-              <c:f>Sheet1!$C$2:$C$3</c:f>
-              <c:numCache>
-                <c:formatCode>General</c:formatCode>
-                <c:ptCount val="2"/>
-                <c:pt idx="0">
-                  <c:v>0.3</c:v>
-                </c:pt>
-                <c:pt idx="1">
-                  <c:v>0.6</c:v>
-                </c:pt>
-              </c:numCache>
-            </c:numRef>
-          </c:val>
-        </c:ser>
-        <c:dLbls>
-          <c:txPr>
-            <a:bodyPr/>
-            <a:lstStyle/>
-            <a:p>
-              <a:pPr>
-                <a:defRPr sz="1050" b="1">
-                  <a:solidFill>
-                    <a:srgbClr val="16325C"/>
-                  </a:solidFill>
-                </a:defRPr>
-              </a:pPr>
-            </a:p>
-          </c:txPr>
-          <c:showLegendKey val="0"/>
-          <c:showVal val="1"/>
-          <c:showCatName val="0"/>
-          <c:showSerName val="0"/>
-          <c:showPercent val="0"/>
-          <c:showBubbleSize val="0"/>
-          <c:showLeaderLines val="1"/>
-        </c:dLbls>
-        <c:axId val="-2068027336"/>
-        <c:axId val="-2113994440"/>
-      </c:barChart>
-      <c:catAx>
-        <c:axId val="-2068027336"/>
-        <c:scaling>
-          <c:orientation val="minMax"/>
-        </c:scaling>
-        <c:delete val="0"/>
-        <c:axPos val="b"/>
-        <c:majorTickMark val="out"/>
-        <c:minorTickMark val="none"/>
-        <c:tickLblPos val="nextTo"/>
-        <c:spPr>
-          <a:ln>
-            <a:solidFill>
-              <a:srgbClr val="DCE3EE"/>
-            </a:solidFill>
-          </a:ln>
-        </c:spPr>
-        <c:txPr>
-          <a:bodyPr/>
-          <a:lstStyle/>
-          <a:p>
-            <a:pPr>
-              <a:defRPr sz="1050">
-                <a:solidFill>
-                  <a:srgbClr val="3A4356"/>
-                </a:solidFill>
-              </a:defRPr>
-            </a:pPr>
-          </a:p>
-        </c:txPr>
-        <c:crossAx val="-2113994440"/>
-        <c:crosses val="autoZero"/>
-        <c:auto val="1"/>
-        <c:lblAlgn val="ctr"/>
-        <c:lblOffset val="100"/>
-        <c:noMultiLvlLbl val="0"/>
-      </c:catAx>
-      <c:valAx>
-        <c:axId val="-2113994440"/>
-        <c:scaling/>
-        <c:delete val="0"/>
-        <c:axPos val="l"/>
-        <c:majorGridlines>
-          <c:spPr>
-            <a:ln>
-              <a:solidFill>
-                <a:srgbClr val="DCE3EE"/>
-              </a:solidFill>
-            </a:ln>
-          </c:spPr>
-        </c:majorGridlines>
-        <c:majorTickMark val="out"/>
-        <c:minorTickMark val="none"/>
-        <c:tickLblPos val="nextTo"/>
-        <c:spPr>
-          <a:ln>
-            <a:solidFill>
-              <a:srgbClr val="DCE3EE"/>
-            </a:solidFill>
-          </a:ln>
-        </c:spPr>
-        <c:txPr>
-          <a:bodyPr/>
-          <a:lstStyle/>
-          <a:p>
-            <a:pPr>
-              <a:defRPr sz="1000">
-                <a:solidFill>
-                  <a:srgbClr val="686F7D"/>
-                </a:solidFill>
-              </a:defRPr>
-            </a:pPr>
-          </a:p>
-        </c:txPr>
-        <c:crossAx val="-2068027336"/>
-        <c:crosses val="autoZero"/>
-      </c:valAx>
-    </c:plotArea>
-    <c:legend>
-      <c:legendPos val="b"/>
-      <c:overlay val="0"/>
-      <c:txPr>
-        <a:bodyPr/>
-        <a:lstStyle/>
-        <a:p>
-          <a:pPr>
-            <a:defRPr sz="1100"/>
-          </a:pPr>
-        </a:p>
-      </c:txPr>
-    </c:legend>
-    <c:dispBlanksAs val="gap"/>
-  </c:chart>
-  <c:txPr>
-    <a:bodyPr/>
-    <a:lstStyle/>
-    <a:p>
-      <a:pPr>
-        <a:defRPr sz="1800"/>
-      </a:pPr>
-      <a:endParaRPr lang="en-US"/>
-    </a:p>
-  </c:txPr>
-  <c:externalData r:id="rId1">
-    <c:autoUpdate val="0"/>
-  </c:externalData>
-</c:chartSpace>
-</file>
-
-<file path=ppt/charts/chart2.xml><?xml version="1.0" encoding="utf-8"?>
-<c:chartSpace xmlns:c="http://schemas.openxmlformats.org/drawingml/2006/chart" xmlns:a="http://schemas.openxmlformats.org/drawingml/2006/main" xmlns:r="http://schemas.openxmlformats.org/officeDocument/2006/relationships">
-  <c:date1904 val="0"/>
-  <c:chart>
-    <c:autoTitleDeleted val="0"/>
-    <c:plotArea>
-      <c:barChart>
-        <c:barDir val="col"/>
-        <c:grouping val="clustered"/>
-        <c:ser>
-          <c:idx val="0"/>
-          <c:order val="0"/>
-          <c:tx>
-            <c:strRef>
-              <c:f>Sheet1!$B$1</c:f>
-              <c:strCache>
-                <c:ptCount val="1"/>
-                <c:pt idx="0">
-                  <c:v>Confidence band (± %)</c:v>
-                </c:pt>
-              </c:strCache>
-            </c:strRef>
-          </c:tx>
-          <c:spPr>
-            <a:solidFill>
-              <a:srgbClr val="99651A"/>
-            </a:solidFill>
-            <a:ln>
-              <a:noFill/>
-            </a:ln>
-          </c:spPr>
-          <c:cat>
-            <c:strRef>
-              <c:f>Sheet1!$A$2:$A$3</c:f>
-              <c:strCache>
-                <c:ptCount val="2"/>
-                <c:pt idx="0">
-                  <c:v>Before any real quotes</c:v>
-                </c:pt>
-                <c:pt idx="1">
-                  <c:v>After 3 real quotes logged</c:v>
-                </c:pt>
-              </c:strCache>
-            </c:strRef>
-          </c:cat>
-          <c:val>
-            <c:numRef>
-              <c:f>Sheet1!$B$2:$B$3</c:f>
-              <c:numCache>
-                <c:formatCode>General</c:formatCode>
-                <c:ptCount val="2"/>
-                <c:pt idx="0">
-                  <c:v>20.4</c:v>
-                </c:pt>
-                <c:pt idx="1">
-                  <c:v>2.8</c:v>
-                </c:pt>
-              </c:numCache>
-            </c:numRef>
-          </c:val>
-        </c:ser>
-        <c:dLbls>
-          <c:txPr>
-            <a:bodyPr/>
-            <a:lstStyle/>
-            <a:p>
-              <a:pPr>
-                <a:defRPr sz="1050" b="1">
-                  <a:solidFill>
-                    <a:srgbClr val="16325C"/>
-                  </a:solidFill>
-                </a:defRPr>
-              </a:pPr>
-            </a:p>
-          </c:txPr>
-          <c:showLegendKey val="0"/>
-          <c:showVal val="1"/>
-          <c:showCatName val="0"/>
-          <c:showSerName val="0"/>
-          <c:showPercent val="0"/>
-          <c:showBubbleSize val="0"/>
-          <c:showLeaderLines val="1"/>
-        </c:dLbls>
-        <c:axId val="-2068027336"/>
-        <c:axId val="-2113994440"/>
-      </c:barChart>
-      <c:catAx>
-        <c:axId val="-2068027336"/>
-        <c:scaling>
-          <c:orientation val="minMax"/>
-        </c:scaling>
-        <c:delete val="0"/>
-        <c:axPos val="b"/>
-        <c:majorTickMark val="out"/>
-        <c:minorTickMark val="none"/>
-        <c:tickLblPos val="nextTo"/>
-        <c:spPr>
-          <a:ln>
-            <a:solidFill>
-              <a:srgbClr val="DCE3EE"/>
-            </a:solidFill>
-          </a:ln>
-        </c:spPr>
-        <c:txPr>
-          <a:bodyPr/>
-          <a:lstStyle/>
-          <a:p>
-            <a:pPr>
-              <a:defRPr sz="1050">
-                <a:solidFill>
-                  <a:srgbClr val="3A4356"/>
-                </a:solidFill>
-              </a:defRPr>
-            </a:pPr>
-          </a:p>
-        </c:txPr>
-        <c:crossAx val="-2113994440"/>
-        <c:crosses val="autoZero"/>
-        <c:auto val="1"/>
-        <c:lblAlgn val="ctr"/>
-        <c:lblOffset val="100"/>
-        <c:noMultiLvlLbl val="0"/>
-      </c:catAx>
-      <c:valAx>
-        <c:axId val="-2113994440"/>
-        <c:scaling/>
-        <c:delete val="0"/>
-        <c:axPos val="l"/>
-        <c:majorGridlines>
-          <c:spPr>
-            <a:ln>
-              <a:solidFill>
-                <a:srgbClr val="DCE3EE"/>
-              </a:solidFill>
-            </a:ln>
-          </c:spPr>
-        </c:majorGridlines>
-        <c:majorTickMark val="out"/>
-        <c:minorTickMark val="none"/>
-        <c:tickLblPos val="nextTo"/>
-        <c:spPr>
-          <a:ln>
-            <a:solidFill>
-              <a:srgbClr val="DCE3EE"/>
-            </a:solidFill>
-          </a:ln>
-        </c:spPr>
-        <c:txPr>
-          <a:bodyPr/>
-          <a:lstStyle/>
-          <a:p>
-            <a:pPr>
-              <a:defRPr sz="1000">
-                <a:solidFill>
-                  <a:srgbClr val="686F7D"/>
-                </a:solidFill>
-              </a:defRPr>
-            </a:pPr>
-          </a:p>
-        </c:txPr>
-        <c:crossAx val="-2068027336"/>
-        <c:crosses val="autoZero"/>
-      </c:valAx>
-    </c:plotArea>
-    <c:dispBlanksAs val="gap"/>
-  </c:chart>
-  <c:txPr>
-    <a:bodyPr/>
-    <a:lstStyle/>
-    <a:p>
-      <a:pPr>
-        <a:defRPr sz="1800"/>
-      </a:pPr>
-      <a:endParaRPr lang="en-US"/>
-    </a:p>
-  </c:txPr>
-  <c:externalData r:id="rId1">
-    <c:autoUpdate val="0"/>
-  </c:externalData>
-</c:chartSpace>
-</file>
-
-<file path=ppt/charts/chart3.xml><?xml version="1.0" encoding="utf-8"?>
-<c:chartSpace xmlns:c="http://schemas.openxmlformats.org/drawingml/2006/chart" xmlns:a="http://schemas.openxmlformats.org/drawingml/2006/main" xmlns:r="http://schemas.openxmlformats.org/officeDocument/2006/relationships">
-  <c:date1904 val="0"/>
-  <c:chart>
-    <c:autoTitleDeleted val="0"/>
-    <c:plotArea>
-      <c:barChart>
-        <c:barDir val="col"/>
-        <c:grouping val="clustered"/>
-        <c:ser>
-          <c:idx val="0"/>
-          <c:order val="0"/>
-          <c:tx>
-            <c:strRef>
-              <c:f>Sheet1!$B$1</c:f>
-              <c:strCache>
-                <c:ptCount val="1"/>
-                <c:pt idx="0">
-                  <c:v>Manual (engineer)</c:v>
-                </c:pt>
-              </c:strCache>
-            </c:strRef>
-          </c:tx>
-          <c:spPr>
-            <a:solidFill>
-              <a:srgbClr val="686F7D"/>
-            </a:solidFill>
-            <a:ln>
-              <a:noFill/>
-            </a:ln>
-          </c:spPr>
-          <c:cat>
-            <c:strRef>
-              <c:f>Sheet1!$A$2:$A$4</c:f>
-              <c:strCache>
-                <c:ptCount val="3"/>
-                <c:pt idx="0">
-                  <c:v>Components</c:v>
-                </c:pt>
-                <c:pt idx="1">
-                  <c:v>Fab + assembly</c:v>
-                </c:pt>
-                <c:pt idx="2">
-                  <c:v>Total / board</c:v>
-                </c:pt>
-              </c:strCache>
-            </c:strRef>
-          </c:cat>
-          <c:val>
-            <c:numRef>
-              <c:f>Sheet1!$B$2:$B$4</c:f>
-              <c:numCache>
-                <c:formatCode>General</c:formatCode>
-                <c:ptCount val="3"/>
-                <c:pt idx="0">
-                  <c:v>62.0</c:v>
-                </c:pt>
-                <c:pt idx="1">
-                  <c:v>10.0</c:v>
-                </c:pt>
-                <c:pt idx="2">
-                  <c:v>73.0</c:v>
-                </c:pt>
-              </c:numCache>
-            </c:numRef>
-          </c:val>
-        </c:ser>
-        <c:ser>
-          <c:idx val="1"/>
-          <c:order val="1"/>
-          <c:tx>
-            <c:strRef>
-              <c:f>Sheet1!$C$1</c:f>
-              <c:strCache>
-                <c:ptCount val="1"/>
-                <c:pt idx="0">
-                  <c:v>AI (from photo)</c:v>
-                </c:pt>
-              </c:strCache>
-            </c:strRef>
-          </c:tx>
-          <c:spPr>
-            <a:solidFill>
-              <a:srgbClr val="1D6FB8"/>
-            </a:solidFill>
-            <a:ln>
-              <a:noFill/>
-            </a:ln>
-          </c:spPr>
-          <c:cat>
-            <c:strRef>
-              <c:f>Sheet1!$A$2:$A$4</c:f>
-              <c:strCache>
-                <c:ptCount val="3"/>
-                <c:pt idx="0">
-                  <c:v>Components</c:v>
-                </c:pt>
-                <c:pt idx="1">
-                  <c:v>Fab + assembly</c:v>
-                </c:pt>
-                <c:pt idx="2">
-                  <c:v>Total / board</c:v>
-                </c:pt>
-              </c:strCache>
-            </c:strRef>
-          </c:cat>
-          <c:val>
-            <c:numRef>
-              <c:f>Sheet1!$C$2:$C$4</c:f>
-              <c:numCache>
-                <c:formatCode>General</c:formatCode>
-                <c:ptCount val="3"/>
-                <c:pt idx="0">
-                  <c:v>62.29</c:v>
-                </c:pt>
-                <c:pt idx="1">
-                  <c:v>6.82</c:v>
-                </c:pt>
-                <c:pt idx="2">
-                  <c:v>69.11</c:v>
-                </c:pt>
-              </c:numCache>
-            </c:numRef>
-          </c:val>
-        </c:ser>
-        <c:dLbls>
-          <c:txPr>
-            <a:bodyPr/>
-            <a:lstStyle/>
-            <a:p>
-              <a:pPr>
-                <a:defRPr sz="1050" b="1">
-                  <a:solidFill>
-                    <a:srgbClr val="16325C"/>
-                  </a:solidFill>
-                </a:defRPr>
-              </a:pPr>
-            </a:p>
-          </c:txPr>
-          <c:showLegendKey val="0"/>
-          <c:showVal val="1"/>
-          <c:showCatName val="0"/>
-          <c:showSerName val="0"/>
-          <c:showPercent val="0"/>
-          <c:showBubbleSize val="0"/>
-          <c:showLeaderLines val="1"/>
-        </c:dLbls>
-        <c:axId val="-2068027336"/>
-        <c:axId val="-2113994440"/>
-      </c:barChart>
-      <c:catAx>
-        <c:axId val="-2068027336"/>
-        <c:scaling>
-          <c:orientation val="minMax"/>
-        </c:scaling>
-        <c:delete val="0"/>
-        <c:axPos val="b"/>
-        <c:majorTickMark val="out"/>
-        <c:minorTickMark val="none"/>
-        <c:tickLblPos val="nextTo"/>
-        <c:spPr>
-          <a:ln>
-            <a:solidFill>
-              <a:srgbClr val="DCE3EE"/>
-            </a:solidFill>
-          </a:ln>
-        </c:spPr>
-        <c:txPr>
-          <a:bodyPr/>
-          <a:lstStyle/>
-          <a:p>
-            <a:pPr>
-              <a:defRPr sz="1050">
-                <a:solidFill>
-                  <a:srgbClr val="3A4356"/>
-                </a:solidFill>
-              </a:defRPr>
-            </a:pPr>
-          </a:p>
-        </c:txPr>
-        <c:crossAx val="-2113994440"/>
-        <c:crosses val="autoZero"/>
-        <c:auto val="1"/>
-        <c:lblAlgn val="ctr"/>
-        <c:lblOffset val="100"/>
-        <c:noMultiLvlLbl val="0"/>
-      </c:catAx>
-      <c:valAx>
-        <c:axId val="-2113994440"/>
-        <c:scaling/>
-        <c:delete val="0"/>
-        <c:axPos val="l"/>
-        <c:majorGridlines>
-          <c:spPr>
-            <a:ln>
-              <a:solidFill>
-                <a:srgbClr val="DCE3EE"/>
-              </a:solidFill>
-            </a:ln>
-          </c:spPr>
-        </c:majorGridlines>
-        <c:majorTickMark val="out"/>
-        <c:minorTickMark val="none"/>
-        <c:tickLblPos val="nextTo"/>
-        <c:spPr>
-          <a:ln>
-            <a:solidFill>
-              <a:srgbClr val="DCE3EE"/>
-            </a:solidFill>
-          </a:ln>
-        </c:spPr>
-        <c:txPr>
-          <a:bodyPr/>
-          <a:lstStyle/>
-          <a:p>
-            <a:pPr>
-              <a:defRPr sz="1000">
-                <a:solidFill>
-                  <a:srgbClr val="686F7D"/>
-                </a:solidFill>
-              </a:defRPr>
-            </a:pPr>
-          </a:p>
-        </c:txPr>
-        <c:crossAx val="-2068027336"/>
-        <c:crosses val="autoZero"/>
-      </c:valAx>
-    </c:plotArea>
-    <c:legend>
-      <c:legendPos val="b"/>
-      <c:overlay val="0"/>
-      <c:txPr>
-        <a:bodyPr/>
-        <a:lstStyle/>
-        <a:p>
-          <a:pPr>
-            <a:defRPr sz="1050"/>
-          </a:pPr>
-        </a:p>
-      </c:txPr>
-    </c:legend>
-    <c:dispBlanksAs val="gap"/>
-  </c:chart>
-  <c:txPr>
-    <a:bodyPr/>
-    <a:lstStyle/>
-    <a:p>
-      <a:pPr>
-        <a:defRPr sz="1800"/>
-      </a:pPr>
-      <a:endParaRPr lang="en-US"/>
-    </a:p>
-  </c:txPr>
-  <c:externalData r:id="rId1">
-    <c:autoUpdate val="0"/>
-  </c:externalData>
-</c:chartSpace>
 </file>
 
 <file path=ppt/notesMasters/notesMaster1.xml><?xml version="1.0" encoding="utf-8"?>
@@ -1214,7 +526,7 @@
           <a:lstStyle/>
           <a:p>
             <a:r>
-              <a:t>Open strong, then pause. "Every costing tool on the market does maths. Ours does something none of them do — it learns." Hold up the idea: the tool remembers every part we've ever costed, recognises the next one, corrects itself against real quotes, and goes hunting for savings while nobody's watching. One promise before we start: every single number in this deck is from a live run of the real system — no mock-ups, no slideware. Let's go.</a:t>
+              <a:t>Thanks for the time. This deck is about the learning side of CostVision: how it remembers the parts we cost, how it learns from the real prices we pay, and how it keeps an eye out for price gaps. I want to be clear about one thing up front. In the JLR build, AI is switched off, because we don't have AI approval yet. That's fine for this story, because everything I'm going to show you on the learning side is plain arithmetic. Medians, match scores, gaps between two prices. None of it needs AI, so it works on a locked-down laptop today. Where a feature does need AI, I'll say so and I'll say it's switched off. And I'll be honest about what's proven and what isn't.</a:t>
             </a:r>
           </a:p>
         </p:txBody>
@@ -1284,7 +596,7 @@
           <a:lstStyle/>
           <a:p>
             <a:r>
-              <a:t>The learning loop is the headline, but it stands on a real platform. The assistant answers from our own rate data with citations — it quotes our numbers, it doesn't improvise. The RFQ analyst turns a full quote package into a costed, risk-flagged negotiation brief. CAD feature costing shows a designer which hole or surface is driving the price. And carbon co-costing puts a CO2 figure next to every pound — which automotive and aerospace customers now demand in the RFQ itself. Eighteen commodity engines, CAD-to-cost, PCB photo-to-BOM — and the agentic layer sits on top of all of it, feeding and fed by the same memory.</a:t>
+              <a:t>This slide is the one I'd most like you to remember, because it draws the line clearly. The top two boxes work at JLR today, with AI off. CAD to Cost measures the part from a STEP, IGES or STL file, applies rules, and where the shape can't decide something, like the process route, it asks the engineer rather than guessing. The self-audit, the shape checks, the negotiation pack and the carbon figure all work too. The bottom two boxes are built but switched off at JLR: the chat assistant, describe-a-part, the PCB photo reader, and reading free-text RFQs. If they're ever switched on, it's a setting, not a rebuild, and each user is rate-limited. And even then, AI never sets a price. It only reads and classifies. The money is always arithmetic.</a:t>
             </a:r>
           </a:p>
         </p:txBody>
@@ -1354,7 +666,7 @@
           <a:lstStyle/>
           <a:p>
             <a:r>
-              <a:t>Fair management question: what does this cost the team in effort? Honestly — almost nothing. Engineers keep costing parts exactly as they do now; the memory builds itself in the background. The one new habit is a single click when a real quote arrives. Two optional accelerants: attach CAD or BOM files for sharper matching, and — my recommended first move — a one-off import of our historical quotes so the system starts SMART instead of empty. Low effort in, compounding value out. That's the whole ask on the input side.</a:t>
+              <a:t>A fair question from management is what this asks of the team. Honestly, not much. Engineers keep costing parts as they do now, and every costing goes into the memory. The one new habit is clicking Log Actual pounds when a real price arrives. There are two optional extras. Attaching a CAD file gives the matching more to work with. And importing our past quotes as a CSV means the correction doesn't start from nothing. That import is the first thing I'd do if we go ahead. On the right is what the tool does in return: it remembers, it shows similar parts, it suggests, it measures its own error, it sets the range from real error once it has three prices, and it re-checks stored parts for gaps.</a:t>
             </a:r>
           </a:p>
         </p:txBody>
@@ -1424,7 +736,7 @@
           <a:lstStyle/>
           <a:p>
             <a:r>
-              <a:t>Everything on this slide was measured on the running system — live server, real database, real API calls — not projected. Segment error dropped to well under one percent in BOTH directions of bias. The confidence band tightened seven-fold. Recognition hit ninety-nine percent on the live example. The unattended agent surfaced half a million pounds. And one thousand seven hundred and seventy-seven tests stand guard so none of it quietly regresses. One honest caveat, because credibility is the whole game here: these demos ran on small seeded datasets — real-world accuracy builds as OUR data accumulates. The mechanism is proven. The asset grows with use.</a:t>
+              <a:t>I want to be careful on this slide, so here's exactly what's proven. The engine's sums match a hand calculation on a reference machined bracket, twenty-three pounds twenty-seven, to under a hundredth of a percent. Six real production parts are pinned in a baseline, so any change that moves them fails the build. There are 2,438 automated tests, plus browser tests that cost every process and check the exports. And the correction needs three real prices per group before it does anything. Now what isn't proven. We have not yet compared a single estimate with a price JLR actually paid. So I won't give you an accuracy percentage. We'll measure it as real prices are logged, and report what we find, good or bad.</a:t>
             </a:r>
           </a:p>
         </p:txBody>
@@ -1494,7 +806,7 @@
           <a:lstStyle/>
           <a:p>
             <a:r>
-              <a:t>Four benefits, business language. Speed: new parts start from proven history, not a blank sheet. Accuracy: it compounds with every quote and it's always measured — which is precisely what makes our numbers defensible with suppliers. Retention: your best engineers' judgement becomes company data instead of leaving in a leaver's head. And proactive savings: the agent finds money continuously, quantified per year. Then the strategic kicker — a competitor can buy the same software tomorrow. They cannot buy our accumulated costing intelligence. That's the moat, and it deepens every day.</a:t>
+              <a:t>Four benefits, in plain terms. Quicker starts: a new part begins from similar past parts and real prices, instead of a blank sheet. Accuracy you can check: every real price is set against the estimate, and the error is shown on screen, not asserted in a slide. Knowledge stays: the costings and the prices stay in the tool when people move roles, and a new starter can see them from day one. And gaps found early: the background check flags real prices that are well above or below the should-cost, in pounds a year. The last line matters for approval too. The data stays on our laptop or our server. Nothing is sent out, and none of this needs AI. I haven't put a savings figure on this, because we haven't measured one yet.</a:t>
             </a:r>
           </a:p>
         </p:txBody>
@@ -1564,7 +876,7 @@
           <a:lstStyle/>
           <a:p>
             <a:r>
-              <a:t>New this year, and it sharpens the moat. Every should-cost now carries TWO ranges. On the left, the physics prior — a Monte-Carlo band reflecting how well the inputs are known; always available, every part. On the right, the new one: an empirical band built from the actual quotes you've logged, using conformal prediction — a method that comes with a mathematical coverage guarantee. So the tool stops asserting a precision and starts stating an observed fact: 'ninety percent of your real quotes for this family landed within plus-or-minus six-and-a-half percent.' That band edge is measured error, not a claim — which is exactly why a buyer can defend it in the room. And it tightens on its own. No competitor states uncertainty with a guarantee like this.</a:t>
+              <a:t>This one is a bit more technical, so I'll keep it simple. Each result can carry two ranges. On the left is the input range. It comes from a Monte Carlo run over how well each input is known, and it's there on every result, even with no real prices. On the right is a range built from the real prices we've logged for that group. It lets the tool say something like, ninety percent of our real prices landed within plus or minus so many percent. It shows up once there are three prices, but the ninety percent guarantee only really holds from about nine. Why bother? Because a buyer can't defend trust me. They can defend an error we actually saw. Today that right-hand range is empty for us, because we haven't logged any JLR prices yet.</a:t>
             </a:r>
           </a:p>
         </p:txBody>
@@ -1634,7 +946,7 @@
           <a:lstStyle/>
           <a:p>
             <a:r>
-              <a:t>This closes the loop on the agent. It used to rank findings by the raw gap — the theoretical money. Now it learns which findings actually convert into cash. Watch the table: the cast housing shows a two-hundred-thousand-pound gap, but in our data casting renegotiations almost never close — twenty percent — so the realizable value is forty thousand. The machined knuckle has HALF the raw gap, but machining usually closes — eighty percent — so it's worth eighty thousand realizable. The agent now ranks the machining finding ABOVE the bigger one. Why does that matter? Sourcing time is scarce — it now points at money you can actually get, and tracks the pounds truly saved so the tool proves its own worth. It stopped shouting about theoretical money.</a:t>
+              <a:t>This is a small loop on top of the background check. By default it ranks findings by the size of the gap. But some kinds of finding close and some never do. So when a buyer clicks Actioned pounds, or Dismiss, the tool records what happened. From that it learns, for each process and kind of finding, how often they close, and ranks by the money likely to come back. The table is a worked example with made-up numbers. A two hundred thousand pound casting gap that rarely closes is worth less than a hundred thousand pound machining gap that usually does. With no history, everything starts at an even fifty percent, and a single result can't swing it much. It also keeps a running total of pounds actually saved, which is the number I'd want to report.</a:t>
             </a:r>
           </a:p>
         </p:txBody>
@@ -1704,7 +1016,7 @@
           <a:lstStyle/>
           <a:p>
             <a:r>
-              <a:t>This is where a number becomes leverage. The tool now builds a small causal model of the part — it knows the material bucket is driven by a specific commodity index, aluminium here — and it runs the same overhead-and-margin maths the engine already uses to work out how sensitive the price is. Then it writes the argument for you. Read the live output: material is eight-thirty-nine, driven by aluminium; every one-percent move in the index shifts the piece price by eleven pence; a quote of ninety-five is only justified if aluminium were about fourteen percent above today — so ask them to prove it, or hold at eighty-six thirty-four. That's a sentence a buyer can say out loud and not get argued out of. Should-cost, converted into negotiating power — the number AND the words.</a:t>
+              <a:t>This is where a should-cost turns into something a buyer can say out loud. The tool links the material cost to the index that drives it, aluminium in this example. Then, using the same overhead and margin sums the engine already uses, it works out how much the piece price moves for each one percent move in that index. From there it can say: a quote of this much is only justified if aluminium were about this much above today's index, so ask the supplier to show that, or hold at the should-cost. I've left the numbers as letters because they come from your part. There's no AI in this. One caveat: the index prices on our dashboard are indicative, from a simulated feed, so treat it as if the metal moved this much, not as a market fact.</a:t>
             </a:r>
           </a:p>
         </p:txBody>
@@ -1774,7 +1086,7 @@
           <a:lstStyle/>
           <a:p>
             <a:r>
-              <a:t>Two ways to ask 'what if a commodity moves?' Left, one part: drag a slider from minus twenty to plus twenty percent and the price recomputes live under your finger — plus fifteen percent aluminium takes this part from eighty-six thirty-four to eighty-seven ninety-two. Right, the whole portfolio at once: push a move across every part and watch who changes status — steel up ten percent, seven parts flip underwater, here's the money at risk. That's sourcing getting ahead of the market instead of reacting to it. And the framing that keeps it honest: it's always a conditional — IF the index moves — never a forecast we can't stand behind. Connect a live market feed and the same machinery becomes a real forecast overnight.</a:t>
+              <a:t>Two ways to ask what happens if a metal price moves. On the left, for one part, there's a slider from minus twenty to plus twenty percent, and the piece price is worked out again as you drag it. On the right, for every stored part at once, you apply one move, say steel up ten percent, and see which parts would slip below their should-cost and how much money that puts at risk. That lets sourcing see a risk before it lands. What keeps this honest is that it's always a what-if. It never claims to forecast prices. The prices on the dashboard are indicative, not a live market feed, and they don't change any costing. If we connect a live feed later, the same sums apply. That's a plan, not something we have today.</a:t>
             </a:r>
           </a:p>
         </p:txBody>
@@ -1844,7 +1156,7 @@
           <a:lstStyle/>
           <a:p>
             <a:r>
-              <a:t>Now the feature I'm proudest of this year. Photograph a circuit board, and in about sixty seconds you get a costed bill of materials. The story here is honesty about the journey: it started as a clever demo, and complex automotive boards would sometimes come back EMPTY — a lot of compute, no result. We fixed that at the root, then hardened the whole pipeline. The chart is the proof: the same real ECU, costed by an engineer bottom-up in half a day versus the AI from one photo — sixty-nine pounds against seventy-three, within about five percent, in sixty seconds. On the right, the five fixes that got us there — grounding prices to a real catalogue, capping any part the model misreads so one bad line can't blow up the total, making fabrication deterministic, and splitting the headline into what you can trust versus what to verify. Bottom line: the two-to-three-times over-costing is gone. Same photo, same answer, every run — and it tells you exactly which lines to firm up before you quote.</a:t>
+              <a:t>I want to be upfront about this one, because it was a highlight in earlier versions of this deck. The PCB photo reader takes a photo of a circuit board and builds a costed bill of materials. Reading the photo needs AI, so at JLR it's switched off and the screen is hidden. What does work with AI off is on the left. You can still cost PCB fabrication and assembly from typed inputs. The fab price comes from fabricators' price tables, and because it's a bought-in price, we don't add overhead or margin on top. On the right is the work done so the photo reader is solid if it's ever switched on: catalogue price checks, caps on misread parts, and a clear split between pounds you can trust and pounds to check. I've taken out the old accuracy chart.</a:t>
             </a:r>
           </a:p>
         </p:txBody>
@@ -1914,7 +1226,7 @@
           <a:lstStyle/>
           <a:p>
             <a:r>
-              <a:t>If you take one competitive message away, take this. Rivals can demo continuous learning and adaptive reasoning — but as a black box, a number you're told to trust. Our principle is the opposite, and it's the harder thing to build: every learned or derived value stays auditable. The bias factor, the conformal band, the hit-rate, the coach's arithmetic — all of it is a value a cost engineer can read and defend across the table. The AI narrates and explains; it never sets the price in secret. So we match the market on learning, autonomy and causal reasoning — and we beat it on the one thing that actually wins deals in this business: defensibility. Autonomous, self-improving, glass-box, AND on-premise so the intelligence never leaves our walls. That combination doesn't exist anywhere else.</a:t>
+              <a:t>If there's one message about why this is different, it's that you can check every number. Every learned value is something a cost engineer can read: a median, a match score, a gap times a volume. There are no hidden weights sitting behind the price. And even in a build where AI is on, AI never sets a price. The rows below just summarise the deck. It learns from real prices. It watches in the background and learns which gaps close. It knows what drives cost and can write the counter-argument. Every number traces back to a rate or a logged price, and the exports carry the same total to the penny. And it runs on a laptop with no internet and no AI. I'd rather win on that than on a claim I can't back up.</a:t>
             </a:r>
           </a:p>
         </p:txBody>
@@ -1984,7 +1296,7 @@
           <a:lstStyle/>
           <a:p>
             <a:r>
-              <a:t>If you remember four numbers, remember these. Error fell thirty-six-fold — eleven percent down to under one — after the tool learned from just three real quotes. The background agent found half a million pounds a year of pricing issues with nobody at the keyboard. It recognised a brand-new bracket against past parts at ninety-nine percent and told us why. And it's production-grade — one thousand seven hundred and seventy-seven automated tests. But here's the one line that matters: costing intelligence used to live in people's heads and walk out the door when they left. Now it accumulates as a company asset that gets more valuable every day we use it.</a:t>
+              <a:t>Here's the short version. First, after three real prices are logged for a process, the tool starts correcting its own estimates and its range. Second, a background check looks over every stored part every six hours, while the tool is running, and flags where we're paying well above or below the should-cost. Third, none of this needs AI. It's all simple sums. Fourth, the tool as a whole has 2,438 automated tests, a hand calculation it matches to under a hundredth of a percent, and six real production parts pinned so they can't drift. Now the honest bit. The memory starts empty, and we haven't yet compared any estimate with a price JLR actually paid. So I'm not going to quote you an accuracy figure. That comes once we start logging real prices.</a:t>
             </a:r>
           </a:p>
         </p:txBody>
@@ -2054,7 +1366,7 @@
           <a:lstStyle/>
           <a:p>
             <a:r>
-              <a:t>To close. The capability is built, tested — one thousand seven hundred and seventy-seven tests — and live, at no extra licence cost, running on our own infrastructure. I'll be straight about the one dependency: the intelligence starts empty and grows with use. So the ask is three small decisions. One: make 'Log Actual £' a one-click habit when quotes come in. Two: approve a one-off import of our historical quotes so the system starts smart — a day or two of effort. Three: put the agent's findings on the sourcing agenda each month; it's already finding money. Do those three things and this becomes a compounding asset from day one. Thank you — I'm happy to take questions, or show you the live system right now.</a:t>
+              <a:t>This is a newer piece, and it's about shape rather than price. The old way was to look at a finished cost and guess what might be wrong with the design. Now, after a STEP or IGES upload, the tool measures the 3D model face by face and names the features that cost money. There are nineteen rules, and every one cites a published source, such as the ASM Handbook, NADCA or Machinery's Handbook. They're split into six packs: casting, forging, machining, injection moulding, blow moulding and sheet metal. A finding names the faces involved and the measured value, and you can click it to see those faces on the model. It runs in the background, so nobody waits. And every part lists what it could not check, so a short list is never taken as a clean bill of health.</a:t>
             </a:r>
           </a:p>
         </p:txBody>
@@ -2124,7 +1436,7 @@
           <a:lstStyle/>
           <a:p>
             <a:r>
-              <a:t>Two new capabilities since we last spoke, and this is the first. Until now the tool looked at the finished cost and worked backwards — tooling looks high, so something about the shape must be expensive. That is inference. Now it opens the 3D model and measures every single face on the part, and it tells you exactly which features cost money. Nineteen rules, and every one of them cites a published standard — the ASM Handbook, the die-casting association, Machinery's Handbook. That was a rule I set myself: no citation, no ship. If we cannot say where a threshold came from, it does not go in. Six commodity packs, because a casting and a sheet-metal part fail in completely different ways. The middle card is the one engineers care about. It does not say tooling looks high. It says face one-eight-six sits at a hundred and thirty-five degrees to the draw direction and cannot come out of the die. You can click it and see the face highlighted on the model. That is a conversation with a supplier, not a hunch. Two more things at the bottom. It runs by itself in the background after upload, so nobody waits. And — this is the part I insisted on — every part also lists what it could NOT check. A short list of problems must never be mistaken for a clean part.</a:t>
+              <a:t>Gears came from cost engineering and the plant asking for them. Before, a gear went through as a general machined part, and that model can't see a tooth. Look at the three rows. A loose gear, ISO class nine, is cut, deburred and checked. Ask for class six on a hardened gear and the tool doesn't just multiply the price. It adds a grinding step, because hardening distorts the teeth and only grinding can correct that. An internal ring gear can't be hobbed, because a hob can't get inside the bore, so the tool picks power skiving instead. The shape decides, not a preference. I've left the prices off, because they came from one demo run. And two honest points: if no machine we know can make the gear, it refuses. And the shop figures are representative until the plant gives us its own.</a:t>
             </a:r>
           </a:p>
         </p:txBody>
@@ -2194,7 +1506,7 @@
           <a:lstStyle/>
           <a:p>
             <a:r>
-              <a:t>The second new thing, and this one came directly from cost engineering and the plant asking for it. Gears used to go through the tool as if they were ordinary milled parts, and the milling model cannot see a tooth. Look at the three rows. Same gear, same size, same programme. The only thing changing is how accurate we ask it to be. A loose gear, we cut the teeth and check it — eight pounds twenty-six. An accurate gear has to be hardened in a furnace, and because hardening bends it slightly, it then has to be ground. Two extra machines. Thirteen fifty-five. So asking for a better gear does not make the same work cost more. It adds machines. Any tool that just multiplies by one-point-four is wrong. Bottom row is an internal ring gear. A hob physically cannot get inside a bore, so the tool does not even offer it — it picks a different process. Geometry decides, not preference. The two boxes underneath matter as much as the numbers. If we cannot make a gear on any machine we know about, the tool refuses rather than quietly costing it on the nearest one. And it is honest that the shop figures are representative until your plant gives us theirs — it prints that warning on every single gear estimate. I would rather it under-claim than have your plant head catch it out.</a:t>
+              <a:t>To close. The learning features are built and tested, as part of a tool with 2,438 automated tests. They work with AI off, there's no extra licence, and the data stays on our own laptop or server. The honest dependency is that it starts empty, and we haven't yet compared any estimate with a price JLR paid. So the ask is three small decisions. One, make Log Actual pounds part of handling every quote. It's one click. Two, import our past quotes as a CSV so the correction doesn't start from nothing. Three, put the background check's findings on the sourcing agenda each month, so someone acts on them. If we do those three things, we'll have real accuracy figures to report back, whatever they turn out to be. Thank you. Happy to take questions.</a:t>
             </a:r>
           </a:p>
         </p:txBody>
@@ -2264,7 +1576,7 @@
           <a:lstStyle/>
           <a:p>
             <a:r>
-              <a:t>"Agentic" gets thrown around a lot, so let me make it concrete — four plain verbs. It REMEMBERS: every analysis becomes a stored case. It RECOGNISES: new parts get matched to that memory instantly. It SELF-CORRECTS: real quotes teach it, and its accuracy is measured, not claimed. And it ACTS: an agent raises findings without being asked. One design choice underpins all of it — every suggestion shows its source parts and its arithmetic. That's deliberate, because a number you can't defend is worthless in a supplier negotiation. Ours you can defend, line by line.</a:t>
+              <a:t>The word agentic gets used a lot, so let me keep it to four plain words. It remembers: every costing is saved, with the inputs and the result. It recognises: when you cost a new part, it shows you up to three similar ones we've done before and tells you why they match. It corrects itself: once there are three real prices for a process, it adjusts the estimate and shows its own error. And it keeps watch: every six hours it re-checks stored parts for price gaps. The design choice I care about most is at the bottom. There's no AI in any of this. Every suggestion shows which parts it came from and how it was worked out. That's what lets a buyer use it in front of a supplier without being caught out.</a:t>
             </a:r>
           </a:p>
         </p:txBody>
@@ -2334,7 +1646,7 @@
           <a:lstStyle/>
           <a:p>
             <a:r>
-              <a:t>Here's the whole machine on one slide — and the punchline is how little it asks of the engineer. They cost a part exactly as they do today. Everything blue and automatic happens on its own: it remembers, it recognises, it suggests, and the agent keeps watch. There is exactly ONE new habit — a single click, 'Log Actual £,' when a real quote lands. That one click is the fuel for every loop on this slide, and every loop makes the next estimate sharper. No new workload, compounding returns. That's the deal.</a:t>
+              <a:t>This is the whole loop on one slide. The engineer costs a part exactly as they do today. When they're signed in, the tool saves that costing, looks for similar parts, and shows suggestions like the median cost of those parts and the material they used. That all happens on its own. The one new habit is step five. When a real supplier price comes in, someone clicks Log Actual pounds. That's it. That single click is what the tool learns from. Once a process has three of those, the correction switches on. And step six, the background check, uses the same real prices to flag gaps. So the extra work is small. But I'll be straight: if nobody logs real prices, the loop has nothing to learn from.</a:t>
             </a:r>
           </a:p>
         </p:txBody>
@@ -2404,7 +1716,7 @@
           <a:lstStyle/>
           <a:p>
             <a:r>
-              <a:t>Capability one — the memory. For every analysis we keep a fingerprint of the part, the full costed result, any real quotes, and — this is the clever bit — the exact places an expert overrode the AI. Those corrections are our engineers literally teaching the tool. On the right is why it matters to us specifically: it's shared, so a junior inherits senior judgement on day one; it lives on our servers, so it's our asset, not a vendor's; and it compounds — genuinely useful after only twenty or thirty analyses. Every costing we run from today is a deposit into an account that only grows.</a:t>
+              <a:t>Capability one is the memory. For every costing, the tool keeps a fingerprint of the part: the process, the material, the weight, the size, the region and the annual volume. It keeps the result, all eight cost buckets. It keeps the real price once someone logs it, and the date it was costed. If a CAD file was used, it also keeps some shape data, like size, volume and hole count. On the right is why that matters. It's shared by everyone on the same installation, so one engineer's work helps the next. It stays in the tool's own database, on our laptop or our server, and nothing is sent out. If you re-cost a part with the same name and process, it updates the record rather than making a copy. And it starts empty, so it gets more useful the more we use it.</a:t>
             </a:r>
           </a:p>
         </p:txBody>
@@ -2474,7 +1786,7 @@
           <a:lstStyle/>
           <a:p>
             <a:r>
-              <a:t>Capability two, shown with the tool's actual live output. An engineer starts a new aluminium bracket. Before they've even finished, the tool has surfaced the three most similar parts we've ever costed — at ninety-eight to ninety-nine percent — and it tells you WHY they matched: same material family, same weight class, same region. Then it hands over the gold: the median cost, the shared material, and the real prices we actually paid. A junior just stood on the shoulders of every senior who came before them. And notice — every number names its source. Nothing here is a black box.</a:t>
+              <a:t>Capability two is recognition. When an engineer costs a new part, the tool looks through past costings of the same process and shows up to three that match at fifty-five percent or better. For each one it shows a match score and what matched, such as material family, weight, size or region. It shows what that part cost and, if we logged one, what we actually paid. Then it makes a few suggestions: the median cost of the similar parts, the material most of them used, and a warning if this new estimate is fifteen percent or more away from them. That warning names the cost bucket that differs most, so you know where to look. Nothing here is a guess from a black box. Every suggestion names the parts it came from.</a:t>
             </a:r>
           </a:p>
         </p:txBody>
@@ -2544,7 +1856,7 @@
           <a:lstStyle/>
           <a:p>
             <a:r>
-              <a:t>Capability three is the accuracy engine, and this is a real measured result. Our machining estimates ran about eleven percent LOW against real prices. After the tool learned from three logged quotes, the error was three-tenths of a percent. Now look right — and this is the subtle, important part. Machining ran low; our China castings ran high. Average them together and everything looks 'fine' — the errors cancel and hide. The tool refuses to average. It corrects each process, material and region separately, so it catches exactly what a portfolio average conceals. Accuracy here is measured against reality and reported out loud — not asserted on a slide.</a:t>
+              <a:t>Capability three is self-correction. When a real price arrives, you click once to log it, or you can paste in a batch of past prices as a CSV. The tool compares its estimate with the real price. With fewer than three prices for a group, it does nothing except tell you how many more it needs. At three, it takes the median of real price divided by estimate and applies that as a correction. It uses the narrowest group that has three prices: process plus material plus region first, then process plus material, then the process on its own. And it shows its error before and after. Why groups? Because one process can run low and another high, and in an average they cancel out. I used to show a chart here from a demo. I've taken it out, because we have no JLR prices in it yet.</a:t>
             </a:r>
           </a:p>
         </p:txBody>
@@ -2614,7 +1926,7 @@
           <a:lstStyle/>
           <a:p>
             <a:r>
-              <a:t>Capability four — honesty about precision, which is a feature, not a weakness. Every estimate now comes as a range: optimistic, most likely, conservative. Early on, with no evidence, that range is wide — and that IS the truth. As real quotes prove the tool right, the range tightens on its own: on our test part, from plus-or-minus twenty percent down to three. Give a buyer this and you've handed them a script — the conservative end is the walk-away, the optimistic end is the stretch target. A single number pretends to a confidence early estimates simply don't have. This tells the truth, and the truth negotiates better.</a:t>
+              <a:t>Capability four is about being honest on precision. Every result comes as a range: an optimistic end, a most likely figure, and a conservative end. Before we have any real prices, the width comes from how well each input is known. The tool runs a Monte Carlo simulation over every cost driver. Once there are three real prices for that group, the width comes from the error the tool actually made on them instead. There's a floor on it, so three lucky prices can't make it claim a razor-thin range. The point I'd stress is that this cuts both ways. If the tool has been right, the range narrows. If it's been wrong, the range widens and tells you so. For a buyer, the conservative end is a sensible walk-away, and the optimistic end is a stretch target.</a:t>
             </a:r>
           </a:p>
         </p:txBody>
@@ -2684,7 +1996,7 @@
           <a:lstStyle/>
           <a:p>
             <a:r>
-              <a:t>Capability five — this is the one that earns the word 'agentic.' A monitor runs on our server on a schedule and compares what we PAY against what things SHOULD cost, using everything the tool has learned. In the live demo, with nobody at the keyboard, it opened three findings by itself: a renegotiation worth four hundred thousand a year, an 'underwater' price that flags supply risk, and a stale estimate that needs a fresh quote. Half a million pounds a year, surfaced unattended — and every finding shows its arithmetic, ready to carry straight into a supplier meeting. The tool isn't waiting to be asked anymore. It's already working.</a:t>
+              <a:t>Capability five is the background check. While the tool is running, it goes through every stored part every six hours, and once shortly after start-up. It needs a logged real price to spot a gap. If the real price is eight percent or more above the should-cost, it opens a renegotiation finding and works out the gap in pounds a year, using the part's annual volume. If it's eight percent or more below, it flags an underwater price, because that can mean a scope mix-up or a supplier who can't sustain it. And if an estimate is over ninety days old and was never checked, it asks for a real price. The example at the bottom just shows the sum: eight pounds a part, fifty thousand parts a year. Those are example numbers, not a JLR finding.</a:t>
             </a:r>
           </a:p>
         </p:txBody>
@@ -5912,7 +5224,7 @@
                 </a:solidFill>
                 <a:latin typeface="Calibri"/>
               </a:rPr>
-              <a:t>AI  COST  INTELLIGENCE</a:t>
+              <a:t>SHOULD-COST  INTELLIGENCE</a:t>
             </a:r>
           </a:p>
         </p:txBody>
@@ -5954,7 +5266,7 @@
                 </a:solidFill>
                 <a:latin typeface="Cambria"/>
               </a:rPr>
-              <a:t>Agentic AI in CostVision</a:t>
+              <a:t>How CostVision learns</a:t>
             </a:r>
           </a:p>
         </p:txBody>
@@ -5996,7 +5308,7 @@
                 </a:solidFill>
                 <a:latin typeface="Calibri"/>
               </a:rPr>
-              <a:t>A costing tool that learns from every analysis, remembers your parts,</a:t>
+              <a:t>It remembers our parts, learns from real prices and watches for gaps.</a:t>
             </a:r>
           </a:p>
           <a:p>
@@ -6015,7 +5327,7 @@
                 </a:solidFill>
                 <a:latin typeface="Calibri"/>
               </a:rPr>
-              <a:t>and finds savings on its own — while staying fully auditable.</a:t>
+              <a:t>The learning is plain arithmetic, so it works with AI switched off.</a:t>
             </a:r>
           </a:p>
         </p:txBody>
@@ -6180,7 +5492,7 @@
                 </a:solidFill>
                 <a:latin typeface="Calibri"/>
               </a:rPr>
-              <a:t>Self-corrects</a:t>
+              <a:t>Corrects itself</a:t>
             </a:r>
           </a:p>
         </p:txBody>
@@ -6235,7 +5547,7 @@
                 </a:solidFill>
                 <a:latin typeface="Calibri"/>
               </a:rPr>
-              <a:t>Acts autonomously</a:t>
+              <a:t>Keeps watch</a:t>
             </a:r>
           </a:p>
         </p:txBody>
@@ -6277,7 +5589,7 @@
                 </a:solidFill>
                 <a:latin typeface="Calibri"/>
               </a:rPr>
-              <a:t>Management briefing  ·  July 2026  ·  All figures verified from live system runs</a:t>
+              <a:t>Management briefing  ·  September 2026  ·  AI is switched off in the JLR build</a:t>
             </a:r>
           </a:p>
         </p:txBody>
@@ -6522,7 +5834,7 @@
                 </a:solidFill>
                 <a:latin typeface="Calibri"/>
               </a:rPr>
-              <a:t>AI  COST  INTELLIGENCE</a:t>
+              <a:t>SHOULD-COST  INTELLIGENCE</a:t>
             </a:r>
           </a:p>
         </p:txBody>
@@ -6608,7 +5920,7 @@
                 </a:solidFill>
                 <a:latin typeface="Calibri"/>
               </a:rPr>
-              <a:t>THE WIDER AI PLATFORM</a:t>
+              <a:t>AT JLR TODAY</a:t>
             </a:r>
           </a:p>
         </p:txBody>
@@ -6650,7 +5962,7 @@
                 </a:solidFill>
                 <a:latin typeface="Cambria"/>
               </a:rPr>
-              <a:t>Supporting AI capabilities already in the tool</a:t>
+              <a:t>What works with AI off — and what is switched off</a:t>
             </a:r>
           </a:p>
         </p:txBody>
@@ -6716,7 +6028,7 @@
             <a:avLst/>
           </a:prstGeom>
           <a:solidFill>
-            <a:srgbClr val="1D6FB8"/>
+            <a:srgbClr val="2A7F50"/>
           </a:solidFill>
           <a:ln>
             <a:noFill/>
@@ -6778,20 +6090,11 @@
             <a:r>
               <a:rPr sz="1500" b="1" i="0">
                 <a:solidFill>
-                  <a:srgbClr val="1D6FB8"/>
-                </a:solidFill>
-                <a:latin typeface="Segoe UI Emoji"/>
-              </a:rPr>
-              <a:t>📚</a:t>
-            </a:r>
-            <a:r>
-              <a:rPr sz="1500" b="1" i="0">
-                <a:solidFill>
-                  <a:srgbClr val="1D6FB8"/>
-                </a:solidFill>
-                <a:latin typeface="Calibri"/>
-              </a:rPr>
-              <a:t>  Grounded AI assistant</a:t>
+                  <a:srgbClr val="2A7F50"/>
+                </a:solidFill>
+                <a:latin typeface="Calibri"/>
+              </a:rPr>
+              <a:t>Works with AI off: CAD to Cost</a:t>
             </a:r>
           </a:p>
         </p:txBody>
@@ -6833,7 +6136,7 @@
                 </a:solidFill>
                 <a:latin typeface="Calibri"/>
               </a:rPr>
-              <a:t>Answers cite our actual rate library and past costings — the AI quotes our data, it doesn't improvise. Every figure is traceable.</a:t>
+              <a:t>Upload STEP, IGES or STL. The tool measures the part, applies rules, and asks the engineer where the geometry cannot decide.</a:t>
             </a:r>
           </a:p>
         </p:txBody>
@@ -6899,7 +6202,7 @@
             <a:avLst/>
           </a:prstGeom>
           <a:solidFill>
-            <a:srgbClr val="6B3FA0"/>
+            <a:srgbClr val="2A7F50"/>
           </a:solidFill>
           <a:ln>
             <a:noFill/>
@@ -6961,20 +6264,11 @@
             <a:r>
               <a:rPr sz="1500" b="1" i="0">
                 <a:solidFill>
-                  <a:srgbClr val="6B3FA0"/>
-                </a:solidFill>
-                <a:latin typeface="Segoe UI Emoji"/>
-              </a:rPr>
-              <a:t>📄</a:t>
-            </a:r>
-            <a:r>
-              <a:rPr sz="1500" b="1" i="0">
-                <a:solidFill>
-                  <a:srgbClr val="6B3FA0"/>
-                </a:solidFill>
-                <a:latin typeface="Calibri"/>
-              </a:rPr>
-              <a:t>  RFQ analyst</a:t>
+                  <a:srgbClr val="2A7F50"/>
+                </a:solidFill>
+                <a:latin typeface="Calibri"/>
+              </a:rPr>
+              <a:t>Works with AI off: checks and extras</a:t>
             </a:r>
           </a:p>
         </p:txBody>
@@ -7016,7 +6310,7 @@
                 </a:solidFill>
                 <a:latin typeface="Calibri"/>
               </a:rPr>
-              <a:t>Drop in an RFQ package: it costs every line, flags risky prices and single-source parts, and drafts a prioritised negotiation brief.</a:t>
+              <a:t>Self-audit on every result, shape-based DFM checks, the negotiation pack, and a CO₂e figure next to the £.</a:t>
             </a:r>
           </a:p>
         </p:txBody>
@@ -7082,7 +6376,7 @@
             <a:avLst/>
           </a:prstGeom>
           <a:solidFill>
-            <a:srgbClr val="0D7D71"/>
+            <a:srgbClr val="99651A"/>
           </a:solidFill>
           <a:ln>
             <a:noFill/>
@@ -7144,20 +6438,11 @@
             <a:r>
               <a:rPr sz="1500" b="1" i="0">
                 <a:solidFill>
-                  <a:srgbClr val="0D7D71"/>
-                </a:solidFill>
-                <a:latin typeface="Segoe UI Emoji"/>
-              </a:rPr>
-              <a:t>📐</a:t>
-            </a:r>
-            <a:r>
-              <a:rPr sz="1500" b="1" i="0">
-                <a:solidFill>
-                  <a:srgbClr val="0D7D71"/>
-                </a:solidFill>
-                <a:latin typeface="Calibri"/>
-              </a:rPr>
-              <a:t>  CAD feature costing</a:t>
+                  <a:srgbClr val="99651A"/>
+                </a:solidFill>
+                <a:latin typeface="Calibri"/>
+              </a:rPr>
+              <a:t>Switched off at JLR: AI assistant and agent</a:t>
             </a:r>
           </a:p>
         </p:txBody>
@@ -7199,7 +6484,7 @@
                 </a:solidFill>
                 <a:latin typeface="Calibri"/>
               </a:rPr>
-              <a:t>Reads the 3D model and prices individual design features — holes, threads, surfaces — so designers see exactly what drives cost.</a:t>
+              <a:t>The chat assistant and "describe a part". Built and tested, turned off by a setting. When on, rate-limited per user.</a:t>
             </a:r>
           </a:p>
         </p:txBody>
@@ -7265,7 +6550,7 @@
             <a:avLst/>
           </a:prstGeom>
           <a:solidFill>
-            <a:srgbClr val="2A7F50"/>
+            <a:srgbClr val="99651A"/>
           </a:solidFill>
           <a:ln>
             <a:noFill/>
@@ -7327,20 +6612,11 @@
             <a:r>
               <a:rPr sz="1500" b="1" i="0">
                 <a:solidFill>
-                  <a:srgbClr val="2A7F50"/>
-                </a:solidFill>
-                <a:latin typeface="Segoe UI Emoji"/>
-              </a:rPr>
-              <a:t>🌱</a:t>
-            </a:r>
-            <a:r>
-              <a:rPr sz="1500" b="1" i="0">
-                <a:solidFill>
-                  <a:srgbClr val="2A7F50"/>
-                </a:solidFill>
-                <a:latin typeface="Calibri"/>
-              </a:rPr>
-              <a:t>  Carbon co-costing</a:t>
+                  <a:srgbClr val="99651A"/>
+                </a:solidFill>
+                <a:latin typeface="Calibri"/>
+              </a:rPr>
+              <a:t>Switched off at JLR: reading photos and text</a:t>
             </a:r>
           </a:p>
         </p:txBody>
@@ -7382,7 +6658,7 @@
                 </a:solidFill>
                 <a:latin typeface="Calibri"/>
               </a:rPr>
-              <a:t>Every part gets a CO₂e figure alongside the £ — increasingly demanded in automotive &amp; aerospace RFQs.</a:t>
+              <a:t>PCB photo to bill of materials, and reading RFQ free text. The tool says "AI is switched off in this installation".</a:t>
             </a:r>
           </a:p>
         </p:txBody>
@@ -7424,7 +6700,7 @@
                 </a:solidFill>
                 <a:latin typeface="Calibri"/>
               </a:rPr>
-              <a:t>Together with 19 commodity cost engines, CAD-to-cost, and PCB photo-to-BOM — the agentic layer sits on top of all of it.</a:t>
+              <a:t>Even when AI is on, it never sets a price. All of this sits on 19 manufacturing processes and 20 regions.</a:t>
             </a:r>
           </a:p>
         </p:txBody>
@@ -7625,7 +6901,7 @@
                 </a:solidFill>
                 <a:latin typeface="Calibri"/>
               </a:rPr>
-              <a:t>AI  COST  INTELLIGENCE</a:t>
+              <a:t>SHOULD-COST  INTELLIGENCE</a:t>
             </a:r>
           </a:p>
         </p:txBody>
@@ -7753,7 +7029,7 @@
                 </a:solidFill>
                 <a:latin typeface="Cambria"/>
               </a:rPr>
-              <a:t>What it needs from us — honestly, very little</a:t>
+              <a:t>What it needs from us — very little</a:t>
             </a:r>
           </a:p>
         </p:txBody>
@@ -7902,7 +7178,7 @@
                 </a:solidFill>
                 <a:latin typeface="Calibri"/>
               </a:rPr>
-              <a:t>     every analysis feeds the memory automatically</a:t>
+              <a:t>     every costing goes into the memory</a:t>
             </a:r>
           </a:p>
         </p:txBody>
@@ -7944,7 +7220,7 @@
                 </a:solidFill>
                 <a:latin typeface="Calibri"/>
               </a:rPr>
-              <a:t>2.  One click when a real quote arrives</a:t>
+              <a:t>2.  One click when a real price arrives</a:t>
             </a:r>
           </a:p>
           <a:p>
@@ -7963,7 +7239,7 @@
                 </a:solidFill>
                 <a:latin typeface="Calibri"/>
               </a:rPr>
-              <a:t>     "Log Actual £" — this is the learning fuel</a:t>
+              <a:t>     "Log Actual £" is what it learns from</a:t>
             </a:r>
           </a:p>
         </p:txBody>
@@ -8005,7 +7281,7 @@
                 </a:solidFill>
                 <a:latin typeface="Calibri"/>
               </a:rPr>
-              <a:t>3.  Optional: CAD file or BOM</a:t>
+              <a:t>3.  Optional: a CAD file</a:t>
             </a:r>
           </a:p>
           <a:p>
@@ -8024,7 +7300,7 @@
                 </a:solidFill>
                 <a:latin typeface="Calibri"/>
               </a:rPr>
-              <a:t>     sharper matching and better auto-fill</a:t>
+              <a:t>     STEP, IGES or STL gives sharper matching</a:t>
             </a:r>
           </a:p>
         </p:txBody>
@@ -8066,7 +7342,7 @@
                 </a:solidFill>
                 <a:latin typeface="Calibri"/>
               </a:rPr>
-              <a:t>4.  Optional: historic quotes (CSV)</a:t>
+              <a:t>4.  Optional: past prices as a CSV</a:t>
             </a:r>
           </a:p>
           <a:p>
@@ -8085,7 +7361,7 @@
                 </a:solidFill>
                 <a:latin typeface="Calibri"/>
               </a:rPr>
-              <a:t>     seeds the memory so it starts smart, not empty</a:t>
+              <a:t>     so the correction does not start empty</a:t>
             </a:r>
           </a:p>
         </p:txBody>
@@ -8215,7 +7491,7 @@
                 </a:solidFill>
                 <a:latin typeface="Calibri"/>
               </a:rPr>
-              <a:t>✓  </a:t>
+              <a:t>•  </a:t>
             </a:r>
             <a:r>
               <a:rPr sz="1250" b="0" i="0">
@@ -8224,7 +7500,7 @@
                 </a:solidFill>
                 <a:latin typeface="Calibri"/>
               </a:rPr>
-              <a:t>Remembers every analysis (no duplicates, org-wide)</a:t>
+              <a:t>Remembers every costing, one record per part</a:t>
             </a:r>
           </a:p>
         </p:txBody>
@@ -8266,7 +7542,7 @@
                 </a:solidFill>
                 <a:latin typeface="Calibri"/>
               </a:rPr>
-              <a:t>✓  </a:t>
+              <a:t>•  </a:t>
             </a:r>
             <a:r>
               <a:rPr sz="1250" b="0" i="0">
@@ -8275,7 +7551,7 @@
                 </a:solidFill>
                 <a:latin typeface="Calibri"/>
               </a:rPr>
-              <a:t>Finds &amp; explains similar past parts instantly</a:t>
+              <a:t>Shows similar past parts and why they match</a:t>
             </a:r>
           </a:p>
         </p:txBody>
@@ -8317,7 +7593,7 @@
                 </a:solidFill>
                 <a:latin typeface="Calibri"/>
               </a:rPr>
-              <a:t>✓  </a:t>
+              <a:t>•  </a:t>
             </a:r>
             <a:r>
               <a:rPr sz="1250" b="0" i="0">
@@ -8326,7 +7602,7 @@
                 </a:solidFill>
                 <a:latin typeface="Calibri"/>
               </a:rPr>
-              <a:t>Suggests benchmarks, materials and real prices</a:t>
+              <a:t>Suggests median cost, material and real prices</a:t>
             </a:r>
           </a:p>
         </p:txBody>
@@ -8368,7 +7644,7 @@
                 </a:solidFill>
                 <a:latin typeface="Calibri"/>
               </a:rPr>
-              <a:t>✓  </a:t>
+              <a:t>•  </a:t>
             </a:r>
             <a:r>
               <a:rPr sz="1250" b="0" i="0">
@@ -8377,7 +7653,7 @@
                 </a:solidFill>
                 <a:latin typeface="Calibri"/>
               </a:rPr>
-              <a:t>Measures its own error and self-corrects per category</a:t>
+              <a:t>Measures its own error and corrects per group</a:t>
             </a:r>
           </a:p>
         </p:txBody>
@@ -8419,7 +7695,7 @@
                 </a:solidFill>
                 <a:latin typeface="Calibri"/>
               </a:rPr>
-              <a:t>✓  </a:t>
+              <a:t>•  </a:t>
             </a:r>
             <a:r>
               <a:rPr sz="1250" b="0" i="0">
@@ -8428,7 +7704,7 @@
                 </a:solidFill>
                 <a:latin typeface="Calibri"/>
               </a:rPr>
-              <a:t>Tightens confidence ranges as evidence grows</a:t>
+              <a:t>Sets the range from real error after 3 prices</a:t>
             </a:r>
           </a:p>
         </p:txBody>
@@ -8470,7 +7746,7 @@
                 </a:solidFill>
                 <a:latin typeface="Calibri"/>
               </a:rPr>
-              <a:t>✓  </a:t>
+              <a:t>•  </a:t>
             </a:r>
             <a:r>
               <a:rPr sz="1250" b="0" i="0">
@@ -8479,7 +7755,7 @@
                 </a:solidFill>
                 <a:latin typeface="Calibri"/>
               </a:rPr>
-              <a:t>Monitors all parts in the background &amp; raises findings</a:t>
+              <a:t>Re-checks stored parts and flags price gaps</a:t>
             </a:r>
           </a:p>
         </p:txBody>
@@ -8680,7 +7956,7 @@
                 </a:solidFill>
                 <a:latin typeface="Calibri"/>
               </a:rPr>
-              <a:t>AI  COST  INTELLIGENCE</a:t>
+              <a:t>SHOULD-COST  INTELLIGENCE</a:t>
             </a:r>
           </a:p>
         </p:txBody>
@@ -8808,7 +8084,7 @@
                 </a:solidFill>
                 <a:latin typeface="Cambria"/>
               </a:rPr>
-              <a:t>Results &amp; accuracy — measured, not promised</a:t>
+              <a:t>What is proven — and what is not</a:t>
             </a:r>
           </a:p>
         </p:txBody>
@@ -8896,7 +8172,7 @@
                 </a:solidFill>
                 <a:latin typeface="Calibri"/>
               </a:rPr>
-              <a:t>Estimating error after learning (machining segment)</a:t>
+              <a:t>Engine arithmetic vs a hand calculation (reference bracket, £23.27)</a:t>
             </a:r>
           </a:p>
         </p:txBody>
@@ -8938,7 +8214,7 @@
                 </a:solidFill>
                 <a:latin typeface="Calibri"/>
               </a:rPr>
-              <a:t>10.9%  →  0.3%</a:t>
+              <a:t>under 0.01%</a:t>
             </a:r>
           </a:p>
         </p:txBody>
@@ -9026,7 +8302,7 @@
                 </a:solidFill>
                 <a:latin typeface="Calibri"/>
               </a:rPr>
-              <a:t>Estimating error after learning (casting · China)</a:t>
+              <a:t>Real production parts pinned in a regression baseline</a:t>
             </a:r>
           </a:p>
         </p:txBody>
@@ -9068,7 +8344,7 @@
                 </a:solidFill>
                 <a:latin typeface="Calibri"/>
               </a:rPr>
-              <a:t>8.7%  →  0.6%</a:t>
+              <a:t>6 parts</a:t>
             </a:r>
           </a:p>
         </p:txBody>
@@ -9156,7 +8432,7 @@
                 </a:solidFill>
                 <a:latin typeface="Calibri"/>
               </a:rPr>
-              <a:t>Confidence band on the same part</a:t>
+              <a:t>Automated tests, plus browser tests on every run</a:t>
             </a:r>
           </a:p>
         </p:txBody>
@@ -9194,11 +8470,11 @@
             <a:r>
               <a:rPr sz="1400" b="1" i="0">
                 <a:solidFill>
-                  <a:srgbClr val="2A7F50"/>
-                </a:solidFill>
-                <a:latin typeface="Calibri"/>
-              </a:rPr>
-              <a:t>±20.4%  →  ±2.8%</a:t>
+                  <a:srgbClr val="6B3FA0"/>
+                </a:solidFill>
+                <a:latin typeface="Calibri"/>
+              </a:rPr>
+              <a:t>2,438 tests</a:t>
             </a:r>
           </a:p>
         </p:txBody>
@@ -9286,7 +8562,7 @@
                 </a:solidFill>
                 <a:latin typeface="Calibri"/>
               </a:rPr>
-              <a:t>Similar-part recognition on live example</a:t>
+              <a:t>Real prices needed before a correction is applied</a:t>
             </a:r>
           </a:p>
         </p:txBody>
@@ -9328,7 +8604,7 @@
                 </a:solidFill>
                 <a:latin typeface="Calibri"/>
               </a:rPr>
-              <a:t>98–99% match, reasons shown</a:t>
+              <a:t>3 per group</a:t>
             </a:r>
           </a:p>
         </p:txBody>
@@ -9416,7 +8692,7 @@
                 </a:solidFill>
                 <a:latin typeface="Calibri"/>
               </a:rPr>
-              <a:t>Autonomous findings in unattended demo</a:t>
+              <a:t>Estimates compared with a price JLR actually paid</a:t>
             </a:r>
           </a:p>
         </p:txBody>
@@ -9458,7 +8734,7 @@
                 </a:solidFill>
                 <a:latin typeface="Calibri"/>
               </a:rPr>
-              <a:t>£512,000 / yr surfaced</a:t>
+              <a:t>None yet</a:t>
             </a:r>
           </a:p>
         </p:txBody>
@@ -9546,7 +8822,7 @@
                 </a:solidFill>
                 <a:latin typeface="Calibri"/>
               </a:rPr>
-              <a:t>Automated tests protecting all of this</a:t>
+              <a:t>Accuracy against real prices</a:t>
             </a:r>
           </a:p>
         </p:txBody>
@@ -9584,11 +8860,11 @@
             <a:r>
               <a:rPr sz="1400" b="1" i="0">
                 <a:solidFill>
-                  <a:srgbClr val="6B3FA0"/>
-                </a:solidFill>
-                <a:latin typeface="Calibri"/>
-              </a:rPr>
-              <a:t>1,777 passing (77 suites)</a:t>
+                  <a:srgbClr val="99651A"/>
+                </a:solidFill>
+                <a:latin typeface="Calibri"/>
+              </a:rPr>
+              <a:t>Measured as we log them</a:t>
             </a:r>
           </a:p>
         </p:txBody>
@@ -9676,7 +8952,7 @@
                 </a:solidFill>
                 <a:latin typeface="Calibri"/>
               </a:rPr>
-              <a:t>How we verified: </a:t>
+              <a:t>Honest note: </a:t>
             </a:r>
             <a:r>
               <a:rPr sz="1200" b="0" i="0">
@@ -9685,7 +8961,7 @@
                 </a:solidFill>
                 <a:latin typeface="Calibri"/>
               </a:rPr>
-              <a:t>every number above comes from running the real system end-to-end — live server, real database, real API calls — not from slides or simulations.</a:t>
+              <a:t>the learning code is tested, but it has no JLR prices to learn from yet. We will report accuracy once we measure it.</a:t>
             </a:r>
           </a:p>
         </p:txBody>
@@ -9886,7 +9162,7 @@
                 </a:solidFill>
                 <a:latin typeface="Calibri"/>
               </a:rPr>
-              <a:t>AI  COST  INTELLIGENCE</a:t>
+              <a:t>SHOULD-COST  INTELLIGENCE</a:t>
             </a:r>
           </a:p>
         </p:txBody>
@@ -10140,31 +9416,13 @@
               </a:spcAft>
             </a:pPr>
             <a:r>
-              <a:rPr sz="1800" b="0" i="0">
+              <a:rPr sz="1600" b="1" i="0">
                 <a:solidFill>
                   <a:srgbClr val="1D6FB8"/>
                 </a:solidFill>
-                <a:latin typeface="Segoe UI Emoji"/>
-              </a:rPr>
-              <a:t>⚡</a:t>
-            </a:r>
-            <a:r>
-              <a:rPr sz="1800" b="0" i="0">
-                <a:solidFill>
-                  <a:srgbClr val="1D6FB8"/>
-                </a:solidFill>
-                <a:latin typeface="Calibri"/>
-              </a:rPr>
-              <a:t>  </a:t>
-            </a:r>
-            <a:r>
-              <a:rPr sz="1600" b="1" i="0">
-                <a:solidFill>
-                  <a:srgbClr val="1D6FB8"/>
-                </a:solidFill>
-                <a:latin typeface="Calibri"/>
-              </a:rPr>
-              <a:t>Faster costing</a:t>
+                <a:latin typeface="Calibri"/>
+              </a:rPr>
+              <a:t>Quicker starts</a:t>
             </a:r>
           </a:p>
         </p:txBody>
@@ -10206,7 +9464,7 @@
                 </a:solidFill>
                 <a:latin typeface="Calibri"/>
               </a:rPr>
-              <a:t>New parts start from proven history instead of a blank sheet — matches, materials and benchmarks appear instantly.</a:t>
+              <a:t>A new part starts from similar past parts and real prices, not a blank sheet.</a:t>
             </a:r>
           </a:p>
         </p:txBody>
@@ -10332,31 +9590,13 @@
               </a:spcAft>
             </a:pPr>
             <a:r>
-              <a:rPr sz="1800" b="0" i="0">
+              <a:rPr sz="1600" b="1" i="0">
                 <a:solidFill>
                   <a:srgbClr val="2A7F50"/>
                 </a:solidFill>
-                <a:latin typeface="Segoe UI Emoji"/>
-              </a:rPr>
-              <a:t>🎯</a:t>
-            </a:r>
-            <a:r>
-              <a:rPr sz="1800" b="0" i="0">
-                <a:solidFill>
-                  <a:srgbClr val="2A7F50"/>
-                </a:solidFill>
-                <a:latin typeface="Calibri"/>
-              </a:rPr>
-              <a:t>  </a:t>
-            </a:r>
-            <a:r>
-              <a:rPr sz="1600" b="1" i="0">
-                <a:solidFill>
-                  <a:srgbClr val="2A7F50"/>
-                </a:solidFill>
-                <a:latin typeface="Calibri"/>
-              </a:rPr>
-              <a:t>Accuracy that compounds</a:t>
+                <a:latin typeface="Calibri"/>
+              </a:rPr>
+              <a:t>Accuracy you can check</a:t>
             </a:r>
           </a:p>
         </p:txBody>
@@ -10398,7 +9638,7 @@
                 </a:solidFill>
                 <a:latin typeface="Calibri"/>
               </a:rPr>
-              <a:t>Every real quote makes the next estimate better. Accuracy is measured and reported — defensible in any negotiation.</a:t>
+              <a:t>Every real price is compared with the estimate. The error is shown, not claimed.</a:t>
             </a:r>
           </a:p>
         </p:txBody>
@@ -10524,24 +9764,6 @@
               </a:spcAft>
             </a:pPr>
             <a:r>
-              <a:rPr sz="1800" b="0" i="0">
-                <a:solidFill>
-                  <a:srgbClr val="6B3FA0"/>
-                </a:solidFill>
-                <a:latin typeface="Segoe UI Emoji"/>
-              </a:rPr>
-              <a:t>🏦</a:t>
-            </a:r>
-            <a:r>
-              <a:rPr sz="1800" b="0" i="0">
-                <a:solidFill>
-                  <a:srgbClr val="6B3FA0"/>
-                </a:solidFill>
-                <a:latin typeface="Calibri"/>
-              </a:rPr>
-              <a:t>  </a:t>
-            </a:r>
-            <a:r>
               <a:rPr sz="1600" b="1" i="0">
                 <a:solidFill>
                   <a:srgbClr val="6B3FA0"/>
@@ -10590,7 +9812,7 @@
                 </a:solidFill>
                 <a:latin typeface="Calibri"/>
               </a:rPr>
-              <a:t>Senior engineers' judgement is captured as data. It doesn't leave when people do — and juniors inherit it from day one.</a:t>
+              <a:t>Costings and real prices stay in the tool when people move on. New starters see them from day one.</a:t>
             </a:r>
           </a:p>
         </p:txBody>
@@ -10716,31 +9938,13 @@
               </a:spcAft>
             </a:pPr>
             <a:r>
-              <a:rPr sz="1800" b="0" i="0">
+              <a:rPr sz="1600" b="1" i="0">
                 <a:solidFill>
                   <a:srgbClr val="B03A2E"/>
                 </a:solidFill>
-                <a:latin typeface="Segoe UI Emoji"/>
-              </a:rPr>
-              <a:t>💰</a:t>
-            </a:r>
-            <a:r>
-              <a:rPr sz="1800" b="0" i="0">
-                <a:solidFill>
-                  <a:srgbClr val="B03A2E"/>
-                </a:solidFill>
-                <a:latin typeface="Calibri"/>
-              </a:rPr>
-              <a:t>  </a:t>
-            </a:r>
-            <a:r>
-              <a:rPr sz="1600" b="1" i="0">
-                <a:solidFill>
-                  <a:srgbClr val="B03A2E"/>
-                </a:solidFill>
-                <a:latin typeface="Calibri"/>
-              </a:rPr>
-              <a:t>Money found proactively</a:t>
+                <a:latin typeface="Calibri"/>
+              </a:rPr>
+              <a:t>Gaps found early</a:t>
             </a:r>
           </a:p>
         </p:txBody>
@@ -10782,7 +9986,7 @@
                 </a:solidFill>
                 <a:latin typeface="Calibri"/>
               </a:rPr>
-              <a:t>The agent watches all parts continuously and flags overpayment and pricing risk by itself, quantified in £/yr.</a:t>
+              <a:t>The background check flags real prices far from the should-cost, in £ a year.</a:t>
             </a:r>
           </a:p>
         </p:txBody>
@@ -10833,7 +10037,7 @@
                 </a:solidFill>
                 <a:latin typeface="Calibri"/>
               </a:rPr>
-              <a:t>the knowledge base runs on our infrastructure and grows into a proprietary asset competitors cannot buy.</a:t>
+              <a:t>the data stays on our laptop or server. Nothing is sent out, and none of it needs AI.</a:t>
             </a:r>
           </a:p>
         </p:txBody>
@@ -11034,7 +10238,7 @@
                 </a:solidFill>
                 <a:latin typeface="Calibri"/>
               </a:rPr>
-              <a:t>AI  COST  INTELLIGENCE</a:t>
+              <a:t>SHOULD-COST  INTELLIGENCE</a:t>
             </a:r>
           </a:p>
         </p:txBody>
@@ -11120,7 +10324,7 @@
                 </a:solidFill>
                 <a:latin typeface="Calibri"/>
               </a:rPr>
-              <a:t>NEW IN 2026 · ADVANCED INTELLIGENCE</a:t>
+              <a:t>TWO KINDS OF RANGE</a:t>
             </a:r>
           </a:p>
         </p:txBody>
@@ -11204,7 +10408,7 @@
                 </a:solidFill>
                 <a:latin typeface="Calibri"/>
               </a:rPr>
-              <a:t>Every should-cost now carries two ranges — the physics estimate, and an </a:t>
+              <a:t>Each should-cost can carry two ranges: one from the inputs, and one </a:t>
             </a:r>
             <a:r>
               <a:rPr sz="1350" b="1" i="0">
@@ -11213,7 +10417,7 @@
                 </a:solidFill>
                 <a:latin typeface="Calibri"/>
               </a:rPr>
-              <a:t>empirical band proven against your own logged quotes.</a:t>
+              <a:t>measured against the real prices you logged.</a:t>
             </a:r>
           </a:p>
         </p:txBody>
@@ -11345,7 +10549,7 @@
                 </a:solidFill>
                 <a:latin typeface="Calibri"/>
               </a:rPr>
-              <a:t>Physics prior (Monte-Carlo)</a:t>
+              <a:t>Input range (Monte Carlo)</a:t>
             </a:r>
           </a:p>
         </p:txBody>
@@ -11387,7 +10591,7 @@
                 </a:solidFill>
                 <a:latin typeface="Calibri"/>
               </a:rPr>
-              <a:t>How well the inputs are known — before you have any real quotes.</a:t>
+              <a:t>How well the inputs are known. Needs no real prices at all.</a:t>
             </a:r>
           </a:p>
           <a:p>
@@ -11406,7 +10610,7 @@
                 </a:solidFill>
                 <a:latin typeface="Calibri"/>
               </a:rPr>
-              <a:t>Example:  £86.34  ± 3.4%</a:t>
+              <a:t>Shown as P10 to P90 on every result</a:t>
             </a:r>
           </a:p>
           <a:p>
@@ -11425,7 +10629,7 @@
                 </a:solidFill>
                 <a:latin typeface="Calibri"/>
               </a:rPr>
-              <a:t>Always available, every part, every commodity.</a:t>
+              <a:t>Available for every part and every process.</a:t>
             </a:r>
           </a:p>
         </p:txBody>
@@ -11557,7 +10761,7 @@
                 </a:solidFill>
                 <a:latin typeface="Calibri"/>
               </a:rPr>
-              <a:t>Empirical band (conformal)</a:t>
+              <a:t>Real-price range (conformal)</a:t>
             </a:r>
           </a:p>
         </p:txBody>
@@ -11599,7 +10803,7 @@
                 </a:solidFill>
                 <a:latin typeface="Calibri"/>
               </a:rPr>
-              <a:t>Proven against the quotes YOU logged — with a coverage guarantee.</a:t>
+              <a:t>Built from the real prices you logged for this group.</a:t>
             </a:r>
           </a:p>
           <a:p>
@@ -11618,7 +10822,7 @@
                 </a:solidFill>
                 <a:latin typeface="Calibri"/>
               </a:rPr>
-              <a:t>Example:  90% of your quotes land within  ± 6.5%  →  £81.54 – £92.88</a:t>
+              <a:t>"90% of our real prices landed within ± X%"</a:t>
             </a:r>
           </a:p>
           <a:p>
@@ -11637,7 +10841,7 @@
                 </a:solidFill>
                 <a:latin typeface="Calibri"/>
               </a:rPr>
-              <a:t>Tightens automatically as more quotes are logged.</a:t>
+              <a:t>Shown from 3 prices. The 90% guarantee holds from 9.</a:t>
             </a:r>
           </a:p>
         </p:txBody>
@@ -11734,7 +10938,7 @@
                 </a:solidFill>
                 <a:latin typeface="Calibri"/>
               </a:rPr>
-              <a:t>a buyer can’t defend "trust me, ±5%". They CAN defend "90% of our real quotes for this family landed within ±6.5%." The band edge is an observed error — evidence, not an assertion. It is the honest uncertainty no competitor states this way.</a:t>
+              <a:t>a buyer cannot defend "trust me, it is within 5%". They can defend "90% of our real prices for this group landed within this range". The edge of the band is an error we actually saw. Today it is empty, because no JLR prices have been logged yet.</a:t>
             </a:r>
           </a:p>
         </p:txBody>
@@ -11935,7 +11139,7 @@
                 </a:solidFill>
                 <a:latin typeface="Calibri"/>
               </a:rPr>
-              <a:t>AI  COST  INTELLIGENCE</a:t>
+              <a:t>SHOULD-COST  INTELLIGENCE</a:t>
             </a:r>
           </a:p>
         </p:txBody>
@@ -12021,7 +11225,7 @@
                 </a:solidFill>
                 <a:latin typeface="Calibri"/>
               </a:rPr>
-              <a:t>NEW IN 2026 · ADVANCED INTELLIGENCE</a:t>
+              <a:t>RANKING FINDINGS BY LIKELY RETURN</a:t>
             </a:r>
           </a:p>
         </p:txBody>
@@ -12063,7 +11267,7 @@
                 </a:solidFill>
                 <a:latin typeface="Cambria"/>
               </a:rPr>
-              <a:t>The agent learns what actually earns money</a:t>
+              <a:t>The background check learns which gaps close</a:t>
             </a:r>
           </a:p>
         </p:txBody>
@@ -12099,22 +11303,22 @@
               </a:spcAft>
             </a:pPr>
             <a:r>
-              <a:rPr sz="1350" b="0" i="0">
+              <a:rPr sz="1250" b="0" i="0">
                 <a:solidFill>
                   <a:srgbClr val="3A4356"/>
                 </a:solidFill>
                 <a:latin typeface="Calibri"/>
               </a:rPr>
-              <a:t>The autonomous agent no longer just finds gaps — it learns which findings </a:t>
-            </a:r>
-            <a:r>
-              <a:rPr sz="1350" b="1" i="0">
+              <a:t>It learns which kinds of finding turn into savings, and ranks by the money likely to come back. </a:t>
+            </a:r>
+            <a:r>
+              <a:rPr sz="1250" b="1" i="0">
                 <a:solidFill>
                   <a:srgbClr val="16325C"/>
                 </a:solidFill>
                 <a:latin typeface="Calibri"/>
               </a:rPr>
-              <a:t>actually convert into savings, and re-ranks by the money it can really recover.</a:t>
+              <a:t>Worked example — made-up numbers to show the arithmetic.</a:t>
             </a:r>
           </a:p>
         </p:txBody>
@@ -12242,7 +11446,7 @@
                 </a:solidFill>
                 <a:latin typeface="Calibri"/>
               </a:rPr>
-              <a:t>Raw gap (impact)</a:t>
+              <a:t>Gap (£ a year)</a:t>
             </a:r>
           </a:p>
         </p:txBody>
@@ -12284,7 +11488,7 @@
                 </a:solidFill>
                 <a:latin typeface="Calibri"/>
               </a:rPr>
-              <a:t>Learned conversion</a:t>
+              <a:t>Share that closed</a:t>
             </a:r>
           </a:p>
         </p:txBody>
@@ -12326,7 +11530,7 @@
                 </a:solidFill>
                 <a:latin typeface="Calibri"/>
               </a:rPr>
-              <a:t>Expected realizable</a:t>
+              <a:t>Likely to come back</a:t>
             </a:r>
           </a:p>
         </p:txBody>
@@ -12412,7 +11616,7 @@
                 </a:solidFill>
                 <a:latin typeface="Calibri"/>
               </a:rPr>
-              <a:t>Cast Housing</a:t>
+              <a:t>Cast housing</a:t>
             </a:r>
           </a:p>
         </p:txBody>
@@ -12454,7 +11658,7 @@
                 </a:solidFill>
                 <a:latin typeface="Calibri"/>
               </a:rPr>
-              <a:t>£200k/yr</a:t>
+              <a:t>£200k</a:t>
             </a:r>
           </a:p>
         </p:txBody>
@@ -12624,7 +11828,7 @@
                 </a:solidFill>
                 <a:latin typeface="Calibri"/>
               </a:rPr>
-              <a:t>Machined Knuckle</a:t>
+              <a:t>Machined knuckle</a:t>
             </a:r>
           </a:p>
         </p:txBody>
@@ -12666,7 +11870,7 @@
                 </a:solidFill>
                 <a:latin typeface="Calibri"/>
               </a:rPr>
-              <a:t>£100k/yr</a:t>
+              <a:t>£100k</a:t>
             </a:r>
           </a:p>
         </p:txBody>
@@ -12847,7 +12051,7 @@
                 </a:solidFill>
                 <a:latin typeface="Calibri"/>
               </a:rPr>
-              <a:t>the machining finding — HALF the raw gap — now ranks ABOVE the casting one, because the agent learned casting renegotiations don’t close. It stops shouting about theoretical money and surfaces the money you can get.</a:t>
+              <a:t>the machining gap is half the size, but it ranks higher, because that kind of finding has usually closed. With no history yet, every kind starts at an even 50%.</a:t>
             </a:r>
           </a:p>
         </p:txBody>
@@ -12898,7 +12102,7 @@
                 </a:solidFill>
                 <a:latin typeface="Calibri"/>
               </a:rPr>
-              <a:t>sourcing time is scarce. The agent spends it where the return is real — and tracks the £ actually saved, so you can prove the tool paid for itself. One click ("Actioned £") teaches it after every negotiation.</a:t>
+              <a:t>buyer time is limited. This points it where money is likely to come back, and keeps a running total of £ actually saved. One click, "Actioned £" or "Dismiss", records what happened.</a:t>
             </a:r>
           </a:p>
         </p:txBody>
@@ -13099,7 +12303,7 @@
                 </a:solidFill>
                 <a:latin typeface="Calibri"/>
               </a:rPr>
-              <a:t>AI  COST  INTELLIGENCE</a:t>
+              <a:t>SHOULD-COST  INTELLIGENCE</a:t>
             </a:r>
           </a:p>
         </p:txBody>
@@ -13185,7 +12389,7 @@
                 </a:solidFill>
                 <a:latin typeface="Calibri"/>
               </a:rPr>
-              <a:t>NEW IN 2026 · ADVANCED INTELLIGENCE</a:t>
+              <a:t>FROM SHOULD-COST TO A COUNTER-OFFER</a:t>
             </a:r>
           </a:p>
         </p:txBody>
@@ -13269,7 +12473,7 @@
                 </a:solidFill>
                 <a:latin typeface="Calibri"/>
               </a:rPr>
-              <a:t>The tool now knows </a:t>
+              <a:t>The tool knows </a:t>
             </a:r>
             <a:r>
               <a:rPr sz="1350" b="1" i="1">
@@ -13287,7 +12491,7 @@
                 </a:solidFill>
                 <a:latin typeface="Calibri"/>
               </a:rPr>
-              <a:t> a part costs what it does — and turns that into the sentence that wins the negotiation.</a:t>
+              <a:t> a part costs what it does, and turns that into a sentence a buyer can say out loud.</a:t>
             </a:r>
           </a:p>
         </p:txBody>
@@ -13419,7 +12623,7 @@
                 </a:solidFill>
                 <a:latin typeface="Calibri"/>
               </a:rPr>
-              <a:t>Live example — real output from the tool</a:t>
+              <a:t>The sentence it writes — the £ and % come from your part</a:t>
             </a:r>
           </a:p>
         </p:txBody>
@@ -13461,7 +12665,7 @@
                 </a:solidFill>
                 <a:latin typeface="Calibri"/>
               </a:rPr>
-              <a:t>“Material is £8.39 of this part, driven by Aluminium. Every 1% move in the Aluminium index shifts the piece price by £0.11. </a:t>
+              <a:t>“Material is £X of this part, driven by aluminium. Every 1% move in the aluminium index shifts the piece price by £Y. </a:t>
             </a:r>
             <a:r>
               <a:rPr sz="1400" b="1" i="0">
@@ -13470,7 +12674,7 @@
                 </a:solidFill>
                 <a:latin typeface="Calibri"/>
               </a:rPr>
-              <a:t>A quote of £95 is only justified if Aluminium were ~14% above today’s index — ask the supplier to show that, or hold at £86.34.”</a:t>
+              <a:t>A quote of £Q is only justified if aluminium were about Z% above today’s index — ask the supplier to show that, or hold at the should-cost.”</a:t>
             </a:r>
           </a:p>
         </p:txBody>
@@ -13577,7 +12781,7 @@
                 </a:solidFill>
                 <a:latin typeface="Calibri"/>
               </a:rPr>
-              <a:t>Links the material to its commodity index, then works out — through the same maths the engine uses — exactly how much a supplier’s price implies the metal has moved.</a:t>
+              <a:t>Links the material to its metal index, then works out, with the same overhead and margin maths the engine uses, how far a supplier’s price implies the metal has moved. No AI involved.</a:t>
             </a:r>
           </a:p>
         </p:txBody>
@@ -13684,7 +12888,7 @@
                 </a:solidFill>
                 <a:latin typeface="Calibri"/>
               </a:rPr>
-              <a:t>The buyer walks in with a defensible, arithmetic counter-argument instead of "that feels high". It converts should-cost into negotiating power — the number and the words to win with it.</a:t>
+              <a:t>The buyer walks in with a counter-argument built on arithmetic, not "that feels high". Note: the index prices on the dashboard are indicative, not a live market feed.</a:t>
             </a:r>
           </a:p>
         </p:txBody>
@@ -13885,7 +13089,7 @@
                 </a:solidFill>
                 <a:latin typeface="Calibri"/>
               </a:rPr>
-              <a:t>AI  COST  INTELLIGENCE</a:t>
+              <a:t>SHOULD-COST  INTELLIGENCE</a:t>
             </a:r>
           </a:p>
         </p:txBody>
@@ -13971,7 +13175,7 @@
                 </a:solidFill>
                 <a:latin typeface="Calibri"/>
               </a:rPr>
-              <a:t>NEW IN 2026 · ADVANCED INTELLIGENCE</a:t>
+              <a:t>THE WHAT-IF CHECK</a:t>
             </a:r>
           </a:p>
         </p:txBody>
@@ -14013,7 +13217,7 @@
                 </a:solidFill>
                 <a:latin typeface="Cambria"/>
               </a:rPr>
-              <a:t>Cost weather on demand — the what-if engine</a:t>
+              <a:t>What if a metal price moves?</a:t>
             </a:r>
           </a:p>
         </p:txBody>
@@ -14055,7 +13259,7 @@
                 </a:solidFill>
                 <a:latin typeface="Calibri"/>
               </a:rPr>
-              <a:t>Ask "what if a commodity moves?" and get the answer instantly — for one part, or the whole portfolio.</a:t>
+              <a:t>Ask "what if a metal price moves?" and get the answer straight away, for one part or for every stored part.</a:t>
             </a:r>
           </a:p>
         </p:txBody>
@@ -14187,7 +13391,7 @@
                 </a:solidFill>
                 <a:latin typeface="Calibri"/>
               </a:rPr>
-              <a:t>One part — the live slider</a:t>
+              <a:t>One part — the slider</a:t>
             </a:r>
           </a:p>
         </p:txBody>
@@ -14229,7 +13433,7 @@
                 </a:solidFill>
                 <a:latin typeface="Calibri"/>
               </a:rPr>
-              <a:t>Drag a commodity −20% … +20% and the piece price recomputes as you move.</a:t>
+              <a:t>Drag a metal index from −20% to +20% and the piece price is worked out again as you move.</a:t>
             </a:r>
           </a:p>
           <a:p>
@@ -14248,7 +13452,7 @@
                 </a:solidFill>
                 <a:latin typeface="Calibri"/>
               </a:rPr>
-              <a:t>Example:  Aluminium +15%  →  £86.34 → £87.92</a:t>
+              <a:t>Example:  "aluminium +15% — what is this part now?"</a:t>
             </a:r>
           </a:p>
           <a:p>
@@ -14267,7 +13471,7 @@
                 </a:solidFill>
                 <a:latin typeface="Calibri"/>
               </a:rPr>
-              <a:t>Instant sensitivity in a single gesture.</a:t>
+              <a:t>Sensitivity in one move of the mouse.</a:t>
             </a:r>
           </a:p>
         </p:txBody>
@@ -14399,7 +13603,7 @@
                 </a:solidFill>
                 <a:latin typeface="Calibri"/>
               </a:rPr>
-              <a:t>Whole portfolio — the scenario</a:t>
+              <a:t>Every stored part — the scenario</a:t>
             </a:r>
           </a:p>
         </p:txBody>
@@ -14441,7 +13645,7 @@
                 </a:solidFill>
                 <a:latin typeface="Calibri"/>
               </a:rPr>
-              <a:t>Apply a move across every part at once and see who changes status.</a:t>
+              <a:t>Apply one move to every stored part at once and see which ones change status.</a:t>
             </a:r>
           </a:p>
           <a:p>
@@ -14460,7 +13664,7 @@
                 </a:solidFill>
                 <a:latin typeface="Calibri"/>
               </a:rPr>
-              <a:t>Example:  "If Steel +10% → 7 parts cross underwater, £X/yr at risk."</a:t>
+              <a:t>Example:  "if steel +10%, which parts go underwater, and how much £ a year is at risk?"</a:t>
             </a:r>
           </a:p>
           <a:p>
@@ -14479,7 +13683,7 @@
                 </a:solidFill>
                 <a:latin typeface="Calibri"/>
               </a:rPr>
-              <a:t>Pre-empt losses before the market moves them.</a:t>
+              <a:t>See the risk before the market moves.</a:t>
             </a:r>
           </a:p>
         </p:txBody>
@@ -14576,7 +13780,7 @@
                 </a:solidFill>
                 <a:latin typeface="Calibri"/>
               </a:rPr>
-              <a:t>this is a conditional — "IF the index moves" — never a price forecast. So it stays defensible even on an indicative commodity feed, and upgrades to a true forecast the day a live market feed is connected.</a:t>
+              <a:t>this is always "IF the index moves", never a price forecast. The dashboard prices are indicative, not a market feed, and they do not change any costing. If a live feed is connected later, the same maths applies.</a:t>
             </a:r>
           </a:p>
         </p:txBody>
@@ -14777,7 +13981,7 @@
                 </a:solidFill>
                 <a:latin typeface="Calibri"/>
               </a:rPr>
-              <a:t>AI  COST  INTELLIGENCE</a:t>
+              <a:t>SHOULD-COST  INTELLIGENCE</a:t>
             </a:r>
           </a:p>
         </p:txBody>
@@ -14863,7 +14067,7 @@
                 </a:solidFill>
                 <a:latin typeface="Calibri"/>
               </a:rPr>
-              <a:t>NEW IN 2026 · ADVANCED INTELLIGENCE</a:t>
+              <a:t>OPTIONAL AI MODE · OFF AT JLR</a:t>
             </a:r>
           </a:p>
         </p:txBody>
@@ -14905,7 +14109,7 @@
                 </a:solidFill>
                 <a:latin typeface="Cambria"/>
               </a:rPr>
-              <a:t>PCB photo → BOM → should-cost — now supplier-grade</a:t>
+              <a:t>PCB photo to BOM — built, but switched off at JLR</a:t>
             </a:r>
           </a:p>
         </p:txBody>
@@ -14947,7 +14151,7 @@
                 </a:solidFill>
                 <a:latin typeface="Calibri"/>
               </a:rPr>
-              <a:t>Photograph a circuit board, get a costed bill of materials in ~60 seconds. This year we hardened it from a clever demo into a </a:t>
+              <a:t>With AI on, a photo of a circuit board becomes a costed bill of materials. Reading the photo needs AI, so </a:t>
             </a:r>
             <a:r>
               <a:rPr sz="1300" b="1" i="0">
@@ -14956,29 +14160,57 @@
                 </a:solidFill>
                 <a:latin typeface="Calibri"/>
               </a:rPr>
-              <a:t>number you can put in front of a supplier.</a:t>
-            </a:r>
-          </a:p>
-        </p:txBody>
-      </p:sp>
-      <p:graphicFrame>
-        <p:nvGraphicFramePr>
-          <p:cNvPr id="10" name="Chart 9"/>
-          <p:cNvGraphicFramePr>
-            <a:graphicFrameLocks noGrp="1"/>
-          </p:cNvGraphicFramePr>
-          <p:nvPr/>
-        </p:nvGraphicFramePr>
-        <p:xfrm>
-          <a:off x="411480" y="2240280"/>
-          <a:ext cx="5623560" cy="3063240"/>
-        </p:xfrm>
-        <a:graphic>
-          <a:graphicData uri="http://schemas.openxmlformats.org/drawingml/2006/chart">
-            <c:chart xmlns:c="http://schemas.openxmlformats.org/drawingml/2006/chart" r:id="rId2"/>
-          </a:graphicData>
-        </a:graphic>
-      </p:graphicFrame>
+              <a:t>at JLR this screen is hidden.</a:t>
+            </a:r>
+          </a:p>
+        </p:txBody>
+      </p:sp>
+      <p:sp>
+        <p:nvSpPr>
+          <p:cNvPr id="10" name="Rounded Rectangle 9"/>
+          <p:cNvSpPr/>
+          <p:nvPr/>
+        </p:nvSpPr>
+        <p:spPr>
+          <a:xfrm>
+            <a:off x="411480" y="2240280"/>
+            <a:ext cx="5623560" cy="3063240"/>
+          </a:xfrm>
+          <a:prstGeom prst="roundRect">
+            <a:avLst>
+              <a:gd name="adj" fmla="val 5000"/>
+            </a:avLst>
+          </a:prstGeom>
+          <a:solidFill>
+            <a:srgbClr val="E8F1FA"/>
+          </a:solidFill>
+          <a:ln>
+            <a:noFill/>
+          </a:ln>
+          <a:effectLst/>
+        </p:spPr>
+        <p:style>
+          <a:lnRef idx="1">
+            <a:schemeClr val="accent1"/>
+          </a:lnRef>
+          <a:fillRef idx="3">
+            <a:schemeClr val="accent1"/>
+          </a:fillRef>
+          <a:effectRef idx="2">
+            <a:schemeClr val="accent1"/>
+          </a:effectRef>
+          <a:fontRef idx="minor">
+            <a:schemeClr val="lt1"/>
+          </a:fontRef>
+        </p:style>
+        <p:txBody>
+          <a:bodyPr rtlCol="0" anchor="ctr"/>
+          <a:lstStyle/>
+          <a:p>
+            <a:pPr algn="ctr"/>
+          </a:p>
+        </p:txBody>
+      </p:sp>
       <p:sp>
         <p:nvSpPr>
           <p:cNvPr id="11" name="TextBox 10"/>
@@ -14987,8 +14219,8 @@
         </p:nvSpPr>
         <p:spPr>
           <a:xfrm>
-            <a:off x="411480" y="5321808"/>
-            <a:ext cx="5623560" cy="384048"/>
+            <a:off x="685800" y="2395728"/>
+            <a:ext cx="5120640" cy="320040"/>
           </a:xfrm>
           <a:prstGeom prst="rect">
             <a:avLst/>
@@ -15003,27 +14235,180 @@
           <a:p>
             <a:pPr algn="l">
               <a:lnSpc>
-                <a:spcPct val="105000"/>
+                <a:spcPct val="100000"/>
               </a:lnSpc>
               <a:spcAft>
                 <a:spcPts val="400"/>
               </a:spcAft>
             </a:pPr>
             <a:r>
-              <a:rPr sz="1000" b="0" i="1">
-                <a:solidFill>
-                  <a:srgbClr val="686F7D"/>
-                </a:solidFill>
-                <a:latin typeface="Calibri"/>
-              </a:rPr>
-              <a:t>Real automotive ECU, China @ 10k/yr — AI landed within ~5% of a half-day manual estimate, in ~60 s.</a:t>
-            </a:r>
-          </a:p>
-        </p:txBody>
-      </p:sp>
-      <p:sp>
-        <p:nvSpPr>
-          <p:cNvPr id="12" name="Rounded Rectangle 11"/>
+              <a:rPr sz="1400" b="1" i="0">
+                <a:solidFill>
+                  <a:srgbClr val="16325C"/>
+                </a:solidFill>
+                <a:latin typeface="Calibri"/>
+              </a:rPr>
+              <a:t>What works at JLR, with AI off</a:t>
+            </a:r>
+          </a:p>
+        </p:txBody>
+      </p:sp>
+      <p:sp>
+        <p:nvSpPr>
+          <p:cNvPr id="12" name="TextBox 11"/>
+          <p:cNvSpPr txBox="1"/>
+          <p:nvPr/>
+        </p:nvSpPr>
+        <p:spPr>
+          <a:xfrm>
+            <a:off x="685800" y="2834640"/>
+            <a:ext cx="5120640" cy="640080"/>
+          </a:xfrm>
+          <a:prstGeom prst="rect">
+            <a:avLst/>
+          </a:prstGeom>
+          <a:noFill/>
+        </p:spPr>
+        <p:txBody>
+          <a:bodyPr wrap="square" anchor="t" lIns="0" rIns="0" tIns="0" bIns="0">
+            <a:spAutoFit/>
+          </a:bodyPr>
+          <a:lstStyle/>
+          <a:p>
+            <a:pPr algn="l">
+              <a:lnSpc>
+                <a:spcPct val="110000"/>
+              </a:lnSpc>
+              <a:spcAft>
+                <a:spcPts val="400"/>
+              </a:spcAft>
+            </a:pPr>
+            <a:r>
+              <a:rPr sz="1200" b="1" i="0">
+                <a:solidFill>
+                  <a:srgbClr val="2A7F50"/>
+                </a:solidFill>
+                <a:latin typeface="Calibri"/>
+              </a:rPr>
+              <a:t>•  </a:t>
+            </a:r>
+            <a:r>
+              <a:rPr sz="1200" b="0" i="0">
+                <a:solidFill>
+                  <a:srgbClr val="3A4356"/>
+                </a:solidFill>
+                <a:latin typeface="Calibri"/>
+              </a:rPr>
+              <a:t>PCB fabrication and PCBA are costed from typed inputs.</a:t>
+            </a:r>
+          </a:p>
+        </p:txBody>
+      </p:sp>
+      <p:sp>
+        <p:nvSpPr>
+          <p:cNvPr id="13" name="TextBox 12"/>
+          <p:cNvSpPr txBox="1"/>
+          <p:nvPr/>
+        </p:nvSpPr>
+        <p:spPr>
+          <a:xfrm>
+            <a:off x="685800" y="3520440"/>
+            <a:ext cx="5120640" cy="640080"/>
+          </a:xfrm>
+          <a:prstGeom prst="rect">
+            <a:avLst/>
+          </a:prstGeom>
+          <a:noFill/>
+        </p:spPr>
+        <p:txBody>
+          <a:bodyPr wrap="square" anchor="t" lIns="0" rIns="0" tIns="0" bIns="0">
+            <a:spAutoFit/>
+          </a:bodyPr>
+          <a:lstStyle/>
+          <a:p>
+            <a:pPr algn="l">
+              <a:lnSpc>
+                <a:spcPct val="110000"/>
+              </a:lnSpc>
+              <a:spcAft>
+                <a:spcPts val="400"/>
+              </a:spcAft>
+            </a:pPr>
+            <a:r>
+              <a:rPr sz="1200" b="1" i="0">
+                <a:solidFill>
+                  <a:srgbClr val="2A7F50"/>
+                </a:solidFill>
+                <a:latin typeface="Calibri"/>
+              </a:rPr>
+              <a:t>•  </a:t>
+            </a:r>
+            <a:r>
+              <a:rPr sz="1200" b="0" i="0">
+                <a:solidFill>
+                  <a:srgbClr val="3A4356"/>
+                </a:solidFill>
+                <a:latin typeface="Calibri"/>
+              </a:rPr>
+              <a:t>The fab price comes from fabricators' price tables. It is a bought-in price, so no overhead or margin goes on top.</a:t>
+            </a:r>
+          </a:p>
+        </p:txBody>
+      </p:sp>
+      <p:sp>
+        <p:nvSpPr>
+          <p:cNvPr id="14" name="TextBox 13"/>
+          <p:cNvSpPr txBox="1"/>
+          <p:nvPr/>
+        </p:nvSpPr>
+        <p:spPr>
+          <a:xfrm>
+            <a:off x="685800" y="4206240"/>
+            <a:ext cx="5120640" cy="640080"/>
+          </a:xfrm>
+          <a:prstGeom prst="rect">
+            <a:avLst/>
+          </a:prstGeom>
+          <a:noFill/>
+        </p:spPr>
+        <p:txBody>
+          <a:bodyPr wrap="square" anchor="t" lIns="0" rIns="0" tIns="0" bIns="0">
+            <a:spAutoFit/>
+          </a:bodyPr>
+          <a:lstStyle/>
+          <a:p>
+            <a:pPr algn="l">
+              <a:lnSpc>
+                <a:spcPct val="110000"/>
+              </a:lnSpc>
+              <a:spcAft>
+                <a:spcPts val="400"/>
+              </a:spcAft>
+            </a:pPr>
+            <a:r>
+              <a:rPr sz="1200" b="1" i="0">
+                <a:solidFill>
+                  <a:srgbClr val="2A7F50"/>
+                </a:solidFill>
+                <a:latin typeface="Calibri"/>
+              </a:rPr>
+              <a:t>•  </a:t>
+            </a:r>
+            <a:r>
+              <a:rPr sz="1200" b="0" i="0">
+                <a:solidFill>
+                  <a:srgbClr val="3A4356"/>
+                </a:solidFill>
+                <a:latin typeface="Calibri"/>
+              </a:rPr>
+              <a:t>The tool says "AI is switched off in this installation" instead of asking for a key.</a:t>
+            </a:r>
+          </a:p>
+        </p:txBody>
+      </p:sp>
+      <p:sp>
+        <p:nvSpPr>
+          <p:cNvPr id="15" name="Rounded Rectangle 14"/>
           <p:cNvSpPr/>
           <p:nvPr/>
         </p:nvSpPr>
@@ -15069,7 +14454,7 @@
       </p:sp>
       <p:sp>
         <p:nvSpPr>
-          <p:cNvPr id="13" name="TextBox 12"/>
+          <p:cNvPr id="16" name="TextBox 15"/>
           <p:cNvSpPr txBox="1"/>
           <p:nvPr/>
         </p:nvSpPr>
@@ -15104,14 +14489,14 @@
                 </a:solidFill>
                 <a:latin typeface="Calibri"/>
               </a:rPr>
-              <a:t>What we fixed this year</a:t>
-            </a:r>
-          </a:p>
-        </p:txBody>
-      </p:sp>
-      <p:sp>
-        <p:nvSpPr>
-          <p:cNvPr id="14" name="Rectangle 13"/>
+              <a:t>Built for when AI is on</a:t>
+            </a:r>
+          </a:p>
+        </p:txBody>
+      </p:sp>
+      <p:sp>
+        <p:nvSpPr>
+          <p:cNvPr id="17" name="Rectangle 16"/>
           <p:cNvSpPr/>
           <p:nvPr/>
         </p:nvSpPr>
@@ -15155,7 +14540,7 @@
       </p:sp>
       <p:sp>
         <p:nvSpPr>
-          <p:cNvPr id="15" name="TextBox 14"/>
+          <p:cNvPr id="18" name="TextBox 17"/>
           <p:cNvSpPr txBox="1"/>
           <p:nvPr/>
         </p:nvSpPr>
@@ -15190,14 +14575,14 @@
                 </a:solidFill>
                 <a:latin typeface="Calibri"/>
               </a:rPr>
-              <a:t>✓  Complex boards no longer come back empty</a:t>
-            </a:r>
-          </a:p>
-        </p:txBody>
-      </p:sp>
-      <p:sp>
-        <p:nvSpPr>
-          <p:cNvPr id="16" name="Rectangle 15"/>
+              <a:t>Complex boards no longer come back empty</a:t>
+            </a:r>
+          </a:p>
+        </p:txBody>
+      </p:sp>
+      <p:sp>
+        <p:nvSpPr>
+          <p:cNvPr id="19" name="Rectangle 18"/>
           <p:cNvSpPr/>
           <p:nvPr/>
         </p:nvSpPr>
@@ -15241,7 +14626,7 @@
       </p:sp>
       <p:sp>
         <p:nvSpPr>
-          <p:cNvPr id="17" name="TextBox 16"/>
+          <p:cNvPr id="20" name="TextBox 19"/>
           <p:cNvSpPr txBox="1"/>
           <p:nvPr/>
         </p:nvSpPr>
@@ -15276,14 +14661,14 @@
                 </a:solidFill>
                 <a:latin typeface="Calibri"/>
               </a:rPr>
-              <a:t>✓  Part prices checked against a real catalogue</a:t>
-            </a:r>
-          </a:p>
-        </p:txBody>
-      </p:sp>
-      <p:sp>
-        <p:nvSpPr>
-          <p:cNvPr id="18" name="Rectangle 17"/>
+              <a:t>Part prices checked against a catalogue</a:t>
+            </a:r>
+          </a:p>
+        </p:txBody>
+      </p:sp>
+      <p:sp>
+        <p:nvSpPr>
+          <p:cNvPr id="21" name="Rectangle 20"/>
           <p:cNvSpPr/>
           <p:nvPr/>
         </p:nvSpPr>
@@ -15327,7 +14712,7 @@
       </p:sp>
       <p:sp>
         <p:nvSpPr>
-          <p:cNvPr id="19" name="TextBox 18"/>
+          <p:cNvPr id="22" name="TextBox 21"/>
           <p:cNvSpPr txBox="1"/>
           <p:nvPr/>
         </p:nvSpPr>
@@ -15362,14 +14747,14 @@
                 </a:solidFill>
                 <a:latin typeface="Calibri"/>
               </a:rPr>
-              <a:t>✓  One misread part can no longer skew the total</a:t>
-            </a:r>
-          </a:p>
-        </p:txBody>
-      </p:sp>
-      <p:sp>
-        <p:nvSpPr>
-          <p:cNvPr id="20" name="Rectangle 19"/>
+              <a:t>One misread part can no longer skew the total</a:t>
+            </a:r>
+          </a:p>
+        </p:txBody>
+      </p:sp>
+      <p:sp>
+        <p:nvSpPr>
+          <p:cNvPr id="23" name="Rectangle 22"/>
           <p:cNvSpPr/>
           <p:nvPr/>
         </p:nvSpPr>
@@ -15413,7 +14798,7 @@
       </p:sp>
       <p:sp>
         <p:nvSpPr>
-          <p:cNvPr id="21" name="TextBox 20"/>
+          <p:cNvPr id="24" name="TextBox 23"/>
           <p:cNvSpPr txBox="1"/>
           <p:nvPr/>
         </p:nvSpPr>
@@ -15448,14 +14833,14 @@
                 </a:solidFill>
                 <a:latin typeface="Calibri"/>
               </a:rPr>
-              <a:t>✓  Same photo, same answer, every run</a:t>
-            </a:r>
-          </a:p>
-        </p:txBody>
-      </p:sp>
-      <p:sp>
-        <p:nvSpPr>
-          <p:cNvPr id="22" name="Rectangle 21"/>
+              <a:t>The board spec is steadied between runs</a:t>
+            </a:r>
+          </a:p>
+        </p:txBody>
+      </p:sp>
+      <p:sp>
+        <p:nvSpPr>
+          <p:cNvPr id="25" name="Rectangle 24"/>
           <p:cNvSpPr/>
           <p:nvPr/>
         </p:nvSpPr>
@@ -15499,7 +14884,7 @@
       </p:sp>
       <p:sp>
         <p:nvSpPr>
-          <p:cNvPr id="23" name="TextBox 22"/>
+          <p:cNvPr id="26" name="TextBox 25"/>
           <p:cNvSpPr txBox="1"/>
           <p:nvPr/>
         </p:nvSpPr>
@@ -15534,14 +14919,14 @@
                 </a:solidFill>
                 <a:latin typeface="Calibri"/>
               </a:rPr>
-              <a:t>✓  It separates the £ you can trust from the £ to verify</a:t>
-            </a:r>
-          </a:p>
-        </p:txBody>
-      </p:sp>
-      <p:sp>
-        <p:nvSpPr>
-          <p:cNvPr id="24" name="Rounded Rectangle 23"/>
+              <a:t>The £ to trust is split from the £ to verify</a:t>
+            </a:r>
+          </a:p>
+        </p:txBody>
+      </p:sp>
+      <p:sp>
+        <p:nvSpPr>
+          <p:cNvPr id="27" name="Rounded Rectangle 26"/>
           <p:cNvSpPr/>
           <p:nvPr/>
         </p:nvSpPr>
@@ -15587,7 +14972,7 @@
       </p:sp>
       <p:sp>
         <p:nvSpPr>
-          <p:cNvPr id="25" name="TextBox 24"/>
+          <p:cNvPr id="28" name="TextBox 27"/>
           <p:cNvSpPr txBox="1"/>
           <p:nvPr/>
         </p:nvSpPr>
@@ -15622,7 +15007,7 @@
                 </a:solidFill>
                 <a:latin typeface="Calibri"/>
               </a:rPr>
-              <a:t>Result:  </a:t>
+              <a:t>If switched on later:  </a:t>
             </a:r>
             <a:r>
               <a:rPr sz="1200" b="0" i="0">
@@ -15631,7 +15016,7 @@
                 </a:solidFill>
                 <a:latin typeface="Calibri"/>
               </a:rPr>
-              <a:t>the over-costing is gone. That live ECU came back at £69.11 a board — £37.65 confirmed, £24.64 flagged to verify. From a photograph, in about a minute.</a:t>
+              <a:t>it is a setting, not a rebuild. Each AI call is rate-limited per user, and lines it cannot match to the catalogue are flagged for an engineer to check.</a:t>
             </a:r>
           </a:p>
         </p:txBody>
@@ -15832,7 +15217,7 @@
                 </a:solidFill>
                 <a:latin typeface="Calibri"/>
               </a:rPr>
-              <a:t>AI  COST  INTELLIGENCE</a:t>
+              <a:t>SHOULD-COST  INTELLIGENCE</a:t>
             </a:r>
           </a:p>
         </p:txBody>
@@ -15960,7 +15345,7 @@
                 </a:solidFill>
                 <a:latin typeface="Cambria"/>
               </a:rPr>
-              <a:t>Why ours is different — glass-box autonomy</a:t>
+              <a:t>Why ours is different — you can check every number</a:t>
             </a:r>
           </a:p>
         </p:txBody>
@@ -16057,7 +15442,7 @@
                 </a:solidFill>
                 <a:latin typeface="Calibri"/>
               </a:rPr>
-              <a:t>every learned or derived number stays auditable — a value a cost engineer can read and defend. No black-box weight ever touches the price. The AI narrates and explains; it never decides the number in secret.</a:t>
+              <a:t>every learned number is one a cost engineer can read and check: a median, a match score, a gap times a volume. No hidden weights touch the price. Even with AI on, AI never sets a price.</a:t>
             </a:r>
           </a:p>
         </p:txBody>
@@ -16189,7 +15574,7 @@
                 </a:solidFill>
                 <a:latin typeface="Calibri"/>
               </a:rPr>
-              <a:t>Continuous learning</a:t>
+              <a:t>Learns from real prices</a:t>
             </a:r>
           </a:p>
         </p:txBody>
@@ -16231,7 +15616,7 @@
                 </a:solidFill>
                 <a:latin typeface="Calibri"/>
               </a:rPr>
-              <a:t>Calibrates on YOUR quotes; conformal band with a guarantee</a:t>
+              <a:t>A median correction per group after 3 prices; the range follows real error</a:t>
             </a:r>
           </a:p>
         </p:txBody>
@@ -16363,7 +15748,7 @@
                 </a:solidFill>
                 <a:latin typeface="Calibri"/>
               </a:rPr>
-              <a:t>Autonomous action</a:t>
+              <a:t>Watches in the background</a:t>
             </a:r>
           </a:p>
         </p:txBody>
@@ -16405,7 +15790,7 @@
                 </a:solidFill>
                 <a:latin typeface="Calibri"/>
               </a:rPr>
-              <a:t>Agent opens findings unattended AND learns which convert</a:t>
+              <a:t>Flags price gaps every 6 hours, and learns which kinds close</a:t>
             </a:r>
           </a:p>
         </p:txBody>
@@ -16537,7 +15922,7 @@
                 </a:solidFill>
                 <a:latin typeface="Calibri"/>
               </a:rPr>
-              <a:t>Causal reasoning</a:t>
+              <a:t>Knows what drives cost</a:t>
             </a:r>
           </a:p>
         </p:txBody>
@@ -16579,7 +15964,7 @@
                 </a:solidFill>
                 <a:latin typeface="Calibri"/>
               </a:rPr>
-              <a:t>Knows why a part costs what it does; coaches the negotiation</a:t>
+              <a:t>Links material cost to its metal index and writes the counter-argument</a:t>
             </a:r>
           </a:p>
         </p:txBody>
@@ -16711,7 +16096,7 @@
                 </a:solidFill>
                 <a:latin typeface="Calibri"/>
               </a:rPr>
-              <a:t>Explainable — always</a:t>
+              <a:t>Checkable, always</a:t>
             </a:r>
           </a:p>
         </p:txBody>
@@ -16753,7 +16138,7 @@
                 </a:solidFill>
                 <a:latin typeface="Calibri"/>
               </a:rPr>
-              <a:t>Every number defensible line-by-line; the competitor’s edge is the opposite</a:t>
+              <a:t>Every number traces to a rate or a logged price; exports carry the total to the penny</a:t>
             </a:r>
           </a:p>
         </p:txBody>
@@ -16885,7 +16270,7 @@
                 </a:solidFill>
                 <a:latin typeface="Calibri"/>
               </a:rPr>
-              <a:t>Runs in your walls</a:t>
+              <a:t>Runs inside our walls</a:t>
             </a:r>
           </a:p>
         </p:txBody>
@@ -16927,7 +16312,7 @@
                 </a:solidFill>
                 <a:latin typeface="Calibri"/>
               </a:rPr>
-              <a:t>On-premise; the knowledge is your IP and never leaves</a:t>
+              <a:t>Runs on a laptop with no internet and no AI; the data stays with us</a:t>
             </a:r>
           </a:p>
         </p:txBody>
@@ -17128,7 +16513,7 @@
                 </a:solidFill>
                 <a:latin typeface="Calibri"/>
               </a:rPr>
-              <a:t>AI  COST  INTELLIGENCE</a:t>
+              <a:t>SHOULD-COST  INTELLIGENCE</a:t>
             </a:r>
           </a:p>
         </p:txBody>
@@ -17388,7 +16773,7 @@
                 </a:solidFill>
                 <a:latin typeface="Calibri"/>
               </a:rPr>
-              <a:t>36×</a:t>
+              <a:t>3</a:t>
             </a:r>
           </a:p>
         </p:txBody>
@@ -17430,7 +16815,7 @@
                 </a:solidFill>
                 <a:latin typeface="Calibri"/>
               </a:rPr>
-              <a:t>Error reduction</a:t>
+              <a:t>Real prices to learn</a:t>
             </a:r>
           </a:p>
         </p:txBody>
@@ -17472,7 +16857,7 @@
                 </a:solidFill>
                 <a:latin typeface="Calibri"/>
               </a:rPr>
-              <a:t>Estimating error fell from 10.9% to 0.3% after just three real quotes.</a:t>
+              <a:t>After 3 logged real prices for a process, it corrects its estimate and its range.</a:t>
             </a:r>
           </a:p>
         </p:txBody>
@@ -17604,7 +16989,7 @@
                 </a:solidFill>
                 <a:latin typeface="Calibri"/>
               </a:rPr>
-              <a:t>£512k/yr</a:t>
+              <a:t>Every 6 h</a:t>
             </a:r>
           </a:p>
         </p:txBody>
@@ -17646,7 +17031,7 @@
                 </a:solidFill>
                 <a:latin typeface="Calibri"/>
               </a:rPr>
-              <a:t>Found autonomously</a:t>
+              <a:t>Background check</a:t>
             </a:r>
           </a:p>
         </p:txBody>
@@ -17688,7 +17073,7 @@
                 </a:solidFill>
                 <a:latin typeface="Calibri"/>
               </a:rPr>
-              <a:t>Pricing issues the agent found on its own, with nobody at the keyboard.</a:t>
+              <a:t>Stored parts are re-checked for price gaps while the tool is running.</a:t>
             </a:r>
           </a:p>
         </p:txBody>
@@ -17820,7 +17205,7 @@
                 </a:solidFill>
                 <a:latin typeface="Calibri"/>
               </a:rPr>
-              <a:t>99%</a:t>
+              <a:t>AI off</a:t>
             </a:r>
           </a:p>
         </p:txBody>
@@ -17862,7 +17247,7 @@
                 </a:solidFill>
                 <a:latin typeface="Calibri"/>
               </a:rPr>
-              <a:t>Part recognition</a:t>
+              <a:t>Nothing here needs AI</a:t>
             </a:r>
           </a:p>
         </p:txBody>
@@ -17904,7 +17289,7 @@
                 </a:solidFill>
                 <a:latin typeface="Calibri"/>
               </a:rPr>
-              <a:t>A new bracket matched to three past ones, with the reasons shown.</a:t>
+              <a:t>The learning is arithmetic: medians, matches and gaps. It works at JLR today.</a:t>
             </a:r>
           </a:p>
         </p:txBody>
@@ -18036,7 +17421,7 @@
                 </a:solidFill>
                 <a:latin typeface="Calibri"/>
               </a:rPr>
-              <a:t>1,777</a:t>
+              <a:t>2,438</a:t>
             </a:r>
           </a:p>
         </p:txBody>
@@ -18120,7 +17505,7 @@
                 </a:solidFill>
                 <a:latin typeface="Calibri"/>
               </a:rPr>
-              <a:t>Every capability tested, and run end to end on the live system.</a:t>
+              <a:t>Plus a hand-calc match to under 0.01% and 6 real parts pinned.</a:t>
             </a:r>
           </a:p>
         </p:txBody>
@@ -18227,7 +17612,7 @@
                 </a:solidFill>
                 <a:latin typeface="Calibri"/>
               </a:rPr>
-              <a:t>Costing used to start from zero every time, and the answer depended on who did it. </a:t>
+              <a:t>Costing used to start from zero each time, and the answer depended on who did it. </a:t>
             </a:r>
             <a:r>
               <a:rPr sz="1350" b="1" i="0">
@@ -18245,7 +17630,7 @@
                 </a:solidFill>
                 <a:latin typeface="Calibri"/>
               </a:rPr>
-              <a:t>Every analysis is kept, every real quote teaches it, and every new part is compared with what we have costed before.</a:t>
+              <a:t>Every costing is kept, every real price teaches it, and every new part is compared with what we have costed before.</a:t>
             </a:r>
           </a:p>
           <a:p>
@@ -18258,13 +17643,22 @@
               </a:spcAft>
             </a:pPr>
             <a:r>
+              <a:rPr sz="1350" b="1" i="0">
+                <a:solidFill>
+                  <a:srgbClr val="16325C"/>
+                </a:solidFill>
+                <a:latin typeface="Calibri"/>
+              </a:rPr>
+              <a:t>Honest limit: </a:t>
+            </a:r>
+            <a:r>
               <a:rPr sz="1350" b="0" i="0">
                 <a:solidFill>
                   <a:srgbClr val="3A4356"/>
                 </a:solidFill>
                 <a:latin typeface="Calibri"/>
               </a:rPr>
-              <a:t>It runs on our servers, so the knowledge becomes a company asset — and it does not leave when an expert does.</a:t>
+              <a:t>it starts empty. No estimate has yet been compared with a price JLR paid. That begins when we log real prices.</a:t>
             </a:r>
           </a:p>
         </p:txBody>
@@ -18465,7 +17859,7 @@
                 </a:solidFill>
                 <a:latin typeface="Calibri"/>
               </a:rPr>
-              <a:t>AI  COST  INTELLIGENCE</a:t>
+              <a:t>SHOULD-COST  INTELLIGENCE</a:t>
             </a:r>
           </a:p>
         </p:txBody>
@@ -18551,7 +17945,7 @@
                 </a:solidFill>
                 <a:latin typeface="Calibri"/>
               </a:rPr>
-              <a:t>NEW CAPABILITY — GEOMETRIC DFM</a:t>
+              <a:t>SHAPE-BASED DFM CHECKS</a:t>
             </a:r>
           </a:p>
         </p:txBody>
@@ -18593,7 +17987,7 @@
                 </a:solidFill>
                 <a:latin typeface="Cambria"/>
               </a:rPr>
-              <a:t>It now reads the part itself</a:t>
+              <a:t>It checks the part's shape, not just the price</a:t>
             </a:r>
           </a:p>
         </p:txBody>
@@ -18690,7 +18084,7 @@
                 </a:solidFill>
                 <a:latin typeface="Calibri"/>
               </a:rPr>
-              <a:t>look at the finished cost and infer what might be wrong.  </a:t>
+              <a:t>look at the finished cost and guess what might be wrong.  </a:t>
             </a:r>
             <a:r>
               <a:rPr sz="1250" b="1" i="0">
@@ -18708,7 +18102,7 @@
                 </a:solidFill>
                 <a:latin typeface="Calibri"/>
               </a:rPr>
-              <a:t>scan the 3D model, measure every face, and name the exact features that cost money.</a:t>
+              <a:t>measure the 3D model, face by face, and name the features that cost money.</a:t>
             </a:r>
           </a:p>
         </p:txBody>
@@ -18880,8 +18274,7 @@
                 </a:solidFill>
                 <a:latin typeface="Calibri"/>
               </a:rPr>
-              <a:t>Every rule names a published source — ASM Handbook, NADCA,
-Machinery's Handbook. No citation, no ship.</a:t>
+              <a:t>Each rule names a published source, such as the ASM Handbook, NADCA or Machinery's Handbook.</a:t>
             </a:r>
           </a:p>
         </p:txBody>
@@ -19011,7 +18404,7 @@
                 </a:solidFill>
                 <a:latin typeface="Calibri"/>
               </a:rPr>
-              <a:t>commodity packs</a:t>
+              <a:t>process packs</a:t>
             </a:r>
           </a:p>
         </p:txBody>
@@ -19053,8 +18446,7 @@
                 </a:solidFill>
                 <a:latin typeface="Calibri"/>
               </a:rPr>
-              <a:t>Casting, forging, machining, injection &amp; blow moulding,
-sheet metal — each with its own physics.</a:t>
+              <a:t>Casting, forging, machining, injection moulding, blow moulding and sheet metal.</a:t>
             </a:r>
           </a:p>
         </p:txBody>
@@ -19226,8 +18618,7 @@
                 </a:solidFill>
                 <a:latin typeface="Calibri"/>
               </a:rPr>
-              <a:t>A finding says "face 186 sits at 135° to the draw", not
-"tooling looks high". You can click it and see it.</a:t>
+              <a:t>A finding names the faces and the measured value, not "tooling looks high". Click it to see them.</a:t>
             </a:r>
           </a:p>
         </p:txBody>
@@ -19315,7 +18706,7 @@
                 </a:solidFill>
                 <a:latin typeface="Calibri"/>
               </a:rPr>
-              <a:t>It runs on its own, and it says what it did NOT check</a:t>
+              <a:t>It runs by itself, and it says what it did NOT check</a:t>
             </a:r>
           </a:p>
         </p:txBody>
@@ -19366,7 +18757,7 @@
                 </a:solidFill>
                 <a:latin typeface="Calibri"/>
               </a:rPr>
-              <a:t>The scan runs in the background after upload — nobody waits for it.</a:t>
+              <a:t>The check runs in the background after a STEP or IGES upload. Nobody waits for it.</a:t>
             </a:r>
           </a:p>
         </p:txBody>
@@ -19417,7 +18808,7 @@
                 </a:solidFill>
                 <a:latin typeface="Calibri"/>
               </a:rPr>
-              <a:t>Each finding carries the measured value, the threshold and the standard it came from.</a:t>
+              <a:t>Each finding carries the measured value, the limit and the source it came from.</a:t>
             </a:r>
           </a:p>
         </p:txBody>
@@ -19713,7 +19104,7 @@
                 </a:solidFill>
                 <a:latin typeface="Calibri"/>
               </a:rPr>
-              <a:t>AI  COST  INTELLIGENCE</a:t>
+              <a:t>SHOULD-COST  INTELLIGENCE</a:t>
             </a:r>
           </a:p>
         </p:txBody>
@@ -19799,7 +19190,7 @@
                 </a:solidFill>
                 <a:latin typeface="Calibri"/>
               </a:rPr>
-              <a:t>NEW COMMODITY — ASKED FOR BY COST ENGINEERING AND THE PLANT</a:t>
+              <a:t>ASKED FOR BY COST ENGINEERING AND THE PLANT</a:t>
             </a:r>
           </a:p>
         </p:txBody>
@@ -19841,7 +19232,7 @@
                 </a:solidFill>
                 <a:latin typeface="Cambria"/>
               </a:rPr>
-              <a:t>Gears: it now picks the process, not just the price</a:t>
+              <a:t>Gears: it picks the process route, not just the price</a:t>
             </a:r>
           </a:p>
         </p:txBody>
@@ -19938,7 +19329,7 @@
                 </a:solidFill>
                 <a:latin typeface="Calibri"/>
               </a:rPr>
-              <a:t>It adds machines.</a:t>
+              <a:t>It adds the machine that the accuracy needs.</a:t>
             </a:r>
           </a:p>
         </p:txBody>
@@ -20397,8 +19788,8 @@
         </p:nvSpPr>
         <p:spPr>
           <a:xfrm>
-            <a:off x="10241280" y="2697480"/>
-            <a:ext cx="1417320" cy="621792"/>
+            <a:off x="9966960" y="2697480"/>
+            <a:ext cx="1691640" cy="621792"/>
           </a:xfrm>
           <a:prstGeom prst="rect">
             <a:avLst/>
@@ -20420,13 +19811,13 @@
               </a:spcAft>
             </a:pPr>
             <a:r>
-              <a:rPr sz="1700" b="1" i="0">
+              <a:rPr sz="1300" b="1" i="0">
                 <a:solidFill>
                   <a:srgbClr val="2A7F50"/>
                 </a:solidFill>
                 <a:latin typeface="Calibri"/>
               </a:rPr>
-              <a:t>£8.26</a:t>
+              <a:t>base route</a:t>
             </a:r>
           </a:p>
         </p:txBody>
@@ -20514,7 +19905,7 @@
                 </a:solidFill>
                 <a:latin typeface="Calibri"/>
               </a:rPr>
-              <a:t>Accurate gear (ISO 6)</a:t>
+              <a:t>Hardened, accurate (ISO 6)</a:t>
             </a:r>
           </a:p>
         </p:txBody>
@@ -20804,10 +20195,12 @@
             </a:avLst>
           </a:prstGeom>
           <a:solidFill>
-            <a:srgbClr val="99651A"/>
+            <a:srgbClr val="F4F7FB"/>
           </a:solidFill>
-          <a:ln>
-            <a:noFill/>
+          <a:ln w="9525">
+            <a:solidFill>
+              <a:srgbClr val="686F7D"/>
+            </a:solidFill>
           </a:ln>
           <a:effectLst/>
         </p:spPr>
@@ -20864,9 +20257,9 @@
               </a:spcAft>
             </a:pPr>
             <a:r>
-              <a:rPr sz="950" b="1" i="0">
-                <a:solidFill>
-                  <a:srgbClr val="FFFFFF"/>
+              <a:rPr sz="950" b="0" i="0">
+                <a:solidFill>
+                  <a:srgbClr val="3A4356"/>
                 </a:solidFill>
                 <a:latin typeface="Calibri"/>
               </a:rPr>
@@ -21149,8 +20542,8 @@
         </p:nvSpPr>
         <p:spPr>
           <a:xfrm>
-            <a:off x="10241280" y="3410712"/>
-            <a:ext cx="1417320" cy="621792"/>
+            <a:off x="9966960" y="3410712"/>
+            <a:ext cx="1691640" cy="621792"/>
           </a:xfrm>
           <a:prstGeom prst="rect">
             <a:avLst/>
@@ -21172,13 +20565,13 @@
               </a:spcAft>
             </a:pPr>
             <a:r>
-              <a:rPr sz="1700" b="1" i="0">
+              <a:rPr sz="1300" b="1" i="0">
                 <a:solidFill>
                   <a:srgbClr val="99651A"/>
                 </a:solidFill>
                 <a:latin typeface="Calibri"/>
               </a:rPr>
-              <a:t>£13.55</a:t>
+              <a:t>+ grind</a:t>
             </a:r>
           </a:p>
         </p:txBody>
@@ -21556,10 +20949,12 @@
             </a:avLst>
           </a:prstGeom>
           <a:solidFill>
-            <a:srgbClr val="1D6FB8"/>
+            <a:srgbClr val="F4F7FB"/>
           </a:solidFill>
-          <a:ln>
-            <a:noFill/>
+          <a:ln w="9525">
+            <a:solidFill>
+              <a:srgbClr val="686F7D"/>
+            </a:solidFill>
           </a:ln>
           <a:effectLst/>
         </p:spPr>
@@ -21616,9 +21011,9 @@
               </a:spcAft>
             </a:pPr>
             <a:r>
-              <a:rPr sz="950" b="1" i="0">
-                <a:solidFill>
-                  <a:srgbClr val="FFFFFF"/>
+              <a:rPr sz="950" b="0" i="0">
+                <a:solidFill>
+                  <a:srgbClr val="3A4356"/>
                 </a:solidFill>
                 <a:latin typeface="Calibri"/>
               </a:rPr>
@@ -21769,8 +21164,8 @@
         </p:nvSpPr>
         <p:spPr>
           <a:xfrm>
-            <a:off x="10241280" y="4123944"/>
-            <a:ext cx="1417320" cy="621792"/>
+            <a:off x="9966960" y="4123944"/>
+            <a:ext cx="1691640" cy="621792"/>
           </a:xfrm>
           <a:prstGeom prst="rect">
             <a:avLst/>
@@ -21792,13 +21187,13 @@
               </a:spcAft>
             </a:pPr>
             <a:r>
-              <a:rPr sz="1700" b="1" i="0">
+              <a:rPr sz="1300" b="1" i="0">
                 <a:solidFill>
                   <a:srgbClr val="1D6FB8"/>
                 </a:solidFill>
                 <a:latin typeface="Calibri"/>
               </a:rPr>
-              <a:t>£11.19</a:t>
+              <a:t>skive, no hob</a:t>
             </a:r>
           </a:p>
         </p:txBody>
@@ -21886,7 +21281,7 @@
                 </a:solidFill>
                 <a:latin typeface="Calibri"/>
               </a:rPr>
-              <a:t>= the station the tighter class ADDED — not the same work costing more</a:t>
+              <a:t>= the step the tighter class ADDED — not the same work costing more</a:t>
             </a:r>
           </a:p>
         </p:txBody>
@@ -22016,7 +21411,7 @@
                 </a:solidFill>
                 <a:latin typeface="Calibri"/>
               </a:rPr>
-              <a:t>A gear no machine in the library can make is blocked outright — never quietly costed on the nearest machine.</a:t>
+              <a:t>A gear no machine in the library can make is blocked. It is never quietly costed on the nearest machine.</a:t>
             </a:r>
           </a:p>
         </p:txBody>
@@ -22104,7 +21499,7 @@
                 </a:solidFill>
                 <a:latin typeface="Calibri"/>
               </a:rPr>
-              <a:t>And it tells you what it does not know</a:t>
+              <a:t>And it says what it does not know</a:t>
             </a:r>
           </a:p>
         </p:txBody>
@@ -22146,7 +21541,7 @@
                 </a:solidFill>
                 <a:latin typeface="Calibri"/>
               </a:rPr>
-              <a:t>All 80 shop figures are representative until the plant supplies its own. Every gear estimate prints that warning.</a:t>
+              <a:t>The gear shop figures are representative until the plant supplies its own. Every gear estimate prints that warning.</a:t>
             </a:r>
           </a:p>
         </p:txBody>
@@ -22391,7 +21786,7 @@
                 </a:solidFill>
                 <a:latin typeface="Calibri"/>
               </a:rPr>
-              <a:t>AI  COST  INTELLIGENCE</a:t>
+              <a:t>SHOULD-COST  INTELLIGENCE</a:t>
             </a:r>
           </a:p>
         </p:txBody>
@@ -22649,7 +22044,7 @@
                 </a:solidFill>
                 <a:latin typeface="Calibri"/>
               </a:rPr>
-              <a:t>✓  </a:t>
+              <a:t>•  </a:t>
             </a:r>
             <a:r>
               <a:rPr sz="1250" b="0" i="0">
@@ -22658,7 +22053,7 @@
                 </a:solidFill>
                 <a:latin typeface="Calibri"/>
               </a:rPr>
-              <a:t>All capabilities built, tested (1,777 tests) and live — incl. 6 new for 2026</a:t>
+              <a:t>Built and tested: 2,438 tests across the tool</a:t>
             </a:r>
           </a:p>
         </p:txBody>
@@ -22700,7 +22095,7 @@
                 </a:solidFill>
                 <a:latin typeface="Calibri"/>
               </a:rPr>
-              <a:t>✓  </a:t>
+              <a:t>•  </a:t>
             </a:r>
             <a:r>
               <a:rPr sz="1250" b="0" i="0">
@@ -22709,7 +22104,7 @@
                 </a:solidFill>
                 <a:latin typeface="Calibri"/>
               </a:rPr>
-              <a:t>Verified end-to-end on the running system</a:t>
+              <a:t>Works with AI off: nothing here needs AI</a:t>
             </a:r>
           </a:p>
         </p:txBody>
@@ -22751,7 +22146,7 @@
                 </a:solidFill>
                 <a:latin typeface="Calibri"/>
               </a:rPr>
-              <a:t>✓  </a:t>
+              <a:t>•  </a:t>
             </a:r>
             <a:r>
               <a:rPr sz="1250" b="0" i="0">
@@ -22760,7 +22155,7 @@
                 </a:solidFill>
                 <a:latin typeface="Calibri"/>
               </a:rPr>
-              <a:t>Zero extra licence cost — built into our tool</a:t>
+              <a:t>No extra licence: part of CostVision</a:t>
             </a:r>
           </a:p>
         </p:txBody>
@@ -22802,7 +22197,7 @@
                 </a:solidFill>
                 <a:latin typeface="Calibri"/>
               </a:rPr>
-              <a:t>✓  </a:t>
+              <a:t>•  </a:t>
             </a:r>
             <a:r>
               <a:rPr sz="1250" b="0" i="0">
@@ -22811,7 +22206,7 @@
                 </a:solidFill>
                 <a:latin typeface="Calibri"/>
               </a:rPr>
-              <a:t>Runs on-premise; no data leaves the company</a:t>
+              <a:t>Runs on our laptop: no data leaves</a:t>
             </a:r>
           </a:p>
         </p:txBody>
@@ -22862,7 +22257,7 @@
                 </a:solidFill>
                 <a:latin typeface="Calibri"/>
               </a:rPr>
-              <a:t>the intelligence starts empty and grows with use. The mechanism is proven; the value builds as we feed it.</a:t>
+              <a:t>it starts empty, and no estimate has yet been compared with a price JLR paid. The value builds as we log real prices.</a:t>
             </a:r>
           </a:p>
         </p:txBody>
@@ -23011,7 +22406,7 @@
                 </a:solidFill>
                 <a:latin typeface="Calibri"/>
               </a:rPr>
-              <a:t>     Make "Log Actual £" part of the quote-handling routine. One click per quote.</a:t>
+              <a:t>     "Log Actual £" on every quote. One click each.</a:t>
             </a:r>
           </a:p>
         </p:txBody>
@@ -23053,7 +22448,7 @@
                 </a:solidFill>
                 <a:latin typeface="Calibri"/>
               </a:rPr>
-              <a:t>2.  Seed the memory</a:t>
+              <a:t>2.  Seed the correction</a:t>
             </a:r>
           </a:p>
           <a:p>
@@ -23072,7 +22467,7 @@
                 </a:solidFill>
                 <a:latin typeface="Calibri"/>
               </a:rPr>
-              <a:t>     Approve a one-off import of historical quotes so the tool starts smart (~1–2 days of effort).</a:t>
+              <a:t>     Import past quotes as a CSV, so it starts with data.</a:t>
             </a:r>
           </a:p>
         </p:txBody>
@@ -23133,7 +22528,7 @@
                 </a:solidFill>
                 <a:latin typeface="Calibri"/>
               </a:rPr>
-              <a:t>     Put the agent's monthly findings on the sourcing team's agenda — it is already finding money.</a:t>
+              <a:t>     Background check findings on the monthly sourcing agenda.</a:t>
             </a:r>
           </a:p>
         </p:txBody>
@@ -23378,7 +22773,7 @@
                 </a:solidFill>
                 <a:latin typeface="Calibri"/>
               </a:rPr>
-              <a:t>AI  COST  INTELLIGENCE</a:t>
+              <a:t>SHOULD-COST  INTELLIGENCE</a:t>
             </a:r>
           </a:p>
         </p:txBody>
@@ -23506,7 +22901,7 @@
                 </a:solidFill>
                 <a:latin typeface="Cambria"/>
               </a:rPr>
-              <a:t>What "Agentic AI" means here — four plain words</a:t>
+              <a:t>What "learning" means here — four plain words</a:t>
             </a:r>
           </a:p>
         </p:txBody>
@@ -23632,13 +23027,13 @@
               </a:spcAft>
             </a:pPr>
             <a:r>
-              <a:rPr sz="2800" b="0" i="0">
+              <a:rPr sz="2800" b="1" i="0">
                 <a:solidFill>
                   <a:srgbClr val="1D6FB8"/>
                 </a:solidFill>
-                <a:latin typeface="Segoe UI Emoji"/>
-              </a:rPr>
-              <a:t>🧠</a:t>
+                <a:latin typeface="Calibri"/>
+              </a:rPr>
+              <a:t>1</a:t>
             </a:r>
           </a:p>
         </p:txBody>
@@ -23722,7 +23117,7 @@
                 </a:solidFill>
                 <a:latin typeface="Calibri"/>
               </a:rPr>
-              <a:t>Every costing is kept — the part, the inputs, the result, the real quote. Shared across the team.</a:t>
+              <a:t>Every costing is saved: the part, its inputs, its result and any real price. Shared by everyone on the same installation.</a:t>
             </a:r>
           </a:p>
         </p:txBody>
@@ -23848,13 +23243,13 @@
               </a:spcAft>
             </a:pPr>
             <a:r>
-              <a:rPr sz="2800" b="0" i="0">
+              <a:rPr sz="2800" b="1" i="0">
                 <a:solidFill>
                   <a:srgbClr val="0D7D71"/>
                 </a:solidFill>
-                <a:latin typeface="Segoe UI Emoji"/>
-              </a:rPr>
-              <a:t>🔎</a:t>
+                <a:latin typeface="Calibri"/>
+              </a:rPr>
+              <a:t>2</a:t>
             </a:r>
           </a:p>
         </p:txBody>
@@ -23938,7 +23333,7 @@
                 </a:solidFill>
                 <a:latin typeface="Calibri"/>
               </a:rPr>
-              <a:t>Start a new part and it finds the closest ones you have already costed.</a:t>
+              <a:t>Cost a new part and it shows up to three similar parts costed before, and says why they match.</a:t>
             </a:r>
           </a:p>
         </p:txBody>
@@ -24064,13 +23459,13 @@
               </a:spcAft>
             </a:pPr>
             <a:r>
-              <a:rPr sz="2800" b="0" i="0">
+              <a:rPr sz="2800" b="1" i="0">
                 <a:solidFill>
                   <a:srgbClr val="6B3FA0"/>
                 </a:solidFill>
-                <a:latin typeface="Segoe UI Emoji"/>
-              </a:rPr>
-              <a:t>🎯</a:t>
+                <a:latin typeface="Calibri"/>
+              </a:rPr>
+              <a:t>3</a:t>
             </a:r>
           </a:p>
         </p:txBody>
@@ -24112,7 +23507,7 @@
                 </a:solidFill>
                 <a:latin typeface="Calibri"/>
               </a:rPr>
-              <a:t>Self-corrects</a:t>
+              <a:t>Corrects itself</a:t>
             </a:r>
           </a:p>
         </p:txBody>
@@ -24154,7 +23549,7 @@
                 </a:solidFill>
                 <a:latin typeface="Calibri"/>
               </a:rPr>
-              <a:t>Log the real price and it measures its own error, then corrects itself. Accuracy is measured, not claimed.</a:t>
+              <a:t>Log the real price. After 3 for a process, it corrects its estimate and shows its own error.</a:t>
             </a:r>
           </a:p>
         </p:txBody>
@@ -24280,13 +23675,13 @@
               </a:spcAft>
             </a:pPr>
             <a:r>
-              <a:rPr sz="2800" b="0" i="0">
+              <a:rPr sz="2800" b="1" i="0">
                 <a:solidFill>
                   <a:srgbClr val="2A7F50"/>
                 </a:solidFill>
-                <a:latin typeface="Segoe UI Emoji"/>
-              </a:rPr>
-              <a:t>🤖</a:t>
+                <a:latin typeface="Calibri"/>
+              </a:rPr>
+              <a:t>4</a:t>
             </a:r>
           </a:p>
         </p:txBody>
@@ -24328,7 +23723,7 @@
                 </a:solidFill>
                 <a:latin typeface="Calibri"/>
               </a:rPr>
-              <a:t>Acts</a:t>
+              <a:t>Keeps watch</a:t>
             </a:r>
           </a:p>
         </p:txBody>
@@ -24370,7 +23765,7 @@
                 </a:solidFill>
                 <a:latin typeface="Calibri"/>
               </a:rPr>
-              <a:t>It re-checks every stored part on a schedule and tells you where you are overpaying.</a:t>
+              <a:t>Every 6 hours it re-checks stored parts and flags where a real price is far from the should-cost.</a:t>
             </a:r>
           </a:p>
         </p:txBody>
@@ -24421,7 +23816,7 @@
                 </a:solidFill>
                 <a:latin typeface="Calibri"/>
               </a:rPr>
-              <a:t>the learning is statistics over our own data — every suggestion shows its source parts and its arithmetic. That makes it auditable and defensible in front of a supplier, which is where costing tools win or lose.</a:t>
+              <a:t>none of this uses AI. It is simple statistics over our own data: medians, match scores and price gaps. Every suggestion shows its source parts and its arithmetic, so it can be defended in front of a supplier.</a:t>
             </a:r>
           </a:p>
         </p:txBody>
@@ -24622,7 +24017,7 @@
                 </a:solidFill>
                 <a:latin typeface="Calibri"/>
               </a:rPr>
-              <a:t>AI  COST  INTELLIGENCE</a:t>
+              <a:t>SHOULD-COST  INTELLIGENCE</a:t>
             </a:r>
           </a:p>
         </p:txBody>
@@ -24805,7 +24200,7 @@
                 </a:solidFill>
                 <a:latin typeface="Calibri"/>
               </a:rPr>
-              <a:t>1 · Analyse</a:t>
+              <a:t>1 · Cost</a:t>
             </a:r>
           </a:p>
           <a:p>
@@ -24884,7 +24279,7 @@
                 </a:solidFill>
                 <a:latin typeface="Calibri"/>
               </a:rPr>
-              <a:t>Saved automatically to the knowledge base</a:t>
+              <a:t>Saved to the knowledge base</a:t>
             </a:r>
           </a:p>
         </p:txBody>
@@ -24951,7 +24346,7 @@
                 </a:solidFill>
                 <a:latin typeface="Calibri"/>
               </a:rPr>
-              <a:t>Similar past parts found instantly</a:t>
+              <a:t>Similar past parts shown</a:t>
             </a:r>
           </a:p>
         </p:txBody>
@@ -25018,7 +24413,7 @@
                 </a:solidFill>
                 <a:latin typeface="Calibri"/>
               </a:rPr>
-              <a:t>Benchmarks, materials, real quotes shown</a:t>
+              <a:t>Median cost, material, real prices</a:t>
             </a:r>
           </a:p>
         </p:txBody>
@@ -25085,7 +24480,7 @@
                 </a:solidFill>
                 <a:latin typeface="Calibri"/>
               </a:rPr>
-              <a:t>Real quote logged → model self-corrects</a:t>
+              <a:t>Real price logged → corrects after 3</a:t>
             </a:r>
           </a:p>
         </p:txBody>
@@ -25140,7 +24535,7 @@
                 </a:solidFill>
                 <a:latin typeface="Calibri"/>
               </a:rPr>
-              <a:t>6 · Act</a:t>
+              <a:t>6 · Watch</a:t>
             </a:r>
           </a:p>
           <a:p>
@@ -25152,7 +24547,7 @@
                 </a:solidFill>
                 <a:latin typeface="Calibri"/>
               </a:rPr>
-              <a:t>Background agent flags drift &amp; savings</a:t>
+              <a:t>Background check flags gaps</a:t>
             </a:r>
           </a:p>
         </p:txBody>
@@ -25238,7 +24633,7 @@
                 </a:solidFill>
                 <a:latin typeface="Calibri"/>
               </a:rPr>
-              <a:t>…and every loop makes the next estimate better</a:t>
+              <a:t>…each real price feeds the next estimate</a:t>
             </a:r>
           </a:p>
         </p:txBody>
@@ -25326,7 +24721,7 @@
                 </a:solidFill>
                 <a:latin typeface="Calibri"/>
               </a:rPr>
-              <a:t>No extra work for the engineer. </a:t>
+              <a:t>Very little extra work. </a:t>
             </a:r>
             <a:r>
               <a:rPr sz="1300" b="0" i="0">
@@ -25335,7 +24730,7 @@
                 </a:solidFill>
                 <a:latin typeface="Calibri"/>
               </a:rPr>
-              <a:t>Steps 2, 3, 4 and 6 happen automatically. The only new habit is one click — "Log Actual £" — when a real supplier quote arrives. That single click is the fuel for everything on this slide.</a:t>
+              <a:t>Steps 2, 3, 4 and 6 happen by themselves when you are signed in. The one new habit is one click, "Log Actual £", when a real supplier price arrives. That click is what the whole loop learns from.</a:t>
             </a:r>
           </a:p>
         </p:txBody>
@@ -25536,7 +24931,7 @@
                 </a:solidFill>
                 <a:latin typeface="Calibri"/>
               </a:rPr>
-              <a:t>AI  COST  INTELLIGENCE</a:t>
+              <a:t>SHOULD-COST  INTELLIGENCE</a:t>
             </a:r>
           </a:p>
         </p:txBody>
@@ -25664,7 +25059,7 @@
                 </a:solidFill>
                 <a:latin typeface="Cambria"/>
               </a:rPr>
-              <a:t>The memory — an organisational knowledge base</a:t>
+              <a:t>The memory — a shared knowledge base</a:t>
             </a:r>
           </a:p>
         </p:txBody>
@@ -25752,7 +25147,7 @@
                 </a:solidFill>
                 <a:latin typeface="Calibri"/>
               </a:rPr>
-              <a:t>What is stored for every analysis</a:t>
+              <a:t>What is stored for every costing</a:t>
             </a:r>
           </a:p>
         </p:txBody>
@@ -25838,7 +25233,7 @@
                 </a:solidFill>
                 <a:latin typeface="Calibri"/>
               </a:rPr>
-              <a:t>Part "fingerprint" — </a:t>
+              <a:t>Part fingerprint — </a:t>
             </a:r>
             <a:r>
               <a:rPr sz="1250" b="0" i="0">
@@ -25933,7 +25328,7 @@
                 </a:solidFill>
                 <a:latin typeface="Calibri"/>
               </a:rPr>
-              <a:t>The full cost result — </a:t>
+              <a:t>The cost result — </a:t>
             </a:r>
             <a:r>
               <a:rPr sz="1250" b="0" i="0">
@@ -25942,7 +25337,7 @@
                 </a:solidFill>
                 <a:latin typeface="Calibri"/>
               </a:rPr>
-              <a:t>total + breakdown by cost driver</a:t>
+              <a:t>the total and the 8 cost buckets</a:t>
             </a:r>
           </a:p>
         </p:txBody>
@@ -26028,7 +25423,7 @@
                 </a:solidFill>
                 <a:latin typeface="Calibri"/>
               </a:rPr>
-              <a:t>Real quotes — </a:t>
+              <a:t>Real prices — </a:t>
             </a:r>
             <a:r>
               <a:rPr sz="1250" b="0" i="0">
@@ -26037,7 +25432,7 @@
                 </a:solidFill>
                 <a:latin typeface="Calibri"/>
               </a:rPr>
-              <a:t>actual supplier / PO prices, when logged</a:t>
+              <a:t>the supplier quote or PO price, once logged</a:t>
             </a:r>
           </a:p>
         </p:txBody>
@@ -26123,7 +25518,7 @@
                 </a:solidFill>
                 <a:latin typeface="Calibri"/>
               </a:rPr>
-              <a:t>Expert corrections — </a:t>
+              <a:t>When it was costed — </a:t>
             </a:r>
             <a:r>
               <a:rPr sz="1250" b="0" i="0">
@@ -26132,7 +25527,7 @@
                 </a:solidFill>
                 <a:latin typeface="Calibri"/>
               </a:rPr>
-              <a:t>where a person adjusted the AI's values</a:t>
+              <a:t>so old, unchecked estimates can be flagged</a:t>
             </a:r>
           </a:p>
         </p:txBody>
@@ -26227,7 +25622,7 @@
                 </a:solidFill>
                 <a:latin typeface="Calibri"/>
               </a:rPr>
-              <a:t>dimensions &amp; features, when a CAD file was used</a:t>
+              <a:t>size, volume and hole count, when a CAD file was used</a:t>
             </a:r>
           </a:p>
         </p:txBody>
@@ -26357,7 +25752,7 @@
                 </a:solidFill>
                 <a:latin typeface="Calibri"/>
               </a:rPr>
-              <a:t>✓  Shared, not personal</a:t>
+              <a:t>•  Shared, not personal</a:t>
             </a:r>
           </a:p>
           <a:p>
@@ -26376,7 +25771,7 @@
                 </a:solidFill>
                 <a:latin typeface="Calibri"/>
               </a:rPr>
-              <a:t>One engineer's analysis instantly helps everyone — juniors inherit senior judgement.</a:t>
+              <a:t>One engineer's costing helps the next person on the same installation.</a:t>
             </a:r>
           </a:p>
         </p:txBody>
@@ -26418,7 +25813,7 @@
                 </a:solidFill>
                 <a:latin typeface="Calibri"/>
               </a:rPr>
-              <a:t>✓  Stays on our servers</a:t>
+              <a:t>•  Stays with us</a:t>
             </a:r>
           </a:p>
           <a:p>
@@ -26437,7 +25832,7 @@
                 </a:solidFill>
                 <a:latin typeface="Calibri"/>
               </a:rPr>
-              <a:t>Our database, our infrastructure. The knowledge is a company asset, not a vendor's.</a:t>
+              <a:t>Kept in the tool's own database on our laptop or server. Nothing is sent out.</a:t>
             </a:r>
           </a:p>
         </p:txBody>
@@ -26479,7 +25874,7 @@
                 </a:solidFill>
                 <a:latin typeface="Calibri"/>
               </a:rPr>
-              <a:t>✓  No duplicates</a:t>
+              <a:t>•  No duplicates</a:t>
             </a:r>
           </a:p>
           <a:p>
@@ -26498,7 +25893,7 @@
                 </a:solidFill>
                 <a:latin typeface="Calibri"/>
               </a:rPr>
-              <a:t>Re-costing a part updates its case — the memory stays clean.</a:t>
+              <a:t>Re-costing a part with the same name and process updates its record.</a:t>
             </a:r>
           </a:p>
         </p:txBody>
@@ -26540,7 +25935,7 @@
                 </a:solidFill>
                 <a:latin typeface="Calibri"/>
               </a:rPr>
-              <a:t>✓  Compounds with use</a:t>
+              <a:t>•  Grows with use</a:t>
             </a:r>
           </a:p>
           <a:p>
@@ -26559,7 +25954,7 @@
                 </a:solidFill>
                 <a:latin typeface="Calibri"/>
               </a:rPr>
-              <a:t>Useful from ~20–30 analyses; every costing from today is an investment.</a:t>
+              <a:t>It starts empty. It gets more useful as parts and real prices go in.</a:t>
             </a:r>
           </a:p>
         </p:txBody>
@@ -26760,7 +26155,7 @@
                 </a:solidFill>
                 <a:latin typeface="Calibri"/>
               </a:rPr>
-              <a:t>AI  COST  INTELLIGENCE</a:t>
+              <a:t>SHOULD-COST  INTELLIGENCE</a:t>
             </a:r>
           </a:p>
         </p:txBody>
@@ -26930,7 +26325,7 @@
                 </a:solidFill>
                 <a:latin typeface="Calibri"/>
               </a:rPr>
-              <a:t>Live example: an engineer costs a new 0.85 kg aluminium bracket. The tool answers instantly:</a:t>
+              <a:t>When an engineer costs a new part, the tool looks through past costings and shows this straight away:</a:t>
             </a:r>
           </a:p>
         </p:txBody>
@@ -27060,18 +26455,9 @@
                 <a:solidFill>
                   <a:srgbClr val="16325C"/>
                 </a:solidFill>
-                <a:latin typeface="Segoe UI Emoji"/>
-              </a:rPr>
-              <a:t>🧠</a:t>
-            </a:r>
-            <a:r>
-              <a:rPr sz="1400" b="1" i="0">
-                <a:solidFill>
-                  <a:srgbClr val="16325C"/>
-                </a:solidFill>
-                <a:latin typeface="Calibri"/>
-              </a:rPr>
-              <a:t>  AI memory — similar past parts</a:t>
+                <a:latin typeface="Calibri"/>
+              </a:rPr>
+              <a:t>Similar past parts</a:t>
             </a:r>
             <a:r>
               <a:rPr sz="1050" b="0" i="0">
@@ -27080,7 +26466,7 @@
                 </a:solidFill>
                 <a:latin typeface="Calibri"/>
               </a:rPr>
-              <a:t>      (knowledge base: 3 analyses · 2 with actuals)</a:t>
+              <a:t>      (up to 3 · same process only · 55% match or better)</a:t>
             </a:r>
           </a:p>
         </p:txBody>
@@ -27122,7 +26508,7 @@
                 </a:solidFill>
                 <a:latin typeface="Calibri"/>
               </a:rPr>
-              <a:t>EV Battery Bracket</a:t>
+              <a:t>How close</a:t>
             </a:r>
             <a:r>
               <a:rPr sz="1050" b="0" i="0">
@@ -27131,7 +26517,7 @@
                 </a:solidFill>
                 <a:latin typeface="Calibri"/>
               </a:rPr>
-              <a:t>   99% match — material family, weight, region</a:t>
+              <a:t>   a match score for each past part</a:t>
             </a:r>
           </a:p>
         </p:txBody>
@@ -27173,16 +26559,16 @@
                 </a:solidFill>
                 <a:latin typeface="Calibri"/>
               </a:rPr>
-              <a:t>£41.20</a:t>
-            </a:r>
-            <a:r>
-              <a:rPr sz="1100" b="1" i="0">
+              <a:t>What matched</a:t>
+            </a:r>
+            <a:r>
+              <a:rPr sz="1050" b="0" i="0">
                 <a:solidFill>
                   <a:srgbClr val="6B3FA0"/>
                 </a:solidFill>
                 <a:latin typeface="Calibri"/>
               </a:rPr>
-              <a:t>   actual £46.50</a:t>
+              <a:t>   material, weight, size, region</a:t>
             </a:r>
           </a:p>
         </p:txBody>
@@ -27224,7 +26610,7 @@
                 </a:solidFill>
                 <a:latin typeface="Calibri"/>
               </a:rPr>
-              <a:t>Sensor Mount Bracket</a:t>
+              <a:t>What it cost</a:t>
             </a:r>
             <a:r>
               <a:rPr sz="1050" b="0" i="0">
@@ -27233,7 +26619,7 @@
                 </a:solidFill>
                 <a:latin typeface="Calibri"/>
               </a:rPr>
-              <a:t>   98% match — material family, weight, region</a:t>
+              <a:t>   our should-cost at the time</a:t>
             </a:r>
           </a:p>
         </p:txBody>
@@ -27275,7 +26661,16 @@
                 </a:solidFill>
                 <a:latin typeface="Calibri"/>
               </a:rPr>
-              <a:t>£38.50</a:t>
+              <a:t>What we paid</a:t>
+            </a:r>
+            <a:r>
+              <a:rPr sz="1050" b="0" i="0">
+                <a:solidFill>
+                  <a:srgbClr val="6B3FA0"/>
+                </a:solidFill>
+                <a:latin typeface="Calibri"/>
+              </a:rPr>
+              <a:t>   the real price, if one was logged</a:t>
             </a:r>
           </a:p>
         </p:txBody>
@@ -27317,7 +26712,7 @@
                 </a:solidFill>
                 <a:latin typeface="Calibri"/>
               </a:rPr>
-              <a:t>Inverter Bracket</a:t>
+              <a:t>Which part</a:t>
             </a:r>
             <a:r>
               <a:rPr sz="1050" b="0" i="0">
@@ -27326,7 +26721,7 @@
                 </a:solidFill>
                 <a:latin typeface="Calibri"/>
               </a:rPr>
-              <a:t>   98% match — material family, weight, region</a:t>
+              <a:t>   named, so you can open it</a:t>
             </a:r>
           </a:p>
         </p:txBody>
@@ -27368,16 +26763,16 @@
                 </a:solidFill>
                 <a:latin typeface="Calibri"/>
               </a:rPr>
-              <a:t>£44.80</a:t>
-            </a:r>
-            <a:r>
-              <a:rPr sz="1100" b="1" i="0">
+              <a:t>No match?</a:t>
+            </a:r>
+            <a:r>
+              <a:rPr sz="1050" b="0" i="0">
                 <a:solidFill>
                   <a:srgbClr val="6B3FA0"/>
                 </a:solidFill>
                 <a:latin typeface="Calibri"/>
               </a:rPr>
-              <a:t>   actual £50.20</a:t>
+              <a:t>   it says so, and learns a new family</a:t>
             </a:r>
           </a:p>
         </p:txBody>
@@ -27419,7 +26814,7 @@
                 </a:solidFill>
                 <a:latin typeface="Calibri"/>
               </a:rPr>
-              <a:t>•  Median cost of 3 similar parts: £41.20</a:t>
+              <a:t>•  Median cost of the similar parts</a:t>
             </a:r>
           </a:p>
         </p:txBody>
@@ -27461,7 +26856,7 @@
                 </a:solidFill>
                 <a:latin typeface="Calibri"/>
               </a:rPr>
-              <a:t>•  3 of 3 used the same material (aluminium 6061)</a:t>
+              <a:t>•  The material most of them used</a:t>
             </a:r>
           </a:p>
         </p:txBody>
@@ -27503,7 +26898,7 @@
                 </a:solidFill>
                 <a:latin typeface="Calibri"/>
               </a:rPr>
-              <a:t>•  Real quotes logged for 2 of them — median actual £48.35</a:t>
+              <a:t>•  A warning if this estimate is 15% or more away from them, naming the cost bucket that differs most</a:t>
             </a:r>
           </a:p>
         </p:txBody>
@@ -27591,7 +26986,7 @@
                 </a:solidFill>
                 <a:latin typeface="Calibri"/>
               </a:rPr>
-              <a:t>Every match is explained (what matched, and how strongly) and every suggestion names its source parts — </a:t>
+              <a:t>Every match says what matched and how strongly, and every suggestion names its source parts. </a:t>
             </a:r>
             <a:r>
               <a:rPr sz="1250" b="1" i="0">
@@ -27600,7 +26995,7 @@
                 </a:solidFill>
                 <a:latin typeface="Calibri"/>
               </a:rPr>
-              <a:t>no black box.</a:t>
+              <a:t>Nothing is hidden.</a:t>
             </a:r>
           </a:p>
         </p:txBody>
@@ -27801,7 +27196,7 @@
                 </a:solidFill>
                 <a:latin typeface="Calibri"/>
               </a:rPr>
-              <a:t>AI  COST  INTELLIGENCE</a:t>
+              <a:t>SHOULD-COST  INTELLIGENCE</a:t>
             </a:r>
           </a:p>
         </p:txBody>
@@ -27929,85 +27324,25 @@
                 </a:solidFill>
                 <a:latin typeface="Cambria"/>
               </a:rPr>
-              <a:t>Self-correction — it learns from real quotes</a:t>
-            </a:r>
-          </a:p>
-        </p:txBody>
-      </p:sp>
-      <p:graphicFrame>
-        <p:nvGraphicFramePr>
-          <p:cNvPr id="9" name="Chart 8"/>
-          <p:cNvGraphicFramePr>
-            <a:graphicFrameLocks noGrp="1"/>
-          </p:cNvGraphicFramePr>
-          <p:nvPr/>
-        </p:nvGraphicFramePr>
-        <p:xfrm>
-          <a:off x="411480" y="1965960"/>
-          <a:ext cx="6035040" cy="3657600"/>
-        </p:xfrm>
-        <a:graphic>
-          <a:graphicData uri="http://schemas.openxmlformats.org/drawingml/2006/chart">
-            <c:chart xmlns:c="http://schemas.openxmlformats.org/drawingml/2006/chart" r:id="rId2"/>
-          </a:graphicData>
-        </a:graphic>
-      </p:graphicFrame>
-      <p:sp>
-        <p:nvSpPr>
-          <p:cNvPr id="10" name="TextBox 9"/>
-          <p:cNvSpPr txBox="1"/>
-          <p:nvPr/>
-        </p:nvSpPr>
-        <p:spPr>
-          <a:xfrm>
-            <a:off x="411480" y="5715000"/>
-            <a:ext cx="6035040" cy="457200"/>
-          </a:xfrm>
-          <a:prstGeom prst="rect">
-            <a:avLst/>
-          </a:prstGeom>
-          <a:noFill/>
-        </p:spPr>
-        <p:txBody>
-          <a:bodyPr wrap="square" anchor="t" lIns="0" rIns="0" tIns="0" bIns="0">
-            <a:spAutoFit/>
-          </a:bodyPr>
-          <a:lstStyle/>
-          <a:p>
-            <a:pPr algn="l">
-              <a:lnSpc>
-                <a:spcPct val="100000"/>
-              </a:lnSpc>
-              <a:spcAft>
-                <a:spcPts val="400"/>
-              </a:spcAft>
-            </a:pPr>
-            <a:r>
-              <a:rPr sz="1050" b="0" i="1">
-                <a:solidFill>
-                  <a:srgbClr val="686F7D"/>
-                </a:solidFill>
-                <a:latin typeface="Calibri"/>
-              </a:rPr>
-              <a:t>Estimating error (%) — measured against real supplier prices, live system run</a:t>
-            </a:r>
-          </a:p>
-        </p:txBody>
-      </p:sp>
-      <p:sp>
-        <p:nvSpPr>
-          <p:cNvPr id="11" name="Rounded Rectangle 10"/>
+              <a:t>Self-correction — it learns from real prices</a:t>
+            </a:r>
+          </a:p>
+        </p:txBody>
+      </p:sp>
+      <p:sp>
+        <p:nvSpPr>
+          <p:cNvPr id="9" name="Rounded Rectangle 8"/>
           <p:cNvSpPr/>
           <p:nvPr/>
         </p:nvSpPr>
         <p:spPr>
           <a:xfrm>
-            <a:off x="6812280" y="1965960"/>
-            <a:ext cx="4983480" cy="4206240"/>
+            <a:off x="411480" y="1965960"/>
+            <a:ext cx="6035040" cy="1097280"/>
           </a:xfrm>
           <a:prstGeom prst="roundRect">
             <a:avLst>
-              <a:gd name="adj" fmla="val 5000"/>
+              <a:gd name="adj" fmla="val 8000"/>
             </a:avLst>
           </a:prstGeom>
           <a:solidFill>
@@ -28042,7 +27377,571 @@
       </p:sp>
       <p:sp>
         <p:nvSpPr>
+          <p:cNvPr id="10" name="Rectangle 9"/>
+          <p:cNvSpPr/>
+          <p:nvPr/>
+        </p:nvSpPr>
+        <p:spPr>
+          <a:xfrm>
+            <a:off x="411480" y="1965960"/>
+            <a:ext cx="82296" cy="1097280"/>
+          </a:xfrm>
+          <a:prstGeom prst="rect">
+            <a:avLst/>
+          </a:prstGeom>
+          <a:solidFill>
+            <a:srgbClr val="686F7D"/>
+          </a:solidFill>
+          <a:ln>
+            <a:noFill/>
+          </a:ln>
+          <a:effectLst/>
+        </p:spPr>
+        <p:style>
+          <a:lnRef idx="1">
+            <a:schemeClr val="accent1"/>
+          </a:lnRef>
+          <a:fillRef idx="3">
+            <a:schemeClr val="accent1"/>
+          </a:fillRef>
+          <a:effectRef idx="2">
+            <a:schemeClr val="accent1"/>
+          </a:effectRef>
+          <a:fontRef idx="minor">
+            <a:schemeClr val="lt1"/>
+          </a:fontRef>
+        </p:style>
+        <p:txBody>
+          <a:bodyPr rtlCol="0" anchor="ctr"/>
+          <a:lstStyle/>
+          <a:p>
+            <a:pPr algn="ctr"/>
+          </a:p>
+        </p:txBody>
+      </p:sp>
+      <p:sp>
+        <p:nvSpPr>
+          <p:cNvPr id="11" name="TextBox 10"/>
+          <p:cNvSpPr txBox="1"/>
+          <p:nvPr/>
+        </p:nvSpPr>
+        <p:spPr>
+          <a:xfrm>
+            <a:off x="685800" y="2093976"/>
+            <a:ext cx="5577840" cy="320040"/>
+          </a:xfrm>
+          <a:prstGeom prst="rect">
+            <a:avLst/>
+          </a:prstGeom>
+          <a:noFill/>
+        </p:spPr>
+        <p:txBody>
+          <a:bodyPr wrap="square" anchor="t" lIns="0" rIns="0" tIns="0" bIns="0">
+            <a:spAutoFit/>
+          </a:bodyPr>
+          <a:lstStyle/>
+          <a:p>
+            <a:pPr algn="l">
+              <a:lnSpc>
+                <a:spcPct val="100000"/>
+              </a:lnSpc>
+              <a:spcAft>
+                <a:spcPts val="400"/>
+              </a:spcAft>
+            </a:pPr>
+            <a:r>
+              <a:rPr sz="1350" b="1" i="0">
+                <a:solidFill>
+                  <a:srgbClr val="686F7D"/>
+                </a:solidFill>
+                <a:latin typeface="Calibri"/>
+              </a:rPr>
+              <a:t>0 to 2 real prices</a:t>
+            </a:r>
+          </a:p>
+        </p:txBody>
+      </p:sp>
+      <p:sp>
+        <p:nvSpPr>
           <p:cNvPr id="12" name="TextBox 11"/>
+          <p:cNvSpPr txBox="1"/>
+          <p:nvPr/>
+        </p:nvSpPr>
+        <p:spPr>
+          <a:xfrm>
+            <a:off x="685800" y="2423160"/>
+            <a:ext cx="5577840" cy="594360"/>
+          </a:xfrm>
+          <a:prstGeom prst="rect">
+            <a:avLst/>
+          </a:prstGeom>
+          <a:noFill/>
+        </p:spPr>
+        <p:txBody>
+          <a:bodyPr wrap="square" anchor="t" lIns="0" rIns="0" tIns="0" bIns="0">
+            <a:spAutoFit/>
+          </a:bodyPr>
+          <a:lstStyle/>
+          <a:p>
+            <a:pPr algn="l">
+              <a:lnSpc>
+                <a:spcPct val="110000"/>
+              </a:lnSpc>
+              <a:spcAft>
+                <a:spcPts val="400"/>
+              </a:spcAft>
+            </a:pPr>
+            <a:r>
+              <a:rPr sz="1150" b="0" i="0">
+                <a:solidFill>
+                  <a:srgbClr val="3A4356"/>
+                </a:solidFill>
+                <a:latin typeface="Calibri"/>
+              </a:rPr>
+              <a:t>No correction yet. The tool tells you how many more it needs.</a:t>
+            </a:r>
+          </a:p>
+        </p:txBody>
+      </p:sp>
+      <p:sp>
+        <p:nvSpPr>
+          <p:cNvPr id="13" name="Rounded Rectangle 12"/>
+          <p:cNvSpPr/>
+          <p:nvPr/>
+        </p:nvSpPr>
+        <p:spPr>
+          <a:xfrm>
+            <a:off x="411480" y="3246120"/>
+            <a:ext cx="6035040" cy="1097280"/>
+          </a:xfrm>
+          <a:prstGeom prst="roundRect">
+            <a:avLst>
+              <a:gd name="adj" fmla="val 8000"/>
+            </a:avLst>
+          </a:prstGeom>
+          <a:solidFill>
+            <a:srgbClr val="FFFFFF"/>
+          </a:solidFill>
+          <a:ln>
+            <a:noFill/>
+          </a:ln>
+          <a:effectLst/>
+        </p:spPr>
+        <p:style>
+          <a:lnRef idx="1">
+            <a:schemeClr val="accent1"/>
+          </a:lnRef>
+          <a:fillRef idx="3">
+            <a:schemeClr val="accent1"/>
+          </a:fillRef>
+          <a:effectRef idx="2">
+            <a:schemeClr val="accent1"/>
+          </a:effectRef>
+          <a:fontRef idx="minor">
+            <a:schemeClr val="lt1"/>
+          </a:fontRef>
+        </p:style>
+        <p:txBody>
+          <a:bodyPr rtlCol="0" anchor="ctr"/>
+          <a:lstStyle/>
+          <a:p>
+            <a:pPr algn="ctr"/>
+          </a:p>
+        </p:txBody>
+      </p:sp>
+      <p:sp>
+        <p:nvSpPr>
+          <p:cNvPr id="14" name="Rectangle 13"/>
+          <p:cNvSpPr/>
+          <p:nvPr/>
+        </p:nvSpPr>
+        <p:spPr>
+          <a:xfrm>
+            <a:off x="411480" y="3246120"/>
+            <a:ext cx="82296" cy="1097280"/>
+          </a:xfrm>
+          <a:prstGeom prst="rect">
+            <a:avLst/>
+          </a:prstGeom>
+          <a:solidFill>
+            <a:srgbClr val="2A7F50"/>
+          </a:solidFill>
+          <a:ln>
+            <a:noFill/>
+          </a:ln>
+          <a:effectLst/>
+        </p:spPr>
+        <p:style>
+          <a:lnRef idx="1">
+            <a:schemeClr val="accent1"/>
+          </a:lnRef>
+          <a:fillRef idx="3">
+            <a:schemeClr val="accent1"/>
+          </a:fillRef>
+          <a:effectRef idx="2">
+            <a:schemeClr val="accent1"/>
+          </a:effectRef>
+          <a:fontRef idx="minor">
+            <a:schemeClr val="lt1"/>
+          </a:fontRef>
+        </p:style>
+        <p:txBody>
+          <a:bodyPr rtlCol="0" anchor="ctr"/>
+          <a:lstStyle/>
+          <a:p>
+            <a:pPr algn="ctr"/>
+          </a:p>
+        </p:txBody>
+      </p:sp>
+      <p:sp>
+        <p:nvSpPr>
+          <p:cNvPr id="15" name="TextBox 14"/>
+          <p:cNvSpPr txBox="1"/>
+          <p:nvPr/>
+        </p:nvSpPr>
+        <p:spPr>
+          <a:xfrm>
+            <a:off x="685800" y="3374136"/>
+            <a:ext cx="5577840" cy="320040"/>
+          </a:xfrm>
+          <a:prstGeom prst="rect">
+            <a:avLst/>
+          </a:prstGeom>
+          <a:noFill/>
+        </p:spPr>
+        <p:txBody>
+          <a:bodyPr wrap="square" anchor="t" lIns="0" rIns="0" tIns="0" bIns="0">
+            <a:spAutoFit/>
+          </a:bodyPr>
+          <a:lstStyle/>
+          <a:p>
+            <a:pPr algn="l">
+              <a:lnSpc>
+                <a:spcPct val="100000"/>
+              </a:lnSpc>
+              <a:spcAft>
+                <a:spcPts val="400"/>
+              </a:spcAft>
+            </a:pPr>
+            <a:r>
+              <a:rPr sz="1350" b="1" i="0">
+                <a:solidFill>
+                  <a:srgbClr val="2A7F50"/>
+                </a:solidFill>
+                <a:latin typeface="Calibri"/>
+              </a:rPr>
+              <a:t>3 or more real prices</a:t>
+            </a:r>
+          </a:p>
+        </p:txBody>
+      </p:sp>
+      <p:sp>
+        <p:nvSpPr>
+          <p:cNvPr id="16" name="TextBox 15"/>
+          <p:cNvSpPr txBox="1"/>
+          <p:nvPr/>
+        </p:nvSpPr>
+        <p:spPr>
+          <a:xfrm>
+            <a:off x="685800" y="3703320"/>
+            <a:ext cx="5577840" cy="594360"/>
+          </a:xfrm>
+          <a:prstGeom prst="rect">
+            <a:avLst/>
+          </a:prstGeom>
+          <a:noFill/>
+        </p:spPr>
+        <p:txBody>
+          <a:bodyPr wrap="square" anchor="t" lIns="0" rIns="0" tIns="0" bIns="0">
+            <a:spAutoFit/>
+          </a:bodyPr>
+          <a:lstStyle/>
+          <a:p>
+            <a:pPr algn="l">
+              <a:lnSpc>
+                <a:spcPct val="110000"/>
+              </a:lnSpc>
+              <a:spcAft>
+                <a:spcPts val="400"/>
+              </a:spcAft>
+            </a:pPr>
+            <a:r>
+              <a:rPr sz="1150" b="0" i="0">
+                <a:solidFill>
+                  <a:srgbClr val="3A4356"/>
+                </a:solidFill>
+                <a:latin typeface="Calibri"/>
+              </a:rPr>
+              <a:t>Correction switched on: the estimate is scaled by the median of real ÷ estimate.</a:t>
+            </a:r>
+          </a:p>
+        </p:txBody>
+      </p:sp>
+      <p:sp>
+        <p:nvSpPr>
+          <p:cNvPr id="17" name="Rounded Rectangle 16"/>
+          <p:cNvSpPr/>
+          <p:nvPr/>
+        </p:nvSpPr>
+        <p:spPr>
+          <a:xfrm>
+            <a:off x="411480" y="4526280"/>
+            <a:ext cx="6035040" cy="1097280"/>
+          </a:xfrm>
+          <a:prstGeom prst="roundRect">
+            <a:avLst>
+              <a:gd name="adj" fmla="val 8000"/>
+            </a:avLst>
+          </a:prstGeom>
+          <a:solidFill>
+            <a:srgbClr val="FFFFFF"/>
+          </a:solidFill>
+          <a:ln>
+            <a:noFill/>
+          </a:ln>
+          <a:effectLst/>
+        </p:spPr>
+        <p:style>
+          <a:lnRef idx="1">
+            <a:schemeClr val="accent1"/>
+          </a:lnRef>
+          <a:fillRef idx="3">
+            <a:schemeClr val="accent1"/>
+          </a:fillRef>
+          <a:effectRef idx="2">
+            <a:schemeClr val="accent1"/>
+          </a:effectRef>
+          <a:fontRef idx="minor">
+            <a:schemeClr val="lt1"/>
+          </a:fontRef>
+        </p:style>
+        <p:txBody>
+          <a:bodyPr rtlCol="0" anchor="ctr"/>
+          <a:lstStyle/>
+          <a:p>
+            <a:pPr algn="ctr"/>
+          </a:p>
+        </p:txBody>
+      </p:sp>
+      <p:sp>
+        <p:nvSpPr>
+          <p:cNvPr id="18" name="Rectangle 17"/>
+          <p:cNvSpPr/>
+          <p:nvPr/>
+        </p:nvSpPr>
+        <p:spPr>
+          <a:xfrm>
+            <a:off x="411480" y="4526280"/>
+            <a:ext cx="82296" cy="1097280"/>
+          </a:xfrm>
+          <a:prstGeom prst="rect">
+            <a:avLst/>
+          </a:prstGeom>
+          <a:solidFill>
+            <a:srgbClr val="1D6FB8"/>
+          </a:solidFill>
+          <a:ln>
+            <a:noFill/>
+          </a:ln>
+          <a:effectLst/>
+        </p:spPr>
+        <p:style>
+          <a:lnRef idx="1">
+            <a:schemeClr val="accent1"/>
+          </a:lnRef>
+          <a:fillRef idx="3">
+            <a:schemeClr val="accent1"/>
+          </a:fillRef>
+          <a:effectRef idx="2">
+            <a:schemeClr val="accent1"/>
+          </a:effectRef>
+          <a:fontRef idx="minor">
+            <a:schemeClr val="lt1"/>
+          </a:fontRef>
+        </p:style>
+        <p:txBody>
+          <a:bodyPr rtlCol="0" anchor="ctr"/>
+          <a:lstStyle/>
+          <a:p>
+            <a:pPr algn="ctr"/>
+          </a:p>
+        </p:txBody>
+      </p:sp>
+      <p:sp>
+        <p:nvSpPr>
+          <p:cNvPr id="19" name="TextBox 18"/>
+          <p:cNvSpPr txBox="1"/>
+          <p:nvPr/>
+        </p:nvSpPr>
+        <p:spPr>
+          <a:xfrm>
+            <a:off x="685800" y="4654296"/>
+            <a:ext cx="5577840" cy="320040"/>
+          </a:xfrm>
+          <a:prstGeom prst="rect">
+            <a:avLst/>
+          </a:prstGeom>
+          <a:noFill/>
+        </p:spPr>
+        <p:txBody>
+          <a:bodyPr wrap="square" anchor="t" lIns="0" rIns="0" tIns="0" bIns="0">
+            <a:spAutoFit/>
+          </a:bodyPr>
+          <a:lstStyle/>
+          <a:p>
+            <a:pPr algn="l">
+              <a:lnSpc>
+                <a:spcPct val="100000"/>
+              </a:lnSpc>
+              <a:spcAft>
+                <a:spcPts val="400"/>
+              </a:spcAft>
+            </a:pPr>
+            <a:r>
+              <a:rPr sz="1350" b="1" i="0">
+                <a:solidFill>
+                  <a:srgbClr val="1D6FB8"/>
+                </a:solidFill>
+                <a:latin typeface="Calibri"/>
+              </a:rPr>
+              <a:t>Every price after that</a:t>
+            </a:r>
+          </a:p>
+        </p:txBody>
+      </p:sp>
+      <p:sp>
+        <p:nvSpPr>
+          <p:cNvPr id="20" name="TextBox 19"/>
+          <p:cNvSpPr txBox="1"/>
+          <p:nvPr/>
+        </p:nvSpPr>
+        <p:spPr>
+          <a:xfrm>
+            <a:off x="685800" y="4983480"/>
+            <a:ext cx="5577840" cy="594360"/>
+          </a:xfrm>
+          <a:prstGeom prst="rect">
+            <a:avLst/>
+          </a:prstGeom>
+          <a:noFill/>
+        </p:spPr>
+        <p:txBody>
+          <a:bodyPr wrap="square" anchor="t" lIns="0" rIns="0" tIns="0" bIns="0">
+            <a:spAutoFit/>
+          </a:bodyPr>
+          <a:lstStyle/>
+          <a:p>
+            <a:pPr algn="l">
+              <a:lnSpc>
+                <a:spcPct val="110000"/>
+              </a:lnSpc>
+              <a:spcAft>
+                <a:spcPts val="400"/>
+              </a:spcAft>
+            </a:pPr>
+            <a:r>
+              <a:rPr sz="1150" b="0" i="0">
+                <a:solidFill>
+                  <a:srgbClr val="3A4356"/>
+                </a:solidFill>
+                <a:latin typeface="Calibri"/>
+              </a:rPr>
+              <a:t>The correction and the error figures are worked out again.</a:t>
+            </a:r>
+          </a:p>
+        </p:txBody>
+      </p:sp>
+      <p:sp>
+        <p:nvSpPr>
+          <p:cNvPr id="21" name="TextBox 20"/>
+          <p:cNvSpPr txBox="1"/>
+          <p:nvPr/>
+        </p:nvSpPr>
+        <p:spPr>
+          <a:xfrm>
+            <a:off x="411480" y="5715000"/>
+            <a:ext cx="6035040" cy="457200"/>
+          </a:xfrm>
+          <a:prstGeom prst="rect">
+            <a:avLst/>
+          </a:prstGeom>
+          <a:noFill/>
+        </p:spPr>
+        <p:txBody>
+          <a:bodyPr wrap="square" anchor="t" lIns="0" rIns="0" tIns="0" bIns="0">
+            <a:spAutoFit/>
+          </a:bodyPr>
+          <a:lstStyle/>
+          <a:p>
+            <a:pPr algn="l">
+              <a:lnSpc>
+                <a:spcPct val="100000"/>
+              </a:lnSpc>
+              <a:spcAft>
+                <a:spcPts val="400"/>
+              </a:spcAft>
+            </a:pPr>
+            <a:r>
+              <a:rPr sz="1050" b="0" i="1">
+                <a:solidFill>
+                  <a:srgbClr val="686F7D"/>
+                </a:solidFill>
+                <a:latin typeface="Calibri"/>
+              </a:rPr>
+              <a:t>How the correction switches on. No JLR prices have been logged yet.</a:t>
+            </a:r>
+          </a:p>
+        </p:txBody>
+      </p:sp>
+      <p:sp>
+        <p:nvSpPr>
+          <p:cNvPr id="22" name="Rounded Rectangle 21"/>
+          <p:cNvSpPr/>
+          <p:nvPr/>
+        </p:nvSpPr>
+        <p:spPr>
+          <a:xfrm>
+            <a:off x="6812280" y="1965960"/>
+            <a:ext cx="4983480" cy="4206240"/>
+          </a:xfrm>
+          <a:prstGeom prst="roundRect">
+            <a:avLst>
+              <a:gd name="adj" fmla="val 5000"/>
+            </a:avLst>
+          </a:prstGeom>
+          <a:solidFill>
+            <a:srgbClr val="FFFFFF"/>
+          </a:solidFill>
+          <a:ln>
+            <a:noFill/>
+          </a:ln>
+          <a:effectLst/>
+        </p:spPr>
+        <p:style>
+          <a:lnRef idx="1">
+            <a:schemeClr val="accent1"/>
+          </a:lnRef>
+          <a:fillRef idx="3">
+            <a:schemeClr val="accent1"/>
+          </a:fillRef>
+          <a:effectRef idx="2">
+            <a:schemeClr val="accent1"/>
+          </a:effectRef>
+          <a:fontRef idx="minor">
+            <a:schemeClr val="lt1"/>
+          </a:fontRef>
+        </p:style>
+        <p:txBody>
+          <a:bodyPr rtlCol="0" anchor="ctr"/>
+          <a:lstStyle/>
+          <a:p>
+            <a:pPr algn="ctr"/>
+          </a:p>
+        </p:txBody>
+      </p:sp>
+      <p:sp>
+        <p:nvSpPr>
+          <p:cNvPr id="23" name="TextBox 22"/>
           <p:cNvSpPr txBox="1"/>
           <p:nvPr/>
         </p:nvSpPr>
@@ -28096,7 +27995,7 @@
                 </a:solidFill>
                 <a:latin typeface="Calibri"/>
               </a:rPr>
-              <a:t>1.  A real supplier quote arrives → one click logs it.</a:t>
+              <a:t>1.  A real price arrives. One click logs it, or paste past prices as a CSV.</a:t>
             </a:r>
           </a:p>
           <a:p>
@@ -28115,7 +28014,7 @@
                 </a:solidFill>
                 <a:latin typeface="Calibri"/>
               </a:rPr>
-              <a:t>2.  The tool compares its estimate with reality and measures its own error.</a:t>
+              <a:t>2.  The tool compares its estimate with the real price.</a:t>
             </a:r>
           </a:p>
           <a:p>
@@ -28134,7 +28033,7 @@
                 </a:solidFill>
                 <a:latin typeface="Calibri"/>
               </a:rPr>
-              <a:t>3.  From 3 quotes in a category, it corrects future estimates automatically — per process, material family and region.</a:t>
+              <a:t>3.  It uses the narrowest group with 3 prices: process + material + region, then process + material, then process.</a:t>
             </a:r>
           </a:p>
           <a:p>
@@ -28153,7 +28052,7 @@
                 </a:solidFill>
                 <a:latin typeface="Calibri"/>
               </a:rPr>
-              <a:t>4.  It reports its accuracy openly (error % before and after).</a:t>
+              <a:t>4.  It shows its error before and after, openly.</a:t>
             </a:r>
           </a:p>
           <a:p>
@@ -28172,7 +28071,7 @@
                 </a:solidFill>
                 <a:latin typeface="Calibri"/>
               </a:rPr>
-              <a:t>Why per-category matters: </a:t>
+              <a:t>Why groups matter: </a:t>
             </a:r>
             <a:r>
               <a:rPr sz="1250" b="0" i="0">
@@ -28181,7 +28080,7 @@
                 </a:solidFill>
                 <a:latin typeface="Calibri"/>
               </a:rPr>
-              <a:t>our machining ran 12% low while our China castings ran 8% high — averaged together they looked "fine". The tool catches what averages hide.</a:t>
+              <a:t>one process can run low while another runs high. Averaged together they look "fine". Correcting each group separately stops that.</a:t>
             </a:r>
           </a:p>
         </p:txBody>
@@ -28382,7 +28281,7 @@
                 </a:solidFill>
                 <a:latin typeface="Calibri"/>
               </a:rPr>
-              <a:t>AI  COST  INTELLIGENCE</a:t>
+              <a:t>SHOULD-COST  INTELLIGENCE</a:t>
             </a:r>
           </a:p>
         </p:txBody>
@@ -28510,85 +28409,25 @@
                 </a:solidFill>
                 <a:latin typeface="Cambria"/>
               </a:rPr>
-              <a:t>Honest ranges — from "±20%" to "±3%", earned with data</a:t>
-            </a:r>
-          </a:p>
-        </p:txBody>
-      </p:sp>
-      <p:graphicFrame>
-        <p:nvGraphicFramePr>
-          <p:cNvPr id="9" name="Chart 8"/>
-          <p:cNvGraphicFramePr>
-            <a:graphicFrameLocks noGrp="1"/>
-          </p:cNvGraphicFramePr>
-          <p:nvPr/>
-        </p:nvGraphicFramePr>
-        <p:xfrm>
-          <a:off x="411480" y="1965960"/>
-          <a:ext cx="5394960" cy="3657600"/>
-        </p:xfrm>
-        <a:graphic>
-          <a:graphicData uri="http://schemas.openxmlformats.org/drawingml/2006/chart">
-            <c:chart xmlns:c="http://schemas.openxmlformats.org/drawingml/2006/chart" r:id="rId2"/>
-          </a:graphicData>
-        </a:graphic>
-      </p:graphicFrame>
-      <p:sp>
-        <p:nvSpPr>
-          <p:cNvPr id="10" name="TextBox 9"/>
-          <p:cNvSpPr txBox="1"/>
-          <p:nvPr/>
-        </p:nvSpPr>
-        <p:spPr>
-          <a:xfrm>
-            <a:off x="411480" y="5715000"/>
-            <a:ext cx="5394960" cy="457200"/>
-          </a:xfrm>
-          <a:prstGeom prst="rect">
-            <a:avLst/>
-          </a:prstGeom>
-          <a:noFill/>
-        </p:spPr>
-        <p:txBody>
-          <a:bodyPr wrap="square" anchor="t" lIns="0" rIns="0" tIns="0" bIns="0">
-            <a:spAutoFit/>
-          </a:bodyPr>
-          <a:lstStyle/>
-          <a:p>
-            <a:pPr algn="l">
-              <a:lnSpc>
-                <a:spcPct val="100000"/>
-              </a:lnSpc>
-              <a:spcAft>
-                <a:spcPts val="400"/>
-              </a:spcAft>
-            </a:pPr>
-            <a:r>
-              <a:rPr sz="1050" b="0" i="1">
-                <a:solidFill>
-                  <a:srgbClr val="686F7D"/>
-                </a:solidFill>
-                <a:latin typeface="Calibri"/>
-              </a:rPr>
-              <a:t>Width of the cost confidence band on the same part (± % around the estimate)</a:t>
-            </a:r>
-          </a:p>
-        </p:txBody>
-      </p:sp>
-      <p:sp>
-        <p:nvSpPr>
-          <p:cNvPr id="11" name="Rounded Rectangle 10"/>
+              <a:t>Honest ranges — the band follows the real error</a:t>
+            </a:r>
+          </a:p>
+        </p:txBody>
+      </p:sp>
+      <p:sp>
+        <p:nvSpPr>
+          <p:cNvPr id="9" name="Rounded Rectangle 8"/>
           <p:cNvSpPr/>
           <p:nvPr/>
         </p:nvSpPr>
         <p:spPr>
           <a:xfrm>
-            <a:off x="6172200" y="1965960"/>
-            <a:ext cx="5623560" cy="4206240"/>
+            <a:off x="411480" y="1965960"/>
+            <a:ext cx="5394960" cy="1097280"/>
           </a:xfrm>
           <a:prstGeom prst="roundRect">
             <a:avLst>
-              <a:gd name="adj" fmla="val 5000"/>
+              <a:gd name="adj" fmla="val 8000"/>
             </a:avLst>
           </a:prstGeom>
           <a:solidFill>
@@ -28623,7 +28462,571 @@
       </p:sp>
       <p:sp>
         <p:nvSpPr>
+          <p:cNvPr id="10" name="Rectangle 9"/>
+          <p:cNvSpPr/>
+          <p:nvPr/>
+        </p:nvSpPr>
+        <p:spPr>
+          <a:xfrm>
+            <a:off x="411480" y="1965960"/>
+            <a:ext cx="82296" cy="1097280"/>
+          </a:xfrm>
+          <a:prstGeom prst="rect">
+            <a:avLst/>
+          </a:prstGeom>
+          <a:solidFill>
+            <a:srgbClr val="99651A"/>
+          </a:solidFill>
+          <a:ln>
+            <a:noFill/>
+          </a:ln>
+          <a:effectLst/>
+        </p:spPr>
+        <p:style>
+          <a:lnRef idx="1">
+            <a:schemeClr val="accent1"/>
+          </a:lnRef>
+          <a:fillRef idx="3">
+            <a:schemeClr val="accent1"/>
+          </a:fillRef>
+          <a:effectRef idx="2">
+            <a:schemeClr val="accent1"/>
+          </a:effectRef>
+          <a:fontRef idx="minor">
+            <a:schemeClr val="lt1"/>
+          </a:fontRef>
+        </p:style>
+        <p:txBody>
+          <a:bodyPr rtlCol="0" anchor="ctr"/>
+          <a:lstStyle/>
+          <a:p>
+            <a:pPr algn="ctr"/>
+          </a:p>
+        </p:txBody>
+      </p:sp>
+      <p:sp>
+        <p:nvSpPr>
+          <p:cNvPr id="11" name="TextBox 10"/>
+          <p:cNvSpPr txBox="1"/>
+          <p:nvPr/>
+        </p:nvSpPr>
+        <p:spPr>
+          <a:xfrm>
+            <a:off x="685800" y="2093976"/>
+            <a:ext cx="4937760" cy="320040"/>
+          </a:xfrm>
+          <a:prstGeom prst="rect">
+            <a:avLst/>
+          </a:prstGeom>
+          <a:noFill/>
+        </p:spPr>
+        <p:txBody>
+          <a:bodyPr wrap="square" anchor="t" lIns="0" rIns="0" tIns="0" bIns="0">
+            <a:spAutoFit/>
+          </a:bodyPr>
+          <a:lstStyle/>
+          <a:p>
+            <a:pPr algn="l">
+              <a:lnSpc>
+                <a:spcPct val="100000"/>
+              </a:lnSpc>
+              <a:spcAft>
+                <a:spcPts val="400"/>
+              </a:spcAft>
+            </a:pPr>
+            <a:r>
+              <a:rPr sz="1350" b="1" i="0">
+                <a:solidFill>
+                  <a:srgbClr val="99651A"/>
+                </a:solidFill>
+                <a:latin typeface="Calibri"/>
+              </a:rPr>
+              <a:t>Before any real prices</a:t>
+            </a:r>
+          </a:p>
+        </p:txBody>
+      </p:sp>
+      <p:sp>
+        <p:nvSpPr>
           <p:cNvPr id="12" name="TextBox 11"/>
+          <p:cNvSpPr txBox="1"/>
+          <p:nvPr/>
+        </p:nvSpPr>
+        <p:spPr>
+          <a:xfrm>
+            <a:off x="685800" y="2423160"/>
+            <a:ext cx="4937760" cy="594360"/>
+          </a:xfrm>
+          <a:prstGeom prst="rect">
+            <a:avLst/>
+          </a:prstGeom>
+          <a:noFill/>
+        </p:spPr>
+        <p:txBody>
+          <a:bodyPr wrap="square" anchor="t" lIns="0" rIns="0" tIns="0" bIns="0">
+            <a:spAutoFit/>
+          </a:bodyPr>
+          <a:lstStyle/>
+          <a:p>
+            <a:pPr algn="l">
+              <a:lnSpc>
+                <a:spcPct val="110000"/>
+              </a:lnSpc>
+              <a:spcAft>
+                <a:spcPts val="400"/>
+              </a:spcAft>
+            </a:pPr>
+            <a:r>
+              <a:rPr sz="1150" b="0" i="0">
+                <a:solidFill>
+                  <a:srgbClr val="3A4356"/>
+                </a:solidFill>
+                <a:latin typeface="Calibri"/>
+              </a:rPr>
+              <a:t>The range comes from how well each input is known (Monte Carlo).</a:t>
+            </a:r>
+          </a:p>
+        </p:txBody>
+      </p:sp>
+      <p:sp>
+        <p:nvSpPr>
+          <p:cNvPr id="13" name="Rounded Rectangle 12"/>
+          <p:cNvSpPr/>
+          <p:nvPr/>
+        </p:nvSpPr>
+        <p:spPr>
+          <a:xfrm>
+            <a:off x="411480" y="3246120"/>
+            <a:ext cx="5394960" cy="1097280"/>
+          </a:xfrm>
+          <a:prstGeom prst="roundRect">
+            <a:avLst>
+              <a:gd name="adj" fmla="val 8000"/>
+            </a:avLst>
+          </a:prstGeom>
+          <a:solidFill>
+            <a:srgbClr val="FFFFFF"/>
+          </a:solidFill>
+          <a:ln>
+            <a:noFill/>
+          </a:ln>
+          <a:effectLst/>
+        </p:spPr>
+        <p:style>
+          <a:lnRef idx="1">
+            <a:schemeClr val="accent1"/>
+          </a:lnRef>
+          <a:fillRef idx="3">
+            <a:schemeClr val="accent1"/>
+          </a:fillRef>
+          <a:effectRef idx="2">
+            <a:schemeClr val="accent1"/>
+          </a:effectRef>
+          <a:fontRef idx="minor">
+            <a:schemeClr val="lt1"/>
+          </a:fontRef>
+        </p:style>
+        <p:txBody>
+          <a:bodyPr rtlCol="0" anchor="ctr"/>
+          <a:lstStyle/>
+          <a:p>
+            <a:pPr algn="ctr"/>
+          </a:p>
+        </p:txBody>
+      </p:sp>
+      <p:sp>
+        <p:nvSpPr>
+          <p:cNvPr id="14" name="Rectangle 13"/>
+          <p:cNvSpPr/>
+          <p:nvPr/>
+        </p:nvSpPr>
+        <p:spPr>
+          <a:xfrm>
+            <a:off x="411480" y="3246120"/>
+            <a:ext cx="82296" cy="1097280"/>
+          </a:xfrm>
+          <a:prstGeom prst="rect">
+            <a:avLst/>
+          </a:prstGeom>
+          <a:solidFill>
+            <a:srgbClr val="2A7F50"/>
+          </a:solidFill>
+          <a:ln>
+            <a:noFill/>
+          </a:ln>
+          <a:effectLst/>
+        </p:spPr>
+        <p:style>
+          <a:lnRef idx="1">
+            <a:schemeClr val="accent1"/>
+          </a:lnRef>
+          <a:fillRef idx="3">
+            <a:schemeClr val="accent1"/>
+          </a:fillRef>
+          <a:effectRef idx="2">
+            <a:schemeClr val="accent1"/>
+          </a:effectRef>
+          <a:fontRef idx="minor">
+            <a:schemeClr val="lt1"/>
+          </a:fontRef>
+        </p:style>
+        <p:txBody>
+          <a:bodyPr rtlCol="0" anchor="ctr"/>
+          <a:lstStyle/>
+          <a:p>
+            <a:pPr algn="ctr"/>
+          </a:p>
+        </p:txBody>
+      </p:sp>
+      <p:sp>
+        <p:nvSpPr>
+          <p:cNvPr id="15" name="TextBox 14"/>
+          <p:cNvSpPr txBox="1"/>
+          <p:nvPr/>
+        </p:nvSpPr>
+        <p:spPr>
+          <a:xfrm>
+            <a:off x="685800" y="3374136"/>
+            <a:ext cx="4937760" cy="320040"/>
+          </a:xfrm>
+          <a:prstGeom prst="rect">
+            <a:avLst/>
+          </a:prstGeom>
+          <a:noFill/>
+        </p:spPr>
+        <p:txBody>
+          <a:bodyPr wrap="square" anchor="t" lIns="0" rIns="0" tIns="0" bIns="0">
+            <a:spAutoFit/>
+          </a:bodyPr>
+          <a:lstStyle/>
+          <a:p>
+            <a:pPr algn="l">
+              <a:lnSpc>
+                <a:spcPct val="100000"/>
+              </a:lnSpc>
+              <a:spcAft>
+                <a:spcPts val="400"/>
+              </a:spcAft>
+            </a:pPr>
+            <a:r>
+              <a:rPr sz="1350" b="1" i="0">
+                <a:solidFill>
+                  <a:srgbClr val="2A7F50"/>
+                </a:solidFill>
+                <a:latin typeface="Calibri"/>
+              </a:rPr>
+              <a:t>After 3 real prices</a:t>
+            </a:r>
+          </a:p>
+        </p:txBody>
+      </p:sp>
+      <p:sp>
+        <p:nvSpPr>
+          <p:cNvPr id="16" name="TextBox 15"/>
+          <p:cNvSpPr txBox="1"/>
+          <p:nvPr/>
+        </p:nvSpPr>
+        <p:spPr>
+          <a:xfrm>
+            <a:off x="685800" y="3703320"/>
+            <a:ext cx="4937760" cy="594360"/>
+          </a:xfrm>
+          <a:prstGeom prst="rect">
+            <a:avLst/>
+          </a:prstGeom>
+          <a:noFill/>
+        </p:spPr>
+        <p:txBody>
+          <a:bodyPr wrap="square" anchor="t" lIns="0" rIns="0" tIns="0" bIns="0">
+            <a:spAutoFit/>
+          </a:bodyPr>
+          <a:lstStyle/>
+          <a:p>
+            <a:pPr algn="l">
+              <a:lnSpc>
+                <a:spcPct val="110000"/>
+              </a:lnSpc>
+              <a:spcAft>
+                <a:spcPts val="400"/>
+              </a:spcAft>
+            </a:pPr>
+            <a:r>
+              <a:rPr sz="1150" b="0" i="0">
+                <a:solidFill>
+                  <a:srgbClr val="3A4356"/>
+                </a:solidFill>
+                <a:latin typeface="Calibri"/>
+              </a:rPr>
+              <a:t>The range comes from the error the tool actually made on those prices.</a:t>
+            </a:r>
+          </a:p>
+        </p:txBody>
+      </p:sp>
+      <p:sp>
+        <p:nvSpPr>
+          <p:cNvPr id="17" name="Rounded Rectangle 16"/>
+          <p:cNvSpPr/>
+          <p:nvPr/>
+        </p:nvSpPr>
+        <p:spPr>
+          <a:xfrm>
+            <a:off x="411480" y="4526280"/>
+            <a:ext cx="5394960" cy="1097280"/>
+          </a:xfrm>
+          <a:prstGeom prst="roundRect">
+            <a:avLst>
+              <a:gd name="adj" fmla="val 8000"/>
+            </a:avLst>
+          </a:prstGeom>
+          <a:solidFill>
+            <a:srgbClr val="FFFFFF"/>
+          </a:solidFill>
+          <a:ln>
+            <a:noFill/>
+          </a:ln>
+          <a:effectLst/>
+        </p:spPr>
+        <p:style>
+          <a:lnRef idx="1">
+            <a:schemeClr val="accent1"/>
+          </a:lnRef>
+          <a:fillRef idx="3">
+            <a:schemeClr val="accent1"/>
+          </a:fillRef>
+          <a:effectRef idx="2">
+            <a:schemeClr val="accent1"/>
+          </a:effectRef>
+          <a:fontRef idx="minor">
+            <a:schemeClr val="lt1"/>
+          </a:fontRef>
+        </p:style>
+        <p:txBody>
+          <a:bodyPr rtlCol="0" anchor="ctr"/>
+          <a:lstStyle/>
+          <a:p>
+            <a:pPr algn="ctr"/>
+          </a:p>
+        </p:txBody>
+      </p:sp>
+      <p:sp>
+        <p:nvSpPr>
+          <p:cNvPr id="18" name="Rectangle 17"/>
+          <p:cNvSpPr/>
+          <p:nvPr/>
+        </p:nvSpPr>
+        <p:spPr>
+          <a:xfrm>
+            <a:off x="411480" y="4526280"/>
+            <a:ext cx="82296" cy="1097280"/>
+          </a:xfrm>
+          <a:prstGeom prst="rect">
+            <a:avLst/>
+          </a:prstGeom>
+          <a:solidFill>
+            <a:srgbClr val="1D6FB8"/>
+          </a:solidFill>
+          <a:ln>
+            <a:noFill/>
+          </a:ln>
+          <a:effectLst/>
+        </p:spPr>
+        <p:style>
+          <a:lnRef idx="1">
+            <a:schemeClr val="accent1"/>
+          </a:lnRef>
+          <a:fillRef idx="3">
+            <a:schemeClr val="accent1"/>
+          </a:fillRef>
+          <a:effectRef idx="2">
+            <a:schemeClr val="accent1"/>
+          </a:effectRef>
+          <a:fontRef idx="minor">
+            <a:schemeClr val="lt1"/>
+          </a:fontRef>
+        </p:style>
+        <p:txBody>
+          <a:bodyPr rtlCol="0" anchor="ctr"/>
+          <a:lstStyle/>
+          <a:p>
+            <a:pPr algn="ctr"/>
+          </a:p>
+        </p:txBody>
+      </p:sp>
+      <p:sp>
+        <p:nvSpPr>
+          <p:cNvPr id="19" name="TextBox 18"/>
+          <p:cNvSpPr txBox="1"/>
+          <p:nvPr/>
+        </p:nvSpPr>
+        <p:spPr>
+          <a:xfrm>
+            <a:off x="685800" y="4654296"/>
+            <a:ext cx="4937760" cy="320040"/>
+          </a:xfrm>
+          <a:prstGeom prst="rect">
+            <a:avLst/>
+          </a:prstGeom>
+          <a:noFill/>
+        </p:spPr>
+        <p:txBody>
+          <a:bodyPr wrap="square" anchor="t" lIns="0" rIns="0" tIns="0" bIns="0">
+            <a:spAutoFit/>
+          </a:bodyPr>
+          <a:lstStyle/>
+          <a:p>
+            <a:pPr algn="l">
+              <a:lnSpc>
+                <a:spcPct val="100000"/>
+              </a:lnSpc>
+              <a:spcAft>
+                <a:spcPts val="400"/>
+              </a:spcAft>
+            </a:pPr>
+            <a:r>
+              <a:rPr sz="1350" b="1" i="0">
+                <a:solidFill>
+                  <a:srgbClr val="1D6FB8"/>
+                </a:solidFill>
+                <a:latin typeface="Calibri"/>
+              </a:rPr>
+              <a:t>A floor on precision</a:t>
+            </a:r>
+          </a:p>
+        </p:txBody>
+      </p:sp>
+      <p:sp>
+        <p:nvSpPr>
+          <p:cNvPr id="20" name="TextBox 19"/>
+          <p:cNvSpPr txBox="1"/>
+          <p:nvPr/>
+        </p:nvSpPr>
+        <p:spPr>
+          <a:xfrm>
+            <a:off x="685800" y="4983480"/>
+            <a:ext cx="4937760" cy="594360"/>
+          </a:xfrm>
+          <a:prstGeom prst="rect">
+            <a:avLst/>
+          </a:prstGeom>
+          <a:noFill/>
+        </p:spPr>
+        <p:txBody>
+          <a:bodyPr wrap="square" anchor="t" lIns="0" rIns="0" tIns="0" bIns="0">
+            <a:spAutoFit/>
+          </a:bodyPr>
+          <a:lstStyle/>
+          <a:p>
+            <a:pPr algn="l">
+              <a:lnSpc>
+                <a:spcPct val="110000"/>
+              </a:lnSpc>
+              <a:spcAft>
+                <a:spcPts val="400"/>
+              </a:spcAft>
+            </a:pPr>
+            <a:r>
+              <a:rPr sz="1150" b="0" i="0">
+                <a:solidFill>
+                  <a:srgbClr val="3A4356"/>
+                </a:solidFill>
+                <a:latin typeface="Calibri"/>
+              </a:rPr>
+              <a:t>Three lucky prices cannot make it claim a razor-thin range.</a:t>
+            </a:r>
+          </a:p>
+        </p:txBody>
+      </p:sp>
+      <p:sp>
+        <p:nvSpPr>
+          <p:cNvPr id="21" name="TextBox 20"/>
+          <p:cNvSpPr txBox="1"/>
+          <p:nvPr/>
+        </p:nvSpPr>
+        <p:spPr>
+          <a:xfrm>
+            <a:off x="411480" y="5715000"/>
+            <a:ext cx="5394960" cy="457200"/>
+          </a:xfrm>
+          <a:prstGeom prst="rect">
+            <a:avLst/>
+          </a:prstGeom>
+          <a:noFill/>
+        </p:spPr>
+        <p:txBody>
+          <a:bodyPr wrap="square" anchor="t" lIns="0" rIns="0" tIns="0" bIns="0">
+            <a:spAutoFit/>
+          </a:bodyPr>
+          <a:lstStyle/>
+          <a:p>
+            <a:pPr algn="l">
+              <a:lnSpc>
+                <a:spcPct val="100000"/>
+              </a:lnSpc>
+              <a:spcAft>
+                <a:spcPts val="400"/>
+              </a:spcAft>
+            </a:pPr>
+            <a:r>
+              <a:rPr sz="1050" b="0" i="1">
+                <a:solidFill>
+                  <a:srgbClr val="686F7D"/>
+                </a:solidFill>
+                <a:latin typeface="Calibri"/>
+              </a:rPr>
+              <a:t>What sets the width of the range on each result</a:t>
+            </a:r>
+          </a:p>
+        </p:txBody>
+      </p:sp>
+      <p:sp>
+        <p:nvSpPr>
+          <p:cNvPr id="22" name="Rounded Rectangle 21"/>
+          <p:cNvSpPr/>
+          <p:nvPr/>
+        </p:nvSpPr>
+        <p:spPr>
+          <a:xfrm>
+            <a:off x="6172200" y="1965960"/>
+            <a:ext cx="5623560" cy="4206240"/>
+          </a:xfrm>
+          <a:prstGeom prst="roundRect">
+            <a:avLst>
+              <a:gd name="adj" fmla="val 5000"/>
+            </a:avLst>
+          </a:prstGeom>
+          <a:solidFill>
+            <a:srgbClr val="FFFFFF"/>
+          </a:solidFill>
+          <a:ln>
+            <a:noFill/>
+          </a:ln>
+          <a:effectLst/>
+        </p:spPr>
+        <p:style>
+          <a:lnRef idx="1">
+            <a:schemeClr val="accent1"/>
+          </a:lnRef>
+          <a:fillRef idx="3">
+            <a:schemeClr val="accent1"/>
+          </a:fillRef>
+          <a:effectRef idx="2">
+            <a:schemeClr val="accent1"/>
+          </a:effectRef>
+          <a:fontRef idx="minor">
+            <a:schemeClr val="lt1"/>
+          </a:fontRef>
+        </p:style>
+        <p:txBody>
+          <a:bodyPr rtlCol="0" anchor="ctr"/>
+          <a:lstStyle/>
+          <a:p>
+            <a:pPr algn="ctr"/>
+          </a:p>
+        </p:txBody>
+      </p:sp>
+      <p:sp>
+        <p:nvSpPr>
+          <p:cNvPr id="23" name="TextBox 22"/>
           <p:cNvSpPr txBox="1"/>
           <p:nvPr/>
         </p:nvSpPr>
@@ -28658,7 +29061,7 @@
                 </a:solidFill>
                 <a:latin typeface="Calibri"/>
               </a:rPr>
-              <a:t>Every estimate now comes as a range</a:t>
+              <a:t>Every estimate comes as a range</a:t>
             </a:r>
           </a:p>
           <a:p>
@@ -28677,7 +29080,7 @@
                 </a:solidFill>
                 <a:latin typeface="Calibri"/>
               </a:rPr>
-              <a:t>Optimistic (P10)  ·  Most likely (P50)  ·  Conservative (P90)</a:t>
+              <a:t>Optimistic P10  ·  Most likely P50  ·  Conservative P90</a:t>
             </a:r>
           </a:p>
           <a:p>
@@ -28696,7 +29099,7 @@
                 </a:solidFill>
                 <a:latin typeface="Calibri"/>
               </a:rPr>
-              <a:t>A single number implies a precision that early estimates don't have. The range tells buyers how much to trust the number — and what target to set in negotiation.</a:t>
+              <a:t>A single number suggests a precision an early estimate does not have. The range tells a buyer how far to trust the number, and where to aim in a negotiation.</a:t>
             </a:r>
           </a:p>
           <a:p>
@@ -28715,7 +29118,7 @@
                 </a:solidFill>
                 <a:latin typeface="Calibri"/>
               </a:rPr>
-              <a:t>The band is earned, not guessed: </a:t>
+              <a:t>Earned, not guessed: </a:t>
             </a:r>
             <a:r>
               <a:rPr sz="1250" b="0" i="0">
@@ -28724,7 +29127,7 @@
                 </a:solidFill>
                 <a:latin typeface="Calibri"/>
               </a:rPr>
-              <a:t>it starts wide when the tool has no evidence, and tightens automatically as real quotes prove the accuracy. On our test part it went from ±20% to ±3% after three quotes.</a:t>
+              <a:t>once real prices exist, the width follows how right the tool has been. If it has been right, the range narrows. If it has been wrong, the range widens and says so.</a:t>
             </a:r>
           </a:p>
         </p:txBody>
@@ -28925,7 +29328,7 @@
                 </a:solidFill>
                 <a:latin typeface="Calibri"/>
               </a:rPr>
-              <a:t>AI  COST  INTELLIGENCE</a:t>
+              <a:t>SHOULD-COST  INTELLIGENCE</a:t>
             </a:r>
           </a:p>
         </p:txBody>
@@ -29053,7 +29456,7 @@
                 </a:solidFill>
                 <a:latin typeface="Cambria"/>
               </a:rPr>
-              <a:t>The autonomous agent — finds money unattended</a:t>
+              <a:t>The background check — it flags price gaps</a:t>
             </a:r>
           </a:p>
         </p:txBody>
@@ -29095,7 +29498,7 @@
                 </a:solidFill>
                 <a:latin typeface="Calibri"/>
               </a:rPr>
-              <a:t>A background monitor re-checks every stored part on a schedule. In the live demonstration it opened these findings </a:t>
+              <a:t>While the tool is running, it re-checks every stored part every 6 hours and opens findings </a:t>
             </a:r>
             <a:r>
               <a:rPr sz="1300" b="1" i="0">
@@ -29104,7 +29507,7 @@
                 </a:solidFill>
                 <a:latin typeface="Calibri"/>
               </a:rPr>
-              <a:t>entirely unattended:</a:t>
+              <a:t>without being asked:</a:t>
             </a:r>
           </a:p>
         </p:txBody>
@@ -29234,18 +29637,9 @@
                 <a:solidFill>
                   <a:srgbClr val="B03A2E"/>
                 </a:solidFill>
-                <a:latin typeface="Segoe UI Emoji"/>
-              </a:rPr>
-              <a:t>💰</a:t>
-            </a:r>
-            <a:r>
-              <a:rPr sz="1300" b="1" i="0">
-                <a:solidFill>
-                  <a:srgbClr val="B03A2E"/>
-                </a:solidFill>
-                <a:latin typeface="Calibri"/>
-              </a:rPr>
-              <a:t>  RENEGOTIATION</a:t>
+                <a:latin typeface="Calibri"/>
+              </a:rPr>
+              <a:t>RENEGOTIATE</a:t>
             </a:r>
           </a:p>
         </p:txBody>
@@ -29287,7 +29681,7 @@
                 </a:solidFill>
                 <a:latin typeface="Calibri"/>
               </a:rPr>
-              <a:t>Supplier price £48.00 is 20% above should-cost £40.00 at 50,000 pcs — clear recovery opportunity.</a:t>
+              <a:t>The real price is 8% or more above the should-cost. It works out the gap in £ a year.</a:t>
             </a:r>
           </a:p>
         </p:txBody>
@@ -29329,7 +29723,7 @@
                 </a:solidFill>
                 <a:latin typeface="Calibri"/>
               </a:rPr>
-              <a:t>≈ £400,000 / yr</a:t>
+              <a:t>8% or more above</a:t>
             </a:r>
           </a:p>
         </p:txBody>
@@ -29459,18 +29853,9 @@
                 <a:solidFill>
                   <a:srgbClr val="99651A"/>
                 </a:solidFill>
-                <a:latin typeface="Segoe UI Emoji"/>
-              </a:rPr>
-              <a:t>🚨</a:t>
-            </a:r>
-            <a:r>
-              <a:rPr sz="1300" b="1" i="0">
-                <a:solidFill>
-                  <a:srgbClr val="99651A"/>
-                </a:solidFill>
-                <a:latin typeface="Calibri"/>
-              </a:rPr>
-              <a:t>  UNDERWATER PRICE</a:t>
+                <a:latin typeface="Calibri"/>
+              </a:rPr>
+              <a:t>UNDERWATER PRICE</a:t>
             </a:r>
           </a:p>
         </p:txBody>
@@ -29512,7 +29897,7 @@
                 </a:solidFill>
                 <a:latin typeface="Calibri"/>
               </a:rPr>
-              <a:t>Supplier price 25% BELOW should-cost — verify scope and quality; pricing may be unsustainable.</a:t>
+              <a:t>The real price is 8% or more below the should-cost. Check scope and quality: the price may not last.</a:t>
             </a:r>
           </a:p>
         </p:txBody>
@@ -29554,7 +29939,7 @@
                 </a:solidFill>
                 <a:latin typeface="Calibri"/>
               </a:rPr>
-              <a:t>≈ £112,000 / yr exposure</a:t>
+              <a:t>8% or more below</a:t>
             </a:r>
           </a:p>
         </p:txBody>
@@ -29686,7 +30071,7 @@
                 </a:solidFill>
                 <a:latin typeface="Calibri"/>
               </a:rPr>
-              <a:t>⏳  STALE ESTIMATE</a:t>
+              <a:t>STALE ESTIMATE</a:t>
             </a:r>
           </a:p>
         </p:txBody>
@@ -29728,7 +30113,7 @@
                 </a:solidFill>
                 <a:latin typeface="Calibri"/>
               </a:rPr>
-              <a:t>A 120-day-old estimate was never validated with a real quote — the agent asks for a refresh.</a:t>
+              <a:t>An estimate over 90 days old that was never checked against a real price. It asks for one.</a:t>
             </a:r>
           </a:p>
         </p:txBody>
@@ -29770,7 +30155,7 @@
                 </a:solidFill>
                 <a:latin typeface="Calibri"/>
               </a:rPr>
-              <a:t>Confidence decay</a:t>
+              <a:t>90 days, no price</a:t>
             </a:r>
           </a:p>
         </p:txBody>
@@ -29858,25 +30243,25 @@
                 </a:solidFill>
                 <a:latin typeface="Calibri"/>
               </a:rPr>
-              <a:t>Total surfaced in the demo:  </a:t>
-            </a:r>
-            <a:r>
-              <a:rPr sz="1500" b="1" i="0">
+              <a:t>Worked example:  </a:t>
+            </a:r>
+            <a:r>
+              <a:rPr sz="1350" b="1" i="0">
                 <a:solidFill>
                   <a:srgbClr val="B03A2E"/>
                 </a:solidFill>
                 <a:latin typeface="Calibri"/>
               </a:rPr>
-              <a:t>≈ £512,000 / yr</a:t>
-            </a:r>
-            <a:r>
-              <a:rPr sz="1200" b="0" i="0">
+              <a:t>£48 paid − £40 should-cost = £8 × 50,000 a year = £400,000 / yr</a:t>
+            </a:r>
+            <a:r>
+              <a:rPr sz="1100" b="0" i="0">
                 <a:solidFill>
                   <a:srgbClr val="686F7D"/>
                 </a:solidFill>
                 <a:latin typeface="Calibri"/>
               </a:rPr>
-              <a:t>   — every finding shows its arithmetic, and one click dismisses it once handled.</a:t>
+              <a:t>   (example numbers)</a:t>
             </a:r>
           </a:p>
         </p:txBody>

--- a/CostVision-Agentic-AI-Management-Presentation.pptx
+++ b/CostVision-Agentic-AI-Management-Presentation.pptx
@@ -8172,7 +8172,7 @@
                 </a:solidFill>
                 <a:latin typeface="Calibri"/>
               </a:rPr>
-              <a:t>Engine arithmetic vs a hand calculation (reference bracket, £23.27)</a:t>
+              <a:t>Engine arithmetic vs a hand calculation (reference bracket, £24.34)</a:t>
             </a:r>
           </a:p>
         </p:txBody>

--- a/CostVision-Agentic-AI-Management-Presentation.pptx
+++ b/CostVision-Agentic-AI-Management-Presentation.pptx
@@ -526,7 +526,7 @@
           <a:lstStyle/>
           <a:p>
             <a:r>
-              <a:t>Thanks for the time. This deck is about the learning side of CostVision: how it remembers the parts we cost, how it learns from the real prices we pay, and how it keeps an eye out for price gaps. I want to be clear about one thing up front. In the JLR build, AI is switched off, because we don't have AI approval yet. That's fine for this story, because everything I'm going to show you on the learning side is plain arithmetic. Medians, match scores, gaps between two prices. None of it needs AI, so it works on a locked-down laptop today. Where a feature does need AI, I'll say so and I'll say it's switched off. And I'll be honest about what's proven and what isn't.</a:t>
+              <a:t>Thanks for the time. This deck is about the learning side of CostVision: how it remembers the parts we cost, how it learns from the real prices we pay, and how it keeps an eye out for price gaps. I want to be clear about one thing up front. In the JLR build, AI waits for an API key; none has been added yet. That's fine for this story, because everything I'm going to show you on the learning side is plain arithmetic. Medians, match scores, gaps between two prices. None of it needs AI, so it works on a locked-down laptop today. Where a feature does need AI, I'll say so and I'll say it needs a key. And I'll be honest about what's proven and what isn't.</a:t>
             </a:r>
           </a:p>
         </p:txBody>
@@ -596,7 +596,7 @@
           <a:lstStyle/>
           <a:p>
             <a:r>
-              <a:t>This slide is the one I'd most like you to remember, because it draws the line clearly. The top two boxes work at JLR today, with AI off. CAD to Cost measures the part from a STEP, IGES or STL file, applies rules, and where the shape can't decide something, like the process route, it asks the engineer rather than guessing. The self-audit, the shape checks, the negotiation pack and the carbon figure all work too. The bottom two boxes are built but switched off at JLR: the chat assistant, describe-a-part, the PCB photo reader, and reading free-text RFQs. If they're ever switched on, it's a setting, not a rebuild, and each user is rate-limited. And even then, AI never sets a price. It only reads and classifies. The money is always arithmetic.</a:t>
+              <a:t>This slide is the one I'd most like you to remember, because it draws the line clearly. The top two boxes work at JLR today, without a key. CAD to Cost measures the part from a STEP, IGES or STL file, applies rules, and where the shape can't decide something, like the process route, it asks the engineer rather than guessing. The self-audit, the shape checks, the negotiation pack and the carbon figure all work too. The bottom two boxes are built but hidden until a key is added: the chat assistant, describe-a-part, the PCB photo reader, and reading free-text RFQs. If they're ever switched on, it's a setting, not a rebuild, and each user is rate-limited. And even then, AI never sets a price. It only reads and classifies. The money is always arithmetic.</a:t>
             </a:r>
           </a:p>
         </p:txBody>
@@ -1156,7 +1156,7 @@
           <a:lstStyle/>
           <a:p>
             <a:r>
-              <a:t>I want to be upfront about this one, because it was a highlight in earlier versions of this deck. The PCB photo reader takes a photo of a circuit board and builds a costed bill of materials. Reading the photo needs AI, so at JLR it's switched off and the screen is hidden. What does work with AI off is on the left. You can still cost PCB fabrication and assembly from typed inputs. The fab price comes from fabricators' price tables, and because it's a bought-in price, we don't add overhead or margin on top. On the right is the work done so the photo reader is solid if it's ever switched on: catalogue price checks, caps on misread parts, and a clear split between pounds you can trust and pounds to check. I've taken out the old accuracy chart.</a:t>
+              <a:t>The PCB photo reader. With an API key, photos of a board become a priced parts list and a board cost. The model does the reading: it classifies the board, reads the markings on the chips, and lists the parts. It is not asked for a cost. If a BOM file is attached, that is the parts list; if drill and Gerber files are attached, the size, layers and via count are measured from them. Then the tool prices every line from its own data: a catalogue of 458 parts, 77 of them read from distributor pages, each with a source and date; a price range for a part it can name; or a class table. The model's figure only picks a point inside the range. On an automotive board the IATF, class 3 and burn-in costs are in the headline. Lines worth a pound or more with no quote behind them are listed to verify. Without a key, the screen is hidden; PCB fabrication and assembly are still costed from typed inputs.</a:t>
             </a:r>
           </a:p>
         </p:txBody>
@@ -1506,7 +1506,7 @@
           <a:lstStyle/>
           <a:p>
             <a:r>
-              <a:t>To close. The learning features are built and tested, as part of a tool with 2,438 automated tests. They work with AI off, there's no extra licence, and the data stays on our own laptop or server. The honest dependency is that it starts empty, and we haven't yet compared any estimate with a price JLR paid. So the ask is three small decisions. One, make Log Actual pounds part of handling every quote. It's one click. Two, import our past quotes as a CSV so the correction doesn't start from nothing. Three, put the background check's findings on the sourcing agenda each month, so someone acts on them. If we do those three things, we'll have real accuracy figures to report back, whatever they turn out to be. Thank you. Happy to take questions.</a:t>
+              <a:t>To close. The learning features are built and tested, as part of a tool with 2,438 automated tests. They work without a key, there's no extra licence, and the data stays on our own laptop or server. The honest dependency is that it starts empty, and we haven't yet compared any estimate with a price JLR paid. So the ask is three small decisions. One, make Log Actual pounds part of handling every quote. It's one click. Two, import our past quotes as a CSV so the correction doesn't start from nothing. Three, put the background check's findings on the sourcing agenda each month, so someone acts on them. If we do those three things, we'll have real accuracy figures to report back, whatever they turn out to be. Thank you. Happy to take questions.</a:t>
             </a:r>
           </a:p>
         </p:txBody>
@@ -5327,7 +5327,7 @@
                 </a:solidFill>
                 <a:latin typeface="Calibri"/>
               </a:rPr>
-              <a:t>The learning is plain arithmetic, so it works with AI switched off.</a:t>
+              <a:t>The learning is plain arithmetic, so it works without an API key.</a:t>
             </a:r>
           </a:p>
         </p:txBody>
@@ -5589,7 +5589,7 @@
                 </a:solidFill>
                 <a:latin typeface="Calibri"/>
               </a:rPr>
-              <a:t>Management briefing  ·  September 2026  ·  AI is switched off in the JLR build</a:t>
+              <a:t>Management briefing  ·  October 2026  ·  AI needs an API key in the JLR build</a:t>
             </a:r>
           </a:p>
         </p:txBody>
@@ -5962,7 +5962,7 @@
                 </a:solidFill>
                 <a:latin typeface="Cambria"/>
               </a:rPr>
-              <a:t>What works with AI off — and what is switched off</a:t>
+              <a:t>What works without an API key — and what needs one</a:t>
             </a:r>
           </a:p>
         </p:txBody>
@@ -6094,7 +6094,7 @@
                 </a:solidFill>
                 <a:latin typeface="Calibri"/>
               </a:rPr>
-              <a:t>Works with AI off: CAD to Cost</a:t>
+              <a:t>Without a key: CAD to Cost</a:t>
             </a:r>
           </a:p>
         </p:txBody>
@@ -6268,7 +6268,7 @@
                 </a:solidFill>
                 <a:latin typeface="Calibri"/>
               </a:rPr>
-              <a:t>Works with AI off: checks and extras</a:t>
+              <a:t>Without a key: checks and extras</a:t>
             </a:r>
           </a:p>
         </p:txBody>
@@ -6442,7 +6442,7 @@
                 </a:solidFill>
                 <a:latin typeface="Calibri"/>
               </a:rPr>
-              <a:t>Switched off at JLR: AI assistant and agent</a:t>
+              <a:t>Needs a key: AI assistant and agent</a:t>
             </a:r>
           </a:p>
         </p:txBody>
@@ -6484,7 +6484,7 @@
                 </a:solidFill>
                 <a:latin typeface="Calibri"/>
               </a:rPr>
-              <a:t>The chat assistant and "describe a part". Built and tested, turned off by a setting. When on, rate-limited per user.</a:t>
+              <a:t>The chat assistant and "describe a part". Built and tested; hidden until a key is added. When on, rate-limited per user.</a:t>
             </a:r>
           </a:p>
         </p:txBody>
@@ -6616,7 +6616,7 @@
                 </a:solidFill>
                 <a:latin typeface="Calibri"/>
               </a:rPr>
-              <a:t>Switched off at JLR: reading photos and text</a:t>
+              <a:t>Needs a key: reading photos and text</a:t>
             </a:r>
           </a:p>
         </p:txBody>
@@ -6658,7 +6658,7 @@
                 </a:solidFill>
                 <a:latin typeface="Calibri"/>
               </a:rPr>
-              <a:t>PCB photo to bill of materials, and reading RFQ free text. The tool says "AI is switched off in this installation".</a:t>
+              <a:t>PCB photo to parts list, and reading RFQ free text. The model reads; the tool prices every line from its own tables.</a:t>
             </a:r>
           </a:p>
         </p:txBody>
@@ -14067,7 +14067,7 @@
                 </a:solidFill>
                 <a:latin typeface="Calibri"/>
               </a:rPr>
-              <a:t>OPTIONAL AI MODE · OFF AT JLR</a:t>
+              <a:t>OPTIONAL AI MODE · NEEDS AN API KEY</a:t>
             </a:r>
           </a:p>
         </p:txBody>
@@ -14109,7 +14109,7 @@
                 </a:solidFill>
                 <a:latin typeface="Cambria"/>
               </a:rPr>
-              <a:t>PCB photo to BOM — built, but switched off at JLR</a:t>
+              <a:t>PCB photo to BOM — the model reads, the tool prices</a:t>
             </a:r>
           </a:p>
         </p:txBody>
@@ -14151,7 +14151,7 @@
                 </a:solidFill>
                 <a:latin typeface="Calibri"/>
               </a:rPr>
-              <a:t>With AI on, a photo of a circuit board becomes a costed bill of materials. Reading the photo needs AI, so </a:t>
+              <a:t>With an API key, photos of a circuit board become a priced parts list and a board cost. </a:t>
             </a:r>
             <a:r>
               <a:rPr sz="1300" b="1" i="0">
@@ -14160,7 +14160,7 @@
                 </a:solidFill>
                 <a:latin typeface="Calibri"/>
               </a:rPr>
-              <a:t>at JLR this screen is hidden.</a:t>
+              <a:t>The model reads; it is not asked for a cost.</a:t>
             </a:r>
           </a:p>
         </p:txBody>
@@ -14248,7 +14248,7 @@
                 </a:solidFill>
                 <a:latin typeface="Calibri"/>
               </a:rPr>
-              <a:t>What works at JLR, with AI off</a:t>
+              <a:t>What works without a key</a:t>
             </a:r>
           </a:p>
         </p:txBody>
@@ -14401,7 +14401,7 @@
                 </a:solidFill>
                 <a:latin typeface="Calibri"/>
               </a:rPr>
-              <a:t>The tool says "AI is switched off in this installation" instead of asking for a key.</a:t>
+              <a:t>The photo screen is hidden until a key is added. Adding one is a setting, not a rebuild.</a:t>
             </a:r>
           </a:p>
         </p:txBody>
@@ -14489,7 +14489,7 @@
                 </a:solidFill>
                 <a:latin typeface="Calibri"/>
               </a:rPr>
-              <a:t>Built for when AI is on</a:t>
+              <a:t>How the photo flow prices a board</a:t>
             </a:r>
           </a:p>
         </p:txBody>
@@ -14575,7 +14575,7 @@
                 </a:solidFill>
                 <a:latin typeface="Calibri"/>
               </a:rPr>
-              <a:t>Complex boards no longer come back empty</a:t>
+              <a:t>A BOM file or drill and Gerber files beat the photo</a:t>
             </a:r>
           </a:p>
         </p:txBody>
@@ -14661,7 +14661,7 @@
                 </a:solidFill>
                 <a:latin typeface="Calibri"/>
               </a:rPr>
-              <a:t>Part prices checked against a catalogue</a:t>
+              <a:t>Every line priced from a 458-part catalogue or a class table</a:t>
             </a:r>
           </a:p>
         </p:txBody>
@@ -14747,7 +14747,7 @@
                 </a:solidFill>
                 <a:latin typeface="Calibri"/>
               </a:rPr>
-              <a:t>One misread part can no longer skew the total</a:t>
+              <a:t>Chip markings read in the photos are matched to the list</a:t>
             </a:r>
           </a:p>
         </p:txBody>
@@ -14833,7 +14833,7 @@
                 </a:solidFill>
                 <a:latin typeface="Calibri"/>
               </a:rPr>
-              <a:t>The board spec is steadied between runs</a:t>
+              <a:t>Automotive grade (IATF, class 3, burn-in) is in the headline</a:t>
             </a:r>
           </a:p>
         </p:txBody>
@@ -14919,7 +14919,7 @@
                 </a:solidFill>
                 <a:latin typeface="Calibri"/>
               </a:rPr>
-              <a:t>The £ to trust is split from the £ to verify</a:t>
+              <a:t>The £ priced is split from the £ to verify</a:t>
             </a:r>
           </a:p>
         </p:txBody>
@@ -15007,7 +15007,7 @@
                 </a:solidFill>
                 <a:latin typeface="Calibri"/>
               </a:rPr>
-              <a:t>If switched on later:  </a:t>
+              <a:t>With a key:  </a:t>
             </a:r>
             <a:r>
               <a:rPr sz="1200" b="0" i="0">
@@ -15016,7 +15016,7 @@
                 </a:solidFill>
                 <a:latin typeface="Calibri"/>
               </a:rPr>
-              <a:t>it is a setting, not a rebuild. Each AI call is rate-limited per user, and lines it cannot match to the catalogue are flagged for an engineer to check.</a:t>
+              <a:t>each AI call is rate-limited per user. Lines worth £1 or more with no quote behind the price are listed for an engineer to check. The screen, the PDF and the parts library show the same number.</a:t>
             </a:r>
           </a:p>
         </p:txBody>
@@ -17205,7 +17205,7 @@
                 </a:solidFill>
                 <a:latin typeface="Calibri"/>
               </a:rPr>
-              <a:t>AI off</a:t>
+              <a:t>No key needed</a:t>
             </a:r>
           </a:p>
         </p:txBody>
@@ -22104,7 +22104,7 @@
                 </a:solidFill>
                 <a:latin typeface="Calibri"/>
               </a:rPr>
-              <a:t>Works with AI off: nothing here needs AI</a:t>
+              <a:t>Without a key: nothing here needs AI</a:t>
             </a:r>
           </a:p>
         </p:txBody>
